--- a/docs/Panduan Korlas dan Admin Pizza Snack Play/Panduan Korlas dan Admin Pizza Snack Play.pptx
+++ b/docs/Panduan Korlas dan Admin Pizza Snack Play/Panduan Korlas dan Admin Pizza Snack Play.pptx
@@ -5,7 +5,7 @@
     <p:sldMasterId id="2147483648" r:id="rId0"/>
   </p:sldMasterIdLst>
   <p:notesMasterIdLst>
-    <p:notesMasterId r:id="rId19"/>
+    <p:notesMasterId r:id="rId20"/>
   </p:notesMasterIdLst>
   <p:sldIdLst>
     <p:sldId id="256" r:id="rId1"/>
@@ -26,6 +26,7 @@
     <p:sldId id="271" r:id="rId16"/>
     <p:sldId id="272" r:id="rId17"/>
     <p:sldId id="273" r:id="rId18"/>
+    <p:sldId id="274" r:id="rId19"/>
   </p:sldIdLst>
   <p:sldSz cx="12192000" cy="6858000"/>
   <p:notesSz cx="6858000" cy="12192000"/>
@@ -1075,7 +1076,7 @@
           <p:nvPr/>
         </p:nvPicPr>
         <p:blipFill>
-          <a:blip r:embed="rId1">
+          <a:blip>
             <a:extLst>
               <a:ext uri="{96DAC541-7B7A-43D3-8B79-37D633B846F1}">
                 <asvg:svgBlip r:embed="rId1"/>
@@ -1354,7 +1355,7 @@
           <p:nvPr/>
         </p:nvPicPr>
         <p:blipFill>
-          <a:blip r:embed="rId3">
+          <a:blip>
             <a:extLst>
               <a:ext uri="{96DAC541-7B7A-43D3-8B79-37D633B846F1}">
                 <asvg:svgBlip r:embed="rId3"/>
@@ -1421,7 +1422,7 @@
   <p:cSld>
     <p:spTree>
       <p:nvGrpSpPr>
-        <p:cNvPr id="16" name="" descr="&lt;Slide&#10;    style={{&#10;        width: '1280px',&#10;        height: '720px',&#10;        background: '#FAF7F2',&#10;        paddingTop: 20,&#10;        paddingBottom: 20,&#10;        paddingLeft: 64,&#10;        paddingRight: 64,&#10;        position: 'relative',&#10;        overflow: 'hidden',&#10;    }}&#10;&gt;&#10;    &lt;Box&#10;        style={{&#10;            position: 'absolute',&#10;            bottom: -130,&#10;            left: -110,&#10;            width: 380,&#10;            height: 380,&#10;            borderRadius: 190,&#10;            background: 'linear-gradient(135deg, #AFC440 0%, #F3B26C 100%)',&#10;            opacity: 0.12,&#10;        }}&#10;    /&gt;&#10;&#10;    {/* ── A · blok judul ── */}&#10;    &lt;Box style={{ height: 110, justifyContent: 'center' }}&gt;&#10;        &lt;Text&#10;            style={{&#10;                fontSize: 34,&#10;                fontWeight: 'bold',&#10;                color: '#51277C',&#10;                fontFamily: 'Trebuchet MS',&#10;                lineHeight: 1.3,&#10;            }}&#10;        &gt;&#10;            Tempel teks dari sekolah&#10;        &lt;/Text&gt;&#10;        &lt;Box style={{ marginTop: 10, width: 72, height: 6, borderRadius: 3, background: '#F3B26C' }} /&gt;&#10;    &lt;/Box&gt;&#10;&#10;    {/* ── B · area konten ── */}&#10;    &lt;Box style={{ height: 530, flexDirection: 'row', gap: 34, position: 'relative', zIndex: 1 }}&gt;&#10;        {/* kiri 45% · pesan */}&#10;        &lt;Box style={{ width: '45%', height: '100%', justifyContent: 'center' }}&gt;&#10;            &lt;Text&#10;                style={{&#10;                    fontSize: 44,&#10;                    fontWeight: 'bold',&#10;                    color: '#51277C',&#10;                    fontFamily: 'Trebuchet MS',&#10;                    lineHeight: 1.15,&#10;                }}&#10;            &gt;&#10;                Tidak perlu{'\n'}ketik ulang.&#10;            &lt;/Text&gt;&#10;&#10;            &lt;Text&#10;                style={{&#10;                    marginTop: 20,&#10;                    fontSize: 19,&#10;                    color: '#2A2333',&#10;                    fontFamily: 'Verdana',&#10;                    lineHeight: 1.55,&#10;                }}&#10;            &gt;&#10;                Jadwal yang dikirim sekolah lewat WhatsApp bisa ditempel apa adanya. Aplikasi&#10;                membaca rentang tanggal dan baris harinya sendiri.&#10;            &lt;/Text&gt;&#10;&#10;            &lt;Box style={{ marginTop: 18 }}&gt;&#10;                {[&#10;                    'Pratinjau ditampilkan lebih dulu — bisa dibatalkan',&#10;                    'Tanggal yang sudah ada jadwalnya dilewati, jadi tempel ulang aman',&#10;                    'Hasilnya masuk sebagai jadwal yang masih bisa diubah',&#10;                ].map((s, i) =&gt; (&#10;                    &lt;Box key={i} style={{ flexDirection: 'row', alignItems: 'center', gap: 10, marginTop: 9 }}&gt;&#10;                        &lt;svg width={20} height={20} viewBox='0 0 24 24'&gt;&#10;                            &lt;path d='M5 13l4 4 10-11' fill='none' stroke='#AFC440' strokeWidth='3' strokeLinecap='round' strokeLinejoin='round' /&gt;&#10;                        &lt;/svg&gt;&#10;                        &lt;Text style={{ flex: 1, fontSize: 17, color: '#6B6478', fontFamily: 'Verdana', lineHeight: 1.45 }}&gt;&#10;                            {s}&#10;                        &lt;/Text&gt;&#10;                    &lt;/Box&gt;&#10;                ))}&#10;            &lt;/Box&gt;&#10;&#10;            &lt;Box&#10;                style={{&#10;                    marginTop: 22,&#10;                    alignSelf: 'flex-start',&#10;                    flexDirection: 'row',&#10;                    alignItems: 'center',&#10;                    gap: 10,&#10;                    background: '#51277C',&#10;                    borderRadius: 12,&#10;                    paddingTop: 12,&#10;                    paddingBottom: 12,&#10;                    paddingLeft: 22,&#10;                    paddingRight: 22,&#10;                }}&#10;            &gt;&#10;                &lt;svg width={22} height={22} viewBox='0 0 24 24'&gt;&#10;                    &lt;path d='M9 3h6v3H9z' fill='#F3B26C' /&gt;&#10;                    &lt;path d='M6 5h12v16H6z' fill='none' stroke='#F3B26C' strokeWidth='2' /&gt;&#10;                &lt;/svg&gt;&#10;                &lt;Text style={{ fontSize: 18, color: '#FFFFFF', fontFamily: 'Verdana', fontWeight: 'bold' }}&gt;&#10;                    Tombol: Impor Jadwal&#10;                &lt;/Text&gt;&#10;            &lt;/Box&gt;&#10;        &lt;/Box&gt;&#10;&#10;        {/* kanan 55% · ilustrasi tempel → pratinjau */}&#10;        &lt;Box&#10;            style={{&#10;                width: '55%',&#10;                height: '100%',&#10;                background: 'rgba(81,39,124,0.06)',&#10;                borderRadius: 20,&#10;                justifyContent: 'center',&#10;                alignItems: 'center',&#10;            }}&#10;        &gt;&#10;            &lt;svg width={580} height={450} viewBox='0 0 580 450'&gt;&#10;                {/* teks asal */}&#10;                &lt;rect x='12' y='12' width='556' height='176' rx='16' fill='#FFFFFF' stroke='#E6DFD2' strokeWidth='2' /&gt;&#10;                &lt;circle cx='44' cy='44' r='14' fill='#AFC440' /&gt;&#10;                &lt;rect x='70' y='38' width='150' height='11' rx='5' fill='#DED7CB' /&gt;&#10;                &lt;rect x='34' y='80' width='160' height='10' rx='5' fill='#51277C' opacity='0.65' /&gt;&#10;                &lt;rect x='34' y='106' width='214' height='10' rx='5' fill='#DED7CB' /&gt;&#10;                &lt;rect x='34' y='132' width='188' height='10' rx='5' fill='#DED7CB' /&gt;&#10;                &lt;rect x='34' y='158' width='150' height='10' rx='5' fill='#DED7CB' /&gt;&#10;                &lt;text x='300' y='112' fontFamily='Verdana' fontSize='14' fill='#6B6478'&gt;Kamis : Puding + jeruk&lt;/text&gt;&#10;                &lt;text x='300' y='140' fontFamily='Verdana' fontSize='14' fill='#6B6478'&gt;Jumat : Donat + melon&lt;/text&gt;&#10;&#10;                {/* panah */}&#10;                &lt;path d='M290 196v46' stroke='#F3B26C' strokeWidth='6' strokeLinecap='round' /&gt;&#10;                &lt;path d='M276 234l14 16 14-16' fill='none' stroke='#F3B26C' strokeWidth='6' strokeLinecap='round' strokeLinejoin='round' /&gt;&#10;                &lt;text x='318' y='228' fontFamily='Verdana' fontSize='15' fill='#51277C'&gt;pratinjau&lt;/text&gt;&#10;&#10;                {/* pratinjau */}&#10;                &lt;rect x='12' y='258' width='556' height='180' rx='16' fill='#51277C' /&gt;&#10;                &lt;text x='40' y='294' fontFamily='Trebuchet MS' fontSize='21' fontWeight='bold' fill='#FFFFFF'&gt;&#10;                    Pratinjau — 12 baris baru&#10;                &lt;/text&gt;&#10;                &lt;rect x='40' y='312' width='500' height='34' rx='8' fill='rgba(255,255,255,0.16)' /&gt;&#10;                &lt;text x='58' y='335' fontFamily='Verdana' fontSize='14' fill='#FFFFFF'&gt;Kamis, 2 Okt&lt;/text&gt;&#10;                &lt;text x='230' y='335' fontFamily='Verdana' fontSize='14' fill='#EFEAE1'&gt;Puding + jeruk&lt;/text&gt;&#10;                &lt;rect x='40' y='354' width='500' height='34' rx='8' fill='rgba(255,255,255,0.16)' /&gt;&#10;                &lt;text x='58' y='377' fontFamily='Verdana' fontSize='14' fill='#FFFFFF'&gt;Jumat, 3 Okt&lt;/text&gt;&#10;                &lt;text x='230' y='377' fontFamily='Verdana' fontSize='14' fill='#EFEAE1'&gt;Donat + melon&lt;/text&gt;&#10;                &lt;rect x='392' y='400' width='148' height='26' rx='13' fill='#F3B26C' /&gt;&#10;                &lt;text x='466' y='419' fontFamily='Verdana' fontSize='14' fontWeight='bold' fill='#51277C' textAnchor='middle'&gt;&#10;                    Impor&#10;                &lt;/text&gt;&#10;            &lt;/svg&gt;&#10;        &lt;/Box&gt;&#10;    &lt;/Box&gt;&#10;&#10;    {/* ── C · bilah kaki ── */}&#10;    &lt;Box&#10;        style={{&#10;            height: 40,&#10;            flexDirection: 'row',&#10;            alignItems: 'center',&#10;            justifyContent: 'space-between',&#10;        }}&#10;    &gt;&#10;        &lt;Text style={{ fontSize: 14, color: '#6B6478', fontFamily: 'Verdana' }}&gt;&#10;            Pizza Snack Play · Panduan Korlas &amp;amp; Admin&#10;        &lt;/Text&gt;&#10;        &lt;Text style={{ fontSize: 14, color: '#6B6478', fontFamily: 'Verdana' }}&gt;10 / 18&lt;/Text&gt;&#10;    &lt;/Box&gt;&#10;&lt;/Slide&gt;&#10;"/>
+        <p:cNvPr id="16" name=""/>
         <p:cNvGrpSpPr/>
         <p:nvPr/>
       </p:nvGrpSpPr>
@@ -1454,7 +1455,10 @@
         </p:spPr>
         <p:txBody>
           <a:bodyPr/>
-          <a:p/>
+          <a:p>
+            <a:pPr/>
+            <a:endParaRPr/>
+          </a:p>
         </p:txBody>
       </p:sp>
       <p:sp>
@@ -1515,7 +1519,10 @@
         </p:spPr>
         <p:txBody>
           <a:bodyPr/>
-          <a:p/>
+          <a:p>
+            <a:pPr/>
+            <a:endParaRPr/>
+          </a:p>
         </p:txBody>
       </p:sp>
       <p:sp>
@@ -1582,7 +1589,7 @@
                 <a:latin typeface="Verdana"/>
                 <a:ea typeface="Verdana"/>
               </a:rPr>
-              <a:t>10 / 18</a:t>
+              <a:t>10 / 19</a:t>
             </a:r>
             <a:endParaRPr/>
           </a:p>
@@ -1649,7 +1656,10 @@
         </p:spPr>
         <p:txBody>
           <a:bodyPr/>
-          <a:p/>
+          <a:p>
+            <a:pPr/>
+            <a:endParaRPr/>
+          </a:p>
         </p:txBody>
       </p:sp>
       <p:sp>
@@ -1751,7 +1761,7 @@
           <p:nvPr/>
         </p:nvPicPr>
         <p:blipFill>
-          <a:blip r:embed="rId1">
+          <a:blip>
             <a:extLst>
               <a:ext uri="{96DAC541-7B7A-43D3-8B79-37D633B846F1}">
                 <asvg:svgBlip r:embed="rId1"/>
@@ -1817,7 +1827,7 @@
           <p:nvPr/>
         </p:nvPicPr>
         <p:blipFill>
-          <a:blip r:embed="rId1">
+          <a:blip>
             <a:extLst>
               <a:ext uri="{96DAC541-7B7A-43D3-8B79-37D633B846F1}">
                 <asvg:svgBlip r:embed="rId1"/>
@@ -1885,7 +1895,7 @@
           <p:nvPr/>
         </p:nvPicPr>
         <p:blipFill>
-          <a:blip r:embed="rId1">
+          <a:blip>
             <a:extLst>
               <a:ext uri="{96DAC541-7B7A-43D3-8B79-37D633B846F1}">
                 <asvg:svgBlip r:embed="rId1"/>
@@ -1967,7 +1977,10 @@
         </p:spPr>
         <p:txBody>
           <a:bodyPr/>
-          <a:p/>
+          <a:p>
+            <a:pPr/>
+            <a:endParaRPr/>
+          </a:p>
         </p:txBody>
       </p:sp>
       <p:pic>
@@ -1979,7 +1992,7 @@
           <p:nvPr/>
         </p:nvPicPr>
         <p:blipFill>
-          <a:blip r:embed="rId2">
+          <a:blip>
             <a:extLst>
               <a:ext uri="{96DAC541-7B7A-43D3-8B79-37D633B846F1}">
                 <asvg:svgBlip r:embed="rId2"/>
@@ -2061,7 +2074,10 @@
         </p:spPr>
         <p:txBody>
           <a:bodyPr/>
-          <a:p/>
+          <a:p>
+            <a:pPr/>
+            <a:endParaRPr/>
+          </a:p>
         </p:txBody>
       </p:sp>
       <p:pic>
@@ -2073,7 +2089,7 @@
           <p:nvPr/>
         </p:nvPicPr>
         <p:blipFill>
-          <a:blip r:embed="rId3">
+          <a:blip>
             <a:extLst>
               <a:ext uri="{96DAC541-7B7A-43D3-8B79-37D633B846F1}">
                 <asvg:svgBlip r:embed="rId3"/>
@@ -2105,7 +2121,7 @@
   <p:cSld>
     <p:spTree>
       <p:nvGrpSpPr>
-        <p:cNvPr id="36" name="" descr="&lt;Slide&#10;    style={{&#10;        width: '1280px',&#10;        height: '720px',&#10;        background: '#FAF7F2',&#10;        paddingTop: 20,&#10;        paddingBottom: 20,&#10;        paddingLeft: 64,&#10;        paddingRight: 64,&#10;    }}&#10;&gt;&#10;    {/* ── A · blok judul ── */}&#10;    &lt;Box style={{ height: 110, justifyContent: 'center' }}&gt;&#10;        &lt;Text&#10;            style={{&#10;                fontSize: 34,&#10;                fontWeight: 'bold',&#10;                color: '#51277C',&#10;                fontFamily: 'Trebuchet MS',&#10;                lineHeight: 1.3,&#10;            }}&#10;        &gt;&#10;            Petugas piket: siapa yang ambil snack&#10;        &lt;/Text&gt;&#10;        &lt;Box style={{ marginTop: 10, width: 72, height: 6, borderRadius: 3, background: '#51277C' }} /&gt;&#10;    &lt;/Box&gt;&#10;&#10;    {/* ── B · area konten ── */}&#10;    &lt;Box style={{ height: 530, flexDirection: 'row', gap: 26 }}&gt;&#10;        {/* kiri 30% · penanda */}&#10;        &lt;Box&#10;            style={{&#10;                width: '30%',&#10;                height: '100%',&#10;                background: 'linear-gradient(135deg, #51277C 0%, #7A45A8 100%)',&#10;                borderRadius: 18,&#10;                padding: 26,&#10;                justifyContent: 'space-between',&#10;            }}&#10;        &gt;&#10;            &lt;Box&gt;&#10;                &lt;Text&#10;                    style={{&#10;                        fontSize: 30,&#10;                        fontWeight: 'bold',&#10;                        color: '#FFFFFF',&#10;                        fontFamily: 'Trebuchet MS',&#10;                        lineHeight: 1.25,&#10;                    }}&#10;                &gt;&#10;                    Satu tanggal,{'\n'}satu petugas&#10;                &lt;/Text&gt;&#10;                &lt;Box style={{ marginTop: 16, width: 64, height: 5, borderRadius: 3, background: '#F3B26C' }} /&gt;&#10;            &lt;/Box&gt;&#10;            &lt;Text&#10;                style={{&#10;                    fontSize: 17,&#10;                    color: 'rgba(255,255,255,0.88)',&#10;                    fontFamily: 'Verdana',&#10;                    lineHeight: 1.5,&#10;                }}&#10;            &gt;&#10;                Nama petugas yang Anda isi akan tampil ke orang tua sekalian nama orang tuanya.&#10;            &lt;/Text&gt;&#10;        &lt;/Box&gt;&#10;&#10;        {/* kanan 70% · tiga poin + ilustrasi dropdown */}&#10;        &lt;Box style={{ width: '70%', height: '100%', flexDirection: 'row', gap: 22 }}&gt;&#10;            &lt;Box style={{ flex: 1, height: '100%', justifyContent: 'space-between' }}&gt;&#10;                {[&#10;                    {&#10;                        t: 'Pilih dari daftar siswa',&#10;                        d: 'Kolom petugas berisi nama siswa di kelas Anda. Nama orang tuanya terisi sendiri.',&#10;                    },&#10;                    {&#10;                        t: 'Biarkan kosong bila perlu',&#10;                        d: 'Tanggal tanpa petugas bisa diambil sendiri orang tua — siapa cepat dia dapat.',&#10;                    },&#10;                    {&#10;                        t: 'Tidak ikut direbut orang tua',&#10;                        d: 'Ditandai &quot;Ditetapkan korlas&quot;, jadi tidak ada dua orang merasa sudah dapat.',&#10;                    },&#10;                ].map((it, i) =&gt; (&#10;                    &lt;Box&#10;                        key={i}&#10;                        style={{&#10;                            height: 165,&#10;                            background: '#FFFFFF',&#10;                            borderRadius: 16,&#10;                            boxShadow: '0 4px 20px rgba(0,0,0,0.08)',&#10;                            padding: 22,&#10;                            borderLeft: '8px solid #AFC440',&#10;                        }}&#10;                    &gt;&#10;                        &lt;Text&#10;                            style={{&#10;                                fontSize: 23,&#10;                                fontWeight: 'bold',&#10;                                color: '#51277C',&#10;                                fontFamily: 'Trebuchet MS',&#10;                                lineHeight: 1.3,&#10;                            }}&#10;                        &gt;&#10;                            {it.t}&#10;                        &lt;/Text&gt;&#10;                        &lt;Text&#10;                            style={{&#10;                                marginTop: 9,&#10;                                fontSize: 17,&#10;                                color: '#6B6478',&#10;                                fontFamily: 'Verdana',&#10;                                lineHeight: 1.5,&#10;                            }}&#10;                        &gt;&#10;                            {it.d}&#10;                        &lt;/Text&gt;&#10;                    &lt;/Box&gt;&#10;                ))}&#10;            &lt;/Box&gt;&#10;&#10;            &lt;Box&#10;                style={{&#10;                    width: 300,&#10;                    height: '100%',&#10;                    background: 'rgba(81,39,124,0.06)',&#10;                    borderRadius: 18,&#10;                    justifyContent: 'center',&#10;                    alignItems: 'center',&#10;                }}&#10;            &gt;&#10;                &lt;svg width={276} height={300} viewBox='0 0 276 300'&gt;&#10;                    &lt;text x='14' y='26' fontFamily='Verdana' fontSize='14' fill='#6B6478'&gt;Petugas&lt;/text&gt;&#10;                    &lt;rect x='14' y='38' width='248' height='48' rx='10' fill='#FFFFFF' stroke='#51277C' strokeWidth='2' /&gt;&#10;                    &lt;text x='34' y='68' fontFamily='Verdana' fontSize='16' fill='#51277C'&gt;Rafa Aditya&lt;/text&gt;&#10;                    &lt;path d='M232 58l16 12-16 12z' fill='#51277C' /&gt;&#10;&#10;                    &lt;rect x='14' y='94' width='248' height='112' rx='10' fill='#FFFFFF' stroke='#E6DFD2' strokeWidth='2' /&gt;&#10;                    &lt;rect x='14' y='94' width='248' height='36' rx='10' fill='rgba(81,39,124,0.10)' /&gt;&#10;                    &lt;text x='34' y='117' fontFamily='Verdana' fontSize='15' fontWeight='bold' fill='#51277C'&gt;Rafa Aditya&lt;/text&gt;&#10;                    &lt;text x='34' y='148' fontFamily='Verdana' fontSize='15' fill='#2A2333'&gt;Dinda&lt;/text&gt;&#10;                    &lt;text x='34' y='178' fontFamily='Verdana' fontSize='15' fill='#2A2333'&gt;Bayu&lt;/text&gt;&#10;&#10;                    &lt;text x='14' y='234' fontFamily='Verdana' fontSize='14' fill='#6B6478'&gt;Orang tua (terisi sendiri)&lt;/text&gt;&#10;                    &lt;rect x='14' y='246' width='248' height='44' rx='10' fill='#EFEAE1' /&gt;&#10;                    &lt;text x='34' y='274' fontFamily='Verdana' fontSize='15' fill='#6B6478'&gt;Ibu Rina&lt;/text&gt;&#10;                &lt;/svg&gt;&#10;            &lt;/Box&gt;&#10;        &lt;/Box&gt;&#10;    &lt;/Box&gt;&#10;&#10;    {/* ── C · bilah kaki ── */}&#10;    &lt;Box&#10;        style={{&#10;            height: 40,&#10;            flexDirection: 'row',&#10;            alignItems: 'center',&#10;            justifyContent: 'space-between',&#10;        }}&#10;    &gt;&#10;        &lt;Text style={{ fontSize: 14, color: '#6B6478', fontFamily: 'Verdana' }}&gt;&#10;            Pizza Snack Play · Panduan Korlas &amp;amp; Admin&#10;        &lt;/Text&gt;&#10;        &lt;Text style={{ fontSize: 14, color: '#6B6478', fontFamily: 'Verdana' }}&gt;11 / 18&lt;/Text&gt;&#10;    &lt;/Box&gt;&#10;&lt;/Slide&gt;&#10;"/>
+        <p:cNvPr id="36" name=""/>
         <p:cNvGrpSpPr/>
         <p:nvPr/>
       </p:nvGrpSpPr>
@@ -2138,7 +2154,10 @@
         </p:spPr>
         <p:txBody>
           <a:bodyPr/>
-          <a:p/>
+          <a:p>
+            <a:pPr/>
+            <a:endParaRPr/>
+          </a:p>
         </p:txBody>
       </p:sp>
       <p:sp>
@@ -2199,7 +2218,10 @@
         </p:spPr>
         <p:txBody>
           <a:bodyPr/>
-          <a:p/>
+          <a:p>
+            <a:pPr/>
+            <a:endParaRPr/>
+          </a:p>
         </p:txBody>
       </p:sp>
       <p:sp>
@@ -2233,7 +2255,10 @@
         </p:spPr>
         <p:txBody>
           <a:bodyPr/>
-          <a:p/>
+          <a:p>
+            <a:pPr/>
+            <a:endParaRPr/>
+          </a:p>
         </p:txBody>
       </p:sp>
       <p:sp>
@@ -2312,7 +2337,10 @@
         </p:spPr>
         <p:txBody>
           <a:bodyPr/>
-          <a:p/>
+          <a:p>
+            <a:pPr/>
+            <a:endParaRPr/>
+          </a:p>
         </p:txBody>
       </p:sp>
       <p:sp>
@@ -2384,7 +2412,10 @@
         </p:spPr>
         <p:txBody>
           <a:bodyPr/>
-          <a:p/>
+          <a:p>
+            <a:pPr/>
+            <a:endParaRPr/>
+          </a:p>
         </p:txBody>
       </p:sp>
       <p:sp>
@@ -2441,7 +2472,10 @@
         </p:spPr>
         <p:txBody>
           <a:bodyPr/>
-          <a:p/>
+          <a:p>
+            <a:pPr/>
+            <a:endParaRPr/>
+          </a:p>
         </p:txBody>
       </p:sp>
       <p:sp>
@@ -2546,7 +2580,10 @@
         </p:spPr>
         <p:txBody>
           <a:bodyPr/>
-          <a:p/>
+          <a:p>
+            <a:pPr/>
+            <a:endParaRPr/>
+          </a:p>
         </p:txBody>
       </p:sp>
       <p:sp>
@@ -2603,7 +2640,10 @@
         </p:spPr>
         <p:txBody>
           <a:bodyPr/>
-          <a:p/>
+          <a:p>
+            <a:pPr/>
+            <a:endParaRPr/>
+          </a:p>
         </p:txBody>
       </p:sp>
       <p:sp>
@@ -2708,7 +2748,10 @@
         </p:spPr>
         <p:txBody>
           <a:bodyPr/>
-          <a:p/>
+          <a:p>
+            <a:pPr/>
+            <a:endParaRPr/>
+          </a:p>
         </p:txBody>
       </p:sp>
       <p:sp>
@@ -2765,7 +2808,10 @@
         </p:spPr>
         <p:txBody>
           <a:bodyPr/>
-          <a:p/>
+          <a:p>
+            <a:pPr/>
+            <a:endParaRPr/>
+          </a:p>
         </p:txBody>
       </p:sp>
       <p:sp>
@@ -2865,7 +2911,10 @@
         </p:spPr>
         <p:txBody>
           <a:bodyPr/>
-          <a:p/>
+          <a:p>
+            <a:pPr/>
+            <a:endParaRPr/>
+          </a:p>
         </p:txBody>
       </p:sp>
       <p:pic>
@@ -2877,7 +2926,7 @@
           <p:nvPr/>
         </p:nvPicPr>
         <p:blipFill>
-          <a:blip r:embed="rId1">
+          <a:blip>
             <a:extLst>
               <a:ext uri="{96DAC541-7B7A-43D3-8B79-37D633B846F1}">
                 <asvg:svgBlip r:embed="rId1"/>
@@ -2963,7 +3012,7 @@
                 <a:latin typeface="Verdana"/>
                 <a:ea typeface="Verdana"/>
               </a:rPr>
-              <a:t>11 / 18</a:t>
+              <a:t>11 / 19</a:t>
             </a:r>
             <a:endParaRPr/>
           </a:p>
@@ -3434,7 +3483,7 @@
           <p:nvPr/>
         </p:nvPicPr>
         <p:blipFill>
-          <a:blip r:embed="rId1">
+          <a:blip>
             <a:alphaModFix amt="16000"/>
             <a:extLst>
               <a:ext uri="{96DAC541-7B7A-43D3-8B79-37D633B846F1}">
@@ -3658,7 +3707,7 @@
   <p:cSld>
     <p:spTree>
       <p:nvGrpSpPr>
-        <p:cNvPr id="69" name="" descr="&lt;Slide&#10;    style={{&#10;        width: '1280px',&#10;        height: '720px',&#10;        background: '#FAF7F2',&#10;        paddingTop: 20,&#10;        paddingBottom: 20,&#10;        paddingLeft: 64,&#10;        paddingRight: 64,&#10;        position: 'relative',&#10;        overflow: 'hidden',&#10;    }}&#10;&gt;&#10;    &lt;Box&#10;        style={{&#10;            position: 'absolute',&#10;            bottom: -140,&#10;            right: -110,&#10;            width: 460,&#10;            height: 460,&#10;            borderRadius: 230,&#10;            background: 'linear-gradient(135deg, #51277C 0%, #7A45A8 100%)',&#10;            opacity: 0.09,&#10;        }}&#10;    /&gt;&#10;&#10;    {/* ── A · blok judul ── */}&#10;    &lt;Box style={{ height: 110, justifyContent: 'center' }}&gt;&#10;        &lt;Text&#10;            style={{&#10;                fontSize: 34,&#10;                fontWeight: 'bold',&#10;                color: '#51277C',&#10;                fontFamily: 'Trebuchet MS',&#10;                lineHeight: 1.3,&#10;            }}&#10;        &gt;&#10;            Terkunci, lalu terbit&#10;        &lt;/Text&gt;&#10;        &lt;Box style={{ marginTop: 10, width: 72, height: 6, borderRadius: 3, background: '#F3B26C' }} /&gt;&#10;    &lt;/Box&gt;&#10;&#10;    {/* ── B · area konten ── */}&#10;    &lt;Box style={{ height: 530, flexDirection: 'row', gap: 34, position: 'relative', zIndex: 1 }}&gt;&#10;        {/* kiri 55% · frasa raksasa */}&#10;        &lt;Box style={{ width: '55%', height: '100%', justifyContent: 'center' }}&gt;&#10;            &lt;Text&#10;                style={{&#10;                    fontSize: 64,&#10;                    fontWeight: 'bold',&#10;                    color: '#51277C',&#10;                    fontFamily: 'Trebuchet MS',&#10;                    lineHeight: 1.1,&#10;                }}&#10;            &gt;&#10;                Kunci dulu,{'\n'}baru terbit.&#10;            &lt;/Text&gt;&#10;&#10;            &lt;Text&#10;                style={{&#10;                    marginTop: 22,&#10;                    fontSize: 19,&#10;                    color: '#2A2333',&#10;                    fontFamily: 'Verdana',&#10;                    lineHeight: 1.55,&#10;                }}&#10;            &gt;&#10;                Orang tua baru melihat jadwal setelah diterbitkan. Selama belum, jadwalnya&#10;                tetap tersimpan — hanya belum diumumkan.&#10;            &lt;/Text&gt;&#10;&#10;            &lt;Box&#10;                style={{&#10;                    marginTop: 24,&#10;                    background: 'rgba(243,178,108,0.22)',&#10;                    borderRadius: 14,&#10;                    borderLeft: '8px solid #F3B26C',&#10;                    padding: 18,&#10;                }}&#10;            &gt;&#10;                &lt;Text&#10;                    style={{&#10;                        fontSize: 18,&#10;                        color: '#2A2333',&#10;                        fontFamily: 'Verdana',&#10;                        lineHeight: 1.5,&#10;                    }}&#10;                &gt;&#10;                    Publikasi menolak selama masih ada hari yang belum dikunci. Selesaikan&#10;                    semuanya lebih dulu, baru tekan Publikasi.&#10;                &lt;/Text&gt;&#10;            &lt;/Box&gt;&#10;        &lt;/Box&gt;&#10;&#10;        {/* kanan 45% · tiga status */}&#10;        &lt;Box&#10;            style={{&#10;                width: '45%',&#10;                height: '100%',&#10;                background: 'rgba(81,39,124,0.06)',&#10;                borderRadius: 20,&#10;                justifyContent: 'center',&#10;                alignItems: 'center',&#10;            }}&#10;        &gt;&#10;            &lt;svg width={430} height={430} viewBox='0 0 430 430'&gt;&#10;                {/* 1 · masih bisa diubah */}&#10;                &lt;rect x='18' y='14' width='394' height='112' rx='16' fill='#FFFFFF' stroke='#DED7CB' strokeWidth='2' /&gt;&#10;                &lt;circle cx='66' cy='70' r='26' fill='#DED7CB' /&gt;&#10;                &lt;text x='66' y='80' fontFamily='Trebuchet MS' fontSize='24' fontWeight='bold' fill='#FFFFFF' textAnchor='middle'&gt;&#10;                    1&#10;                &lt;/text&gt;&#10;                &lt;text x='110' y='62' fontFamily='Trebuchet MS' fontSize='22' fontWeight='bold' fill='#51277C'&gt;&#10;                    Masih bisa diubah&#10;                &lt;/text&gt;&#10;                &lt;text x='110' y='94' fontFamily='Verdana' fontSize='15' fill='#6B6478'&gt;&#10;                    disusun korlas&#10;                &lt;/text&gt;&#10;&#10;                {/* 2 · dikunci */}&#10;                &lt;rect x='18' y='152' width='394' height='112' rx='16' fill='#FFFFFF' stroke='#AFC440' strokeWidth='3' /&gt;&#10;                &lt;circle cx='66' cy='208' r='26' fill='#AFC440' /&gt;&#10;                &lt;text x='66' y='218' fontFamily='Trebuchet MS' fontSize='24' fontWeight='bold' fill='#FFFFFF' textAnchor='middle'&gt;&#10;                    2&#10;                &lt;/text&gt;&#10;                &lt;text x='110' y='200' fontFamily='Trebuchet MS' fontSize='22' fontWeight='bold' fill='#51277C'&gt;&#10;                    Dikunci&#10;                &lt;/text&gt;&#10;                &lt;text x='110' y='232' fontFamily='Verdana' fontSize='15' fill='#6B6478'&gt;&#10;                    sudah tidak bisa diedit&#10;                &lt;/text&gt;&#10;&#10;                {/* 3 · terbit */}&#10;                &lt;rect x='18' y='290' width='394' height='126' rx='16' fill='#51277C' /&gt;&#10;                &lt;circle cx='66' cy='352' r='26' fill='#F3B26C' /&gt;&#10;                &lt;text x='66' y='362' fontFamily='Trebuchet MS' fontSize='24' fontWeight='bold' fill='#51277C' textAnchor='middle'&gt;&#10;                    3&#10;                &lt;/text&gt;&#10;                &lt;text x='110' y='344' fontFamily='Trebuchet MS' fontSize='22' fontWeight='bold' fill='#FFFFFF'&gt;&#10;                    Terbit ke orang tua&#10;                &lt;/text&gt;&#10;                &lt;text x='110' y='376' fontFamily='Verdana' fontSize='15' fill='#EFEAE1'&gt;&#10;                    tampil di HP mereka&#10;                &lt;/text&gt;&#10;                &lt;text x='110' y='400' fontFamily='Verdana' fontSize='14' fill='#F3B26C'&gt;&#10;                    revisi? minta admin membuka kunci&#10;                &lt;/text&gt;&#10;            &lt;/svg&gt;&#10;        &lt;/Box&gt;&#10;    &lt;/Box&gt;&#10;&#10;    {/* ── C · bilah kaki ── */}&#10;    &lt;Box&#10;        style={{&#10;            height: 40,&#10;            flexDirection: 'row',&#10;            alignItems: 'center',&#10;            justifyContent: 'space-between',&#10;        }}&#10;    &gt;&#10;        &lt;Text style={{ fontSize: 14, color: '#6B6478', fontFamily: 'Verdana' }}&gt;&#10;            Pizza Snack Play · Panduan Korlas &amp;amp; Admin&#10;        &lt;/Text&gt;&#10;        &lt;Text style={{ fontSize: 14, color: '#6B6478', fontFamily: 'Verdana' }}&gt;13 / 18&lt;/Text&gt;&#10;    &lt;/Box&gt;&#10;&lt;/Slide&gt;&#10;"/>
+        <p:cNvPr id="69" name=""/>
         <p:cNvGrpSpPr/>
         <p:nvPr/>
       </p:nvGrpSpPr>
@@ -3691,7 +3740,10 @@
         </p:spPr>
         <p:txBody>
           <a:bodyPr/>
-          <a:p/>
+          <a:p>
+            <a:pPr/>
+            <a:endParaRPr/>
+          </a:p>
         </p:txBody>
       </p:sp>
       <p:sp>
@@ -3752,7 +3804,10 @@
         </p:spPr>
         <p:txBody>
           <a:bodyPr/>
-          <a:p/>
+          <a:p>
+            <a:pPr/>
+            <a:endParaRPr/>
+          </a:p>
         </p:txBody>
       </p:sp>
       <p:sp>
@@ -3819,7 +3874,7 @@
                 <a:latin typeface="Verdana"/>
                 <a:ea typeface="Verdana"/>
               </a:rPr>
-              <a:t>13 / 18</a:t>
+              <a:t>13 / 19</a:t>
             </a:r>
             <a:endParaRPr/>
           </a:p>
@@ -4180,7 +4235,10 @@
         </p:spPr>
         <p:txBody>
           <a:bodyPr/>
-          <a:p/>
+          <a:p>
+            <a:pPr/>
+            <a:endParaRPr/>
+          </a:p>
         </p:txBody>
       </p:sp>
       <p:sp>
@@ -4298,7 +4356,10 @@
         </p:spPr>
         <p:txBody>
           <a:bodyPr/>
-          <a:p/>
+          <a:p>
+            <a:pPr/>
+            <a:endParaRPr/>
+          </a:p>
         </p:txBody>
       </p:sp>
       <p:sp>
@@ -4355,7 +4416,10 @@
         </p:spPr>
         <p:txBody>
           <a:bodyPr/>
-          <a:p/>
+          <a:p>
+            <a:pPr/>
+            <a:endParaRPr/>
+          </a:p>
         </p:txBody>
       </p:sp>
       <p:sp>
@@ -4420,7 +4484,10 @@
         </p:spPr>
         <p:txBody>
           <a:bodyPr/>
-          <a:p/>
+          <a:p>
+            <a:pPr/>
+            <a:endParaRPr/>
+          </a:p>
         </p:txBody>
       </p:sp>
       <p:pic>
@@ -4432,7 +4499,7 @@
           <p:nvPr/>
         </p:nvPicPr>
         <p:blipFill>
-          <a:blip r:embed="rId1">
+          <a:blip>
             <a:extLst>
               <a:ext uri="{96DAC541-7B7A-43D3-8B79-37D633B846F1}">
                 <asvg:svgBlip r:embed="rId1"/>
@@ -4464,7 +4531,7 @@
   <p:cSld>
     <p:spTree>
       <p:nvGrpSpPr>
-        <p:cNvPr id="83" name="" descr="&lt;Slide&#10;    style={{&#10;        width: '1280px',&#10;        height: '720px',&#10;        background: '#FAF7F2',&#10;        paddingTop: 20,&#10;        paddingBottom: 20,&#10;        paddingLeft: 64,&#10;        paddingRight: 64,&#10;    }}&#10;&gt;&#10;    {/* ── A · blok judul ── */}&#10;    &lt;Box style={{ height: 110, justifyContent: 'center' }}&gt;&#10;        &lt;Text&#10;            style={{&#10;                fontSize: 34,&#10;                fontWeight: 'bold',&#10;                color: '#51277C',&#10;                fontFamily: 'Trebuchet MS',&#10;                lineHeight: 1.3,&#10;            }}&#10;        &gt;&#10;            Aksi massal: satu klik untuk banyak hari&#10;        &lt;/Text&gt;&#10;        &lt;Box style={{ marginTop: 10, width: 72, height: 6, borderRadius: 3, background: '#51277C' }} /&gt;&#10;    &lt;/Box&gt;&#10;&#10;    {/* ── B · area konten ── */}&#10;    &lt;Box style={{ height: 530, flexDirection: 'row', gap: 30 }}&gt;&#10;        {/* kiri 55% · tabel dengan kotak centang */}&#10;        &lt;Box&#10;            style={{&#10;                width: '55%',&#10;                height: '100%',&#10;                background: 'rgba(81,39,124,0.06)',&#10;                borderRadius: 20,&#10;                justifyContent: 'center',&#10;                alignItems: 'center',&#10;            }}&#10;        &gt;&#10;            &lt;svg width={560} height={440} viewBox='0 0 560 440'&gt;&#10;                {/* baris header minggu */}&#10;                &lt;rect x='10' y='8' width='540' height='44' rx='10' fill='#51277C' /&gt;&#10;                &lt;rect x='26' y='22' width='20' height='20' rx='5' fill='#F3B26C' /&gt;&#10;                &lt;path d='M31 32l4 4 8-9' fill='none' stroke='#51277C' strokeWidth='3' strokeLinecap='round' strokeLinejoin='round' /&gt;&#10;                &lt;text x='62' y='38' fontFamily='Verdana' fontSize='15' fill='#FFFFFF'&gt;Pilih minggu ini&lt;/text&gt;&#10;&#10;                {/* Senin — dicentang */}&#10;                &lt;rect x='10' y='62' width='540' height='46' rx='10' fill='#FFFFFF' stroke='#E6DFD2' strokeWidth='2' /&gt;&#10;                &lt;rect x='26' y='75' width='20' height='20' rx='5' fill='#51277C' stroke='#51277C' strokeWidth='2' /&gt;&#10;                &lt;path d='M31 85l4 4 8-9' fill='none' stroke='#FFFFFF' strokeWidth='3' strokeLinecap='round' strokeLinejoin='round' /&gt;&#10;                &lt;text x='62' y='92' fontFamily='Verdana' fontSize='15' fill='#2A2333'&gt;Senin, 5&lt;/text&gt;&#10;                &lt;rect x='436' y='73' width='98' height='24' rx='12' fill='#DED7CB' /&gt;&#10;&#10;                {/* Selasa — dicentang */}&#10;                &lt;rect x='10' y='116' width='540' height='46' rx='10' fill='#FFFFFF' stroke='#E6DFD2' strokeWidth='2' /&gt;&#10;                &lt;rect x='26' y='129' width='20' height='20' rx='5' fill='#51277C' stroke='#51277C' strokeWidth='2' /&gt;&#10;                &lt;path d='M31 139l4 4 8-9' fill='none' stroke='#FFFFFF' strokeWidth='3' strokeLinecap='round' strokeLinejoin='round' /&gt;&#10;                &lt;text x='62' y='146' fontFamily='Verdana' fontSize='15' fill='#2A2333'&gt;Selasa, 6&lt;/text&gt;&#10;                &lt;rect x='436' y='127' width='98' height='24' rx='12' fill='#DED7CB' /&gt;&#10;&#10;                {/* Rabu — dicentang */}&#10;                &lt;rect x='10' y='170' width='540' height='46' rx='10' fill='#FFFFFF' stroke='#E6DFD2' strokeWidth='2' /&gt;&#10;                &lt;rect x='26' y='183' width='20' height='20' rx='5' fill='#51277C' stroke='#51277C' strokeWidth='2' /&gt;&#10;                &lt;path d='M31 193l4 4 8-9' fill='none' stroke='#FFFFFF' strokeWidth='3' strokeLinecap='round' strokeLinejoin='round' /&gt;&#10;                &lt;text x='62' y='200' fontFamily='Verdana' fontSize='15' fill='#2A2333'&gt;Rabu, 7&lt;/text&gt;&#10;                &lt;rect x='436' y='181' width='98' height='24' rx='12' fill='#DED7CB' /&gt;&#10;&#10;                {/* Kamis — tidak dicentang */}&#10;                &lt;rect x='10' y='224' width='540' height='46' rx='10' fill='#FFFFFF' stroke='#E6DFD2' strokeWidth='2' /&gt;&#10;                &lt;rect x='26' y='237' width='20' height='20' rx='5' fill='#FFFFFF' stroke='#DED7CB' strokeWidth='2' /&gt;&#10;                &lt;text x='62' y='254' fontFamily='Verdana' fontSize='15' fill='#2A2333'&gt;Kamis, 8&lt;/text&gt;&#10;                &lt;rect x='436' y='235' width='98' height='24' rx='12' fill='#DED7CB' /&gt;&#10;&#10;                {/* Jumat — tidak dicentang */}&#10;                &lt;rect x='10' y='278' width='540' height='46' rx='10' fill='#FFFFFF' stroke='#E6DFD2' strokeWidth='2' /&gt;&#10;                &lt;rect x='26' y='291' width='20' height='20' rx='5' fill='#FFFFFF' stroke='#DED7CB' strokeWidth='2' /&gt;&#10;                &lt;text x='62' y='308' fontFamily='Verdana' fontSize='15' fill='#2A2333'&gt;Jumat, 9&lt;/text&gt;&#10;                &lt;rect x='436' y='289' width='98' height='24' rx='12' fill='#DED7CB' /&gt;&#10;&#10;                {/* bilah aksi */}&#10;                &lt;rect x='10' y='344' width='540' height='78' rx='14' fill='#51277C' /&gt;&#10;                &lt;rect x='28' y='364' width='120' height='38' rx='10' fill='#FFFFFF' /&gt;&#10;                &lt;text x='88' y='389' fontFamily='Verdana' fontSize='15' fontWeight='bold' fill='#51277C' textAnchor='middle'&gt;Kunci&lt;/text&gt;&#10;                &lt;rect x='160' y='364' width='120' height='38' rx='10' fill='rgba(255,255,255,0.25)' /&gt;&#10;                &lt;text x='220' y='389' fontFamily='Verdana' fontSize='15' fill='#EFEAE1' textAnchor='middle'&gt;Publikasi&lt;/text&gt;&#10;                &lt;rect x='292' y='364' width='120' height='38' rx='10' fill='rgba(255,255,255,0.25)' /&gt;&#10;                &lt;text x='352' y='389' fontFamily='Verdana' fontSize='15' fill='#EFEAE1' textAnchor='middle'&gt;Buka kunci&lt;/text&gt;&#10;                &lt;text x='470' y='389' fontFamily='Verdana' fontSize='14' fill='#F3B26C'&gt;3 dipilih&lt;/text&gt;&#10;            &lt;/svg&gt;&#10;        &lt;/Box&gt;&#10;&#10;        {/* kanan 45% · tiga keterangan */}&#10;        &lt;Box style={{ width: '45%', height: '100%', justifyContent: 'space-between' }}&gt;&#10;            {[&#10;                {&#10;                    t: 'Centang dulu, lalu pilih aksinya',&#10;                    d: 'Ada &quot;Pilih minggu ini&quot; di setiap blok minggu dan &quot;Pilih semua&quot; di bagian atas tabel.',&#10;                    g: 'Tidak satu per satu',&#10;                },&#10;                {&#10;                    t: 'Tombol menyesuaikan pilihan Anda',&#10;                    d: 'Bilah aksi di bawah layar hanya menghidupkan tombol yang cocok dengan status hari yang dicentang.',&#10;                    g: 'Tidak bisa salah klik',&#10;                },&#10;                {&#10;                    t: 'Buka kunci massal hanya admin',&#10;                    d: 'Korlas tetap terbatas kelasnya sendiri — hari dari kelas lain tidak ikut tersentuh.',&#10;                    g: 'Aman lintas kelas',&#10;                },&#10;            ].map((it, i) =&gt; (&#10;                &lt;Box&#10;                    key={i}&#10;                    style={{&#10;                        height: 166,&#10;                        background: '#FFFFFF',&#10;                        borderRadius: 16,&#10;                        boxShadow: '0 4px 20px rgba(0,0,0,0.08)',&#10;                        padding: 22,&#10;                        borderLeft: '8px solid #AFC440',&#10;                    }}&#10;                &gt;&#10;                    &lt;Text&#10;                        style={{&#10;                            fontSize: 24,&#10;                            fontWeight: 'bold',&#10;                            color: '#51277C',&#10;                            fontFamily: 'Trebuchet MS',&#10;                            lineHeight: 1.3,&#10;                        }}&#10;                    &gt;&#10;                        {it.t}&#10;                    &lt;/Text&gt;&#10;                    &lt;Text&#10;                        style={{&#10;                            marginTop: 10,&#10;                            fontSize: 17,&#10;                            color: '#6B6478',&#10;                            fontFamily: 'Verdana',&#10;                            lineHeight: 1.5,&#10;                        }}&#10;                    &gt;&#10;                        {it.d}&#10;                    &lt;/Text&gt;&#10;                    &lt;Box style={{ marginTop: 'auto' }}&gt;&#10;                        &lt;Text&#10;                            style={{&#10;                                fontSize: 16,&#10;                                color: '#51277C',&#10;                                fontFamily: 'Verdana',&#10;                                fontWeight: 'bold',&#10;                            }}&#10;                        &gt;&#10;                            {it.g}&#10;                        &lt;/Text&gt;&#10;                    &lt;/Box&gt;&#10;                &lt;/Box&gt;&#10;            ))}&#10;        &lt;/Box&gt;&#10;    &lt;/Box&gt;&#10;&#10;    {/* ── C · bilah kaki ── */}&#10;    &lt;Box&#10;        style={{&#10;            height: 40,&#10;            flexDirection: 'row',&#10;            alignItems: 'center',&#10;            justifyContent: 'space-between',&#10;        }}&#10;    &gt;&#10;        &lt;Text style={{ fontSize: 14, color: '#6B6478', fontFamily: 'Verdana' }}&gt;&#10;            Pizza Snack Play · Panduan Korlas &amp;amp; Admin&#10;        &lt;/Text&gt;&#10;        &lt;Text style={{ fontSize: 14, color: '#6B6478', fontFamily: 'Verdana' }}&gt;14 / 18&lt;/Text&gt;&#10;    &lt;/Box&gt;&#10;&lt;/Slide&gt;&#10;"/>
+        <p:cNvPr id="83" name=""/>
         <p:cNvGrpSpPr/>
         <p:nvPr/>
       </p:nvGrpSpPr>
@@ -4497,7 +4564,10 @@
         </p:spPr>
         <p:txBody>
           <a:bodyPr/>
-          <a:p/>
+          <a:p>
+            <a:pPr/>
+            <a:endParaRPr/>
+          </a:p>
         </p:txBody>
       </p:sp>
       <p:sp>
@@ -4558,7 +4628,10 @@
         </p:spPr>
         <p:txBody>
           <a:bodyPr/>
-          <a:p/>
+          <a:p>
+            <a:pPr/>
+            <a:endParaRPr/>
+          </a:p>
         </p:txBody>
       </p:sp>
       <p:sp>
@@ -4586,7 +4659,10 @@
         </p:spPr>
         <p:txBody>
           <a:bodyPr/>
-          <a:p/>
+          <a:p>
+            <a:pPr/>
+            <a:endParaRPr/>
+          </a:p>
         </p:txBody>
       </p:sp>
       <p:pic>
@@ -4598,7 +4674,7 @@
           <p:nvPr/>
         </p:nvPicPr>
         <p:blipFill>
-          <a:blip r:embed="rId1">
+          <a:blip>
             <a:extLst>
               <a:ext uri="{96DAC541-7B7A-43D3-8B79-37D633B846F1}">
                 <asvg:svgBlip r:embed="rId1"/>
@@ -4650,7 +4726,10 @@
         </p:spPr>
         <p:txBody>
           <a:bodyPr/>
-          <a:p/>
+          <a:p>
+            <a:pPr/>
+            <a:endParaRPr/>
+          </a:p>
         </p:txBody>
       </p:sp>
       <p:sp>
@@ -4707,7 +4786,10 @@
         </p:spPr>
         <p:txBody>
           <a:bodyPr/>
-          <a:p/>
+          <a:p>
+            <a:pPr/>
+            <a:endParaRPr/>
+          </a:p>
         </p:txBody>
       </p:sp>
       <p:sp>
@@ -4847,7 +4929,10 @@
         </p:spPr>
         <p:txBody>
           <a:bodyPr/>
-          <a:p/>
+          <a:p>
+            <a:pPr/>
+            <a:endParaRPr/>
+          </a:p>
         </p:txBody>
       </p:sp>
       <p:sp>
@@ -4904,7 +4989,10 @@
         </p:spPr>
         <p:txBody>
           <a:bodyPr/>
-          <a:p/>
+          <a:p>
+            <a:pPr/>
+            <a:endParaRPr/>
+          </a:p>
         </p:txBody>
       </p:sp>
       <p:sp>
@@ -5044,7 +5132,10 @@
         </p:spPr>
         <p:txBody>
           <a:bodyPr/>
-          <a:p/>
+          <a:p>
+            <a:pPr/>
+            <a:endParaRPr/>
+          </a:p>
         </p:txBody>
       </p:sp>
       <p:sp>
@@ -5101,7 +5192,10 @@
         </p:spPr>
         <p:txBody>
           <a:bodyPr/>
-          <a:p/>
+          <a:p>
+            <a:pPr/>
+            <a:endParaRPr/>
+          </a:p>
         </p:txBody>
       </p:sp>
       <p:sp>
@@ -5275,7 +5369,7 @@
                 <a:latin typeface="Verdana"/>
                 <a:ea typeface="Verdana"/>
               </a:rPr>
-              <a:t>14 / 18</a:t>
+              <a:t>14 / 19</a:t>
             </a:r>
             <a:endParaRPr/>
           </a:p>
@@ -5291,7 +5385,7 @@
   <p:cSld>
     <p:spTree>
       <p:nvGrpSpPr>
-        <p:cNvPr id="106" name="" descr="&lt;Slide&#10;    style={{&#10;        width: '1280px',&#10;        height: '720px',&#10;        background: '#FAF7F2',&#10;        paddingTop: 20,&#10;        paddingBottom: 20,&#10;        paddingLeft: 64,&#10;        paddingRight: 64,&#10;    }}&#10;&gt;&#10;    {/* ── A · blok judul ── */}&#10;    &lt;Box style={{ height: 110, justifyContent: 'center' }}&gt;&#10;        &lt;Text&#10;            style={{&#10;                fontSize: 34,&#10;                fontWeight: 'bold',&#10;                color: '#51277C',&#10;                fontFamily: 'Trebuchet MS',&#10;                lineHeight: 1.3,&#10;            }}&#10;        &gt;&#10;            Keterangan bulan: sudah berapa yang terisi?&#10;        &lt;/Text&gt;&#10;        &lt;Box style={{ marginTop: 10, width: 72, height: 6, borderRadius: 3, background: '#AFC440' }} /&gt;&#10;    &lt;/Box&gt;&#10;&#10;    {/* ── B · area konten ── */}&#10;    &lt;Box style={{ height: 530, justifyContent: 'space-between' }}&gt;&#10;        {/* kartu besar · tiruan panel Keterangan */}&#10;        &lt;Box&#10;            style={{&#10;                height: 352,&#10;                background: '#FFFFFF',&#10;                borderRadius: 18,&#10;                boxShadow: '0 4px 20px rgba(0,0,0,0.08)',&#10;                borderTop: '8px solid #51277C',&#10;                padding: 26,&#10;            }}&#10;        &gt;&#10;            &lt;Text&#10;                style={{&#10;                    fontSize: 26,&#10;                    fontWeight: 'bold',&#10;                    color: '#51277C',&#10;                    fontFamily: 'Trebuchet MS',&#10;                    lineHeight: 1.3,&#10;                }}&#10;            &gt;&#10;                Keterangan September 2026&#10;            &lt;/Text&gt;&#10;            &lt;Text&#10;                style={{&#10;                    marginTop: 5,&#10;                    fontSize: 16,&#10;                    color: '#6B6478',&#10;                    fontFamily: 'Verdana',&#10;                    lineHeight: 1.45,&#10;                }}&#10;            &gt;&#10;                Kelas 1 · jumlah snack yang sudah diambil pada bulan ini&#10;            &lt;/Text&gt;&#10;&#10;            &lt;Box style={{ marginTop: 18, flexDirection: 'row', gap: 14 }}&gt;&#10;                {[&#10;                    { l: 'Sudah diambil', v: '12', c: '#51277C' },&#10;                    { l: 'Ditetapkan korlas', v: '5', c: '#AFC440' },&#10;                    { l: 'Masih kosong', v: '3', c: '#F3B26C' },&#10;                    { l: 'Total tanggal', v: '20', c: '#6B6478' },&#10;                ].map((it, i) =&gt; (&#10;                    &lt;Box&#10;                        key={i}&#10;                        style={{&#10;                            flex: 1,&#10;                            height: 112,&#10;                            background: 'rgba(81,39,124,0.05)',&#10;                            borderRadius: 14,&#10;                            borderTop: '4px solid ' + it.c,&#10;                            padding: 16,&#10;                        }}&#10;                    &gt;&#10;                        &lt;Text&#10;                            style={{&#10;                                fontSize: 15,&#10;                                color: '#6B6478',&#10;                                fontFamily: 'Verdana',&#10;                                lineHeight: 1.35,&#10;                            }}&#10;                        &gt;&#10;                            {it.l}&#10;                        &lt;/Text&gt;&#10;                        &lt;Text&#10;                            style={{&#10;                                marginTop: 6,&#10;                                fontSize: 36,&#10;                                fontWeight: 'bold',&#10;                                color: '#51277C',&#10;                                fontFamily: 'Trebuchet MS',&#10;                                lineHeight: 1.1,&#10;                            }}&#10;                        &gt;&#10;                            {it.v}&#10;                        &lt;/Text&gt;&#10;                    &lt;/Box&gt;&#10;                ))}&#10;            &lt;/Box&gt;&#10;&#10;            &lt;Box&#10;                style={{&#10;                    marginTop: 20,&#10;                    flexDirection: 'row',&#10;                    justifyContent: 'space-between',&#10;                    alignItems: 'flex-end',&#10;                }}&#10;            &gt;&#10;                &lt;Text style={{ fontSize: 15, color: '#6B6478', fontFamily: 'Verdana' }}&gt;&#10;                    17 dari 20 tanggal sudah ada petugas&#10;                &lt;/Text&gt;&#10;                &lt;Text&#10;                    style={{&#10;                        fontSize: 16,&#10;                        fontWeight: 'bold',&#10;                        color: '#2A2333',&#10;                        fontFamily: 'Verdana',&#10;                    }}&#10;                &gt;&#10;                    85%&#10;                &lt;/Text&gt;&#10;            &lt;/Box&gt;&#10;            &lt;Box&#10;                style={{&#10;                    marginTop: 8,&#10;                    height: 12,&#10;                    borderRadius: 6,&#10;                    background: '#EFEAE1',&#10;                    flexDirection: 'row',&#10;                }}&#10;            &gt;&#10;                &lt;Box style={{ width: '85%', height: 12, borderRadius: 6, background: '#AFC440' }} /&gt;&#10;            &lt;/Box&gt;&#10;        &lt;/Box&gt;&#10;&#10;        {/* jalur bawah · di mana panelnya &amp; siapa yang melihat */}&#10;        &lt;Box&#10;            style={{&#10;                height: 150,&#10;                background: 'rgba(81,39,124,0.06)',&#10;                borderRadius: 16,&#10;                borderLeft: '8px solid #F3B26C',&#10;                padding: 22,&#10;            }}&#10;        &gt;&#10;            &lt;Text&#10;                style={{&#10;                    fontSize: 21,&#10;                    fontWeight: 'bold',&#10;                    color: '#51277C',&#10;                    fontFamily: 'Trebuchet MS',&#10;                    lineHeight: 1.3,&#10;                }}&#10;            &gt;&#10;                Ada di halaman Pilih Jadwal — hanya korlas &amp;amp; admin&#10;            &lt;/Text&gt;&#10;            &lt;Text&#10;                style={{&#10;                    marginTop: 8,&#10;                    fontSize: 17,&#10;                    color: '#2A2333',&#10;                    fontFamily: 'Verdana',&#10;                    lineHeight: 1.5,&#10;                }}&#10;            &gt;&#10;                Orang tua tidak melihat panel ini: yang ia butuhkan cuma tanggal mana yang masih&#10;                kosong. Admin melihat panelnya tanpa papan tanggal, karena ia tidak ikut mengambil.&#10;            &lt;/Text&gt;&#10;        &lt;/Box&gt;&#10;    &lt;/Box&gt;&#10;&#10;    {/* ── C · bilah kaki ── */}&#10;    &lt;Box&#10;        style={{&#10;            height: 40,&#10;            flexDirection: 'row',&#10;            alignItems: 'center',&#10;            justifyContent: 'space-between',&#10;        }}&#10;    &gt;&#10;        &lt;Text style={{ fontSize: 14, color: '#6B6478', fontFamily: 'Verdana' }}&gt;&#10;            Pizza Snack Play · Panduan Korlas &amp;amp; Admin&#10;        &lt;/Text&gt;&#10;        &lt;Text style={{ fontSize: 14, color: '#6B6478', fontFamily: 'Verdana' }}&gt;15 / 18&lt;/Text&gt;&#10;    &lt;/Box&gt;&#10;&lt;/Slide&gt;&#10;"/>
+        <p:cNvPr id="106" name=""/>
         <p:cNvGrpSpPr/>
         <p:nvPr/>
       </p:nvGrpSpPr>
@@ -5324,7 +5418,10 @@
         </p:spPr>
         <p:txBody>
           <a:bodyPr/>
-          <a:p/>
+          <a:p>
+            <a:pPr/>
+            <a:endParaRPr/>
+          </a:p>
         </p:txBody>
       </p:sp>
       <p:sp>
@@ -5385,7 +5482,10 @@
         </p:spPr>
         <p:txBody>
           <a:bodyPr/>
-          <a:p/>
+          <a:p>
+            <a:pPr/>
+            <a:endParaRPr/>
+          </a:p>
         </p:txBody>
       </p:sp>
       <p:sp>
@@ -5418,7 +5518,10 @@
         </p:spPr>
         <p:txBody>
           <a:bodyPr/>
-          <a:p/>
+          <a:p>
+            <a:pPr/>
+            <a:endParaRPr/>
+          </a:p>
         </p:txBody>
       </p:sp>
       <p:sp>
@@ -5475,7 +5578,10 @@
         </p:spPr>
         <p:txBody>
           <a:bodyPr/>
-          <a:p/>
+          <a:p>
+            <a:pPr/>
+            <a:endParaRPr/>
+          </a:p>
         </p:txBody>
       </p:sp>
       <p:sp>
@@ -5573,7 +5679,10 @@
         </p:spPr>
         <p:txBody>
           <a:bodyPr/>
-          <a:p/>
+          <a:p>
+            <a:pPr/>
+            <a:endParaRPr/>
+          </a:p>
         </p:txBody>
       </p:sp>
       <p:sp>
@@ -5630,7 +5739,10 @@
         </p:spPr>
         <p:txBody>
           <a:bodyPr/>
-          <a:p/>
+          <a:p>
+            <a:pPr/>
+            <a:endParaRPr/>
+          </a:p>
         </p:txBody>
       </p:sp>
       <p:sp>
@@ -5728,7 +5840,10 @@
         </p:spPr>
         <p:txBody>
           <a:bodyPr/>
-          <a:p/>
+          <a:p>
+            <a:pPr/>
+            <a:endParaRPr/>
+          </a:p>
         </p:txBody>
       </p:sp>
       <p:sp>
@@ -5785,7 +5900,10 @@
         </p:spPr>
         <p:txBody>
           <a:bodyPr/>
-          <a:p/>
+          <a:p>
+            <a:pPr/>
+            <a:endParaRPr/>
+          </a:p>
         </p:txBody>
       </p:sp>
       <p:sp>
@@ -5883,7 +6001,10 @@
         </p:spPr>
         <p:txBody>
           <a:bodyPr/>
-          <a:p/>
+          <a:p>
+            <a:pPr/>
+            <a:endParaRPr/>
+          </a:p>
         </p:txBody>
       </p:sp>
       <p:sp>
@@ -5940,7 +6061,10 @@
         </p:spPr>
         <p:txBody>
           <a:bodyPr/>
-          <a:p/>
+          <a:p>
+            <a:pPr/>
+            <a:endParaRPr/>
+          </a:p>
         </p:txBody>
       </p:sp>
       <p:sp>
@@ -6038,7 +6162,10 @@
         </p:spPr>
         <p:txBody>
           <a:bodyPr/>
-          <a:p/>
+          <a:p>
+            <a:pPr/>
+            <a:endParaRPr/>
+          </a:p>
         </p:txBody>
       </p:sp>
       <p:sp>
@@ -6095,7 +6222,10 @@
         </p:spPr>
         <p:txBody>
           <a:bodyPr/>
-          <a:p/>
+          <a:p>
+            <a:pPr/>
+            <a:endParaRPr/>
+          </a:p>
         </p:txBody>
       </p:sp>
       <p:sp>
@@ -6261,7 +6391,10 @@
         </p:spPr>
         <p:txBody>
           <a:bodyPr/>
-          <a:p/>
+          <a:p>
+            <a:pPr/>
+            <a:endParaRPr/>
+          </a:p>
         </p:txBody>
       </p:sp>
       <p:sp>
@@ -6287,7 +6420,10 @@
         </p:spPr>
         <p:txBody>
           <a:bodyPr/>
-          <a:p/>
+          <a:p>
+            <a:pPr/>
+            <a:endParaRPr/>
+          </a:p>
         </p:txBody>
       </p:sp>
       <p:sp>
@@ -6315,7 +6451,10 @@
         </p:spPr>
         <p:txBody>
           <a:bodyPr/>
-          <a:p/>
+          <a:p>
+            <a:pPr/>
+            <a:endParaRPr/>
+          </a:p>
         </p:txBody>
       </p:sp>
       <p:sp>
@@ -6372,7 +6511,10 @@
         </p:spPr>
         <p:txBody>
           <a:bodyPr/>
-          <a:p/>
+          <a:p>
+            <a:pPr/>
+            <a:endParaRPr/>
+          </a:p>
         </p:txBody>
       </p:sp>
       <p:sp>
@@ -6511,7 +6653,7 @@
                 <a:latin typeface="Verdana"/>
                 <a:ea typeface="Verdana"/>
               </a:rPr>
-              <a:t>15 / 18</a:t>
+              <a:t>15 / 19</a:t>
             </a:r>
             <a:endParaRPr/>
           </a:p>
@@ -6527,7 +6669,7 @@
   <p:cSld>
     <p:spTree>
       <p:nvGrpSpPr>
-        <p:cNvPr id="140" name="" descr="&lt;Slide&#10;    style={{&#10;        width: '1280px',&#10;        height: '720px',&#10;        background: '#FAF7F2',&#10;        paddingTop: 20,&#10;        paddingBottom: 20,&#10;        paddingLeft: 64,&#10;        paddingRight: 64,&#10;        position: 'relative',&#10;        overflow: 'hidden',&#10;    }}&#10;&gt;&#10;    &lt;Box&#10;        style={{&#10;            position: 'absolute',&#10;            top: -150,&#10;            left: -120,&#10;            width: 440,&#10;            height: 440,&#10;            borderRadius: 220,&#10;            background: 'linear-gradient(135deg, #AFC440 0%, #F3B26C 100%)',&#10;            opacity: 0.14,&#10;        }}&#10;    /&gt;&#10;&#10;    {/* ── A · blok judul ── */}&#10;    &lt;Box style={{ height: 110, justifyContent: 'center' }}&gt;&#10;        &lt;Text&#10;            style={{&#10;                fontSize: 34,&#10;                fontWeight: 'bold',&#10;                color: '#51277C',&#10;                fontFamily: 'Trebuchet MS',&#10;                lineHeight: 1.3,&#10;            }}&#10;        &gt;&#10;            Laporan piket: sudah merata?&#10;        &lt;/Text&gt;&#10;        &lt;Box style={{ marginTop: 10, width: 72, height: 6, borderRadius: 3, background: '#F3B26C' }} /&gt;&#10;    &lt;/Box&gt;&#10;&#10;    {/* ── B · area konten ── */}&#10;    &lt;Box style={{ height: 530, flexDirection: 'row', gap: 34, position: 'relative', zIndex: 1 }}&gt;&#10;        {/* kiri 55% · frasa raksasa */}&#10;        &lt;Box style={{ width: '55%', height: '100%', justifyContent: 'center' }}&gt;&#10;            &lt;Text&#10;                style={{&#10;                    fontSize: 62,&#10;                    fontWeight: 'bold',&#10;                    color: '#51277C',&#10;                    fontFamily: 'Trebuchet MS',&#10;                    lineHeight: 1.1,&#10;                }}&#10;            &gt;&#10;                Merata,{'\n'}bukan sekadar penuh.&#10;            &lt;/Text&gt;&#10;&#10;            &lt;Text&#10;                style={{&#10;                    marginTop: 22,&#10;                    fontSize: 19,&#10;                    color: '#2A2333',&#10;                    fontFamily: 'Verdana',&#10;                    lineHeight: 1.55,&#10;                }}&#10;            &gt;&#10;                Menu Laporan menghitung berapa kali setiap orang tua sudah mengambil piket,&#10;                lengkap dengan tanggal dan menunya. Angkanya diambil dari tempat yang sama&#10;                dengan yang dipakai orang tua saat mengambil tanggal.&#10;            &lt;/Text&gt;&#10;&#10;            &lt;Box&#10;                style={{&#10;                    marginTop: 24,&#10;                    background: 'rgba(243,178,108,0.22)',&#10;                    borderRadius: 14,&#10;                    borderLeft: '8px solid #F3B26C',&#10;                    padding: 18,&#10;                }}&#10;            &gt;&#10;                &lt;Text&#10;                    style={{&#10;                        fontSize: 18,&#10;                        color: '#2A2333',&#10;                        fontFamily: 'Verdana',&#10;                        lineHeight: 1.5,&#10;                    }}&#10;                &gt;&#10;                    Yang paling berguna justru satu daftar ini:&#10;                &lt;/Text&gt;&#10;                &lt;Text&#10;                    style={{&#10;                        marginTop: 10,&#10;                        fontSize: 19,&#10;                        fontWeight: 'bold',&#10;                        color: '#51277C',&#10;                        fontFamily: 'Trebuchet MS',&#10;                        lineHeight: 1.35,&#10;                    }}&#10;                &gt;&#10;                    Belum pernah ambil&#10;                &lt;/Text&gt;&#10;                &lt;Text&#10;                    style={{&#10;                        marginTop: 4,&#10;                        fontSize: 17,&#10;                        color: '#2A2333',&#10;                        fontFamily: 'Verdana',&#10;                        lineHeight: 1.5,&#10;                    }}&#10;                &gt;&#10;                    merekalah yang bisa diajak lebih dulu bulan depan.&#10;                &lt;/Text&gt;&#10;            &lt;/Box&gt;&#10;        &lt;/Box&gt;&#10;&#10;        {/* kanan 45% · rekap per orang tua */}&#10;        &lt;Box&#10;            style={{&#10;                width: '45%',&#10;                height: '100%',&#10;                background: 'rgba(81,39,124,0.06)',&#10;                borderRadius: 20,&#10;                justifyContent: 'center',&#10;                alignItems: 'center',&#10;            }}&#10;        &gt;&#10;            &lt;svg width={430} height={430} viewBox='0 0 430 430'&gt;&#10;                &lt;text x='18' y='38' fontFamily='Trebuchet MS' fontSize='21' fontWeight='bold' fill='#51277C'&gt;&#10;                    Rekap ambil piket&#10;                &lt;/text&gt;&#10;                &lt;text x='18' y='62' fontFamily='Verdana' fontSize='14' fill='#6B6478'&gt;&#10;                    1 – 31 Oktober · Kelas 1&#10;                &lt;/text&gt;&#10;&#10;                {/* Sari · 4 */}&#10;                &lt;text x='18' y='120' fontFamily='Verdana' fontSize='15' fill='#2A2333'&gt;Sari&lt;/text&gt;&#10;                &lt;rect x='110' y='104' width='250' height='22' rx='11' fill='#EFEAE1' /&gt;&#10;                &lt;rect x='110' y='104' width='250' height='22' rx='11' fill='#51277C' /&gt;&#10;                &lt;text x='372' y='120' fontFamily='Trebuchet MS' fontSize='16' fontWeight='bold' fill='#51277C'&gt;4&lt;/text&gt;&#10;&#10;                {/* Budi · 3 */}&#10;                &lt;text x='18' y='176' fontFamily='Verdana' fontSize='15' fill='#2A2333'&gt;Budi&lt;/text&gt;&#10;                &lt;rect x='110' y='160' width='250' height='22' rx='11' fill='#EFEAE1' /&gt;&#10;                &lt;rect x='110' y='160' width='188' height='22' rx='11' fill='#51277C' /&gt;&#10;                &lt;text x='372' y='176' fontFamily='Trebuchet MS' fontSize='16' fontWeight='bold' fill='#51277C'&gt;3&lt;/text&gt;&#10;&#10;                {/* Dewi · 2 */}&#10;                &lt;text x='18' y='232' fontFamily='Verdana' fontSize='15' fill='#2A2333'&gt;Dewi&lt;/text&gt;&#10;                &lt;rect x='110' y='216' width='250' height='22' rx='11' fill='#EFEAE1' /&gt;&#10;                &lt;rect x='110' y='216' width='125' height='22' rx='11' fill='#51277C' /&gt;&#10;                &lt;text x='372' y='232' fontFamily='Trebuchet MS' fontSize='16' fontWeight='bold' fill='#51277C'&gt;2&lt;/text&gt;&#10;&#10;                {/* Rina · 1 */}&#10;                &lt;text x='18' y='288' fontFamily='Verdana' fontSize='15' fill='#2A2333'&gt;Rina&lt;/text&gt;&#10;                &lt;rect x='110' y='272' width='250' height='22' rx='11' fill='#EFEAE1' /&gt;&#10;                &lt;rect x='110' y='272' width='63' height='22' rx='11' fill='#51277C' /&gt;&#10;                &lt;text x='372' y='288' fontFamily='Trebuchet MS' fontSize='16' fontWeight='bold' fill='#51277C'&gt;1&lt;/text&gt;&#10;&#10;                {/* Anto · 0 — belum pernah */}&#10;                &lt;text x='18' y='344' fontFamily='Verdana' fontSize='15' fill='#2A2333'&gt;Anto&lt;/text&gt;&#10;                &lt;rect x='110' y='328' width='250' height='22' rx='11' fill='#EFEAE1' /&gt;&#10;                &lt;rect x='110' y='328' width='250' height='22' rx='11' fill='#F3B26C' opacity='0.35' /&gt;&#10;                &lt;text x='372' y='344' fontFamily='Trebuchet MS' fontSize='16' fontWeight='bold' fill='#F3B26C'&gt;0&lt;/text&gt;&#10;&#10;                {/* simpulan */}&#10;                &lt;rect x='18' y='374' width='394' height='48' rx='14' fill='#51277C' /&gt;&#10;                &lt;text x='38' y='396' fontFamily='Verdana' fontSize='15' fill='#F3B26C' fontWeight='bold'&gt;&#10;                    Belum pernah ambil: Anto&#10;                &lt;/text&gt;&#10;                &lt;text x='38' y='414' fontFamily='Verdana' fontSize='13' fill='#EFEAE1'&gt;&#10;                    ajak lebih dulu saat menyusun bulan depan&#10;                &lt;/text&gt;&#10;            &lt;/svg&gt;&#10;        &lt;/Box&gt;&#10;    &lt;/Box&gt;&#10;&#10;    {/* ── C · bilah kaki ── */}&#10;    &lt;Box&#10;        style={{&#10;            height: 40,&#10;            flexDirection: 'row',&#10;            alignItems: 'center',&#10;            justifyContent: 'space-between',&#10;        }}&#10;    &gt;&#10;        &lt;Text style={{ fontSize: 14, color: '#6B6478', fontFamily: 'Verdana' }}&gt;&#10;            Pizza Snack Play · Panduan Korlas &amp;amp; Admin&#10;        &lt;/Text&gt;&#10;        &lt;Text style={{ fontSize: 14, color: '#6B6478', fontFamily: 'Verdana' }}&gt;16 / 18&lt;/Text&gt;&#10;    &lt;/Box&gt;&#10;&lt;/Slide&gt;&#10;"/>
+        <p:cNvPr id="140" name=""/>
         <p:cNvGrpSpPr/>
         <p:nvPr/>
       </p:nvGrpSpPr>
@@ -6560,7 +6702,10 @@
         </p:spPr>
         <p:txBody>
           <a:bodyPr/>
-          <a:p/>
+          <a:p>
+            <a:pPr/>
+            <a:endParaRPr/>
+          </a:p>
         </p:txBody>
       </p:sp>
       <p:sp>
@@ -6621,7 +6766,10 @@
         </p:spPr>
         <p:txBody>
           <a:bodyPr/>
-          <a:p/>
+          <a:p>
+            <a:pPr/>
+            <a:endParaRPr/>
+          </a:p>
         </p:txBody>
       </p:sp>
       <p:sp>
@@ -6688,7 +6836,7 @@
                 <a:latin typeface="Verdana"/>
                 <a:ea typeface="Verdana"/>
               </a:rPr>
-              <a:t>16 / 18</a:t>
+              <a:t>16 / 19</a:t>
             </a:r>
             <a:endParaRPr/>
           </a:p>
@@ -7025,7 +7173,10 @@
         </p:spPr>
         <p:txBody>
           <a:bodyPr/>
-          <a:p/>
+          <a:p>
+            <a:pPr/>
+            <a:endParaRPr/>
+          </a:p>
         </p:txBody>
       </p:sp>
       <p:sp>
@@ -7145,7 +7296,10 @@
         </p:spPr>
         <p:txBody>
           <a:bodyPr/>
-          <a:p/>
+          <a:p>
+            <a:pPr/>
+            <a:endParaRPr/>
+          </a:p>
         </p:txBody>
       </p:sp>
       <p:sp>
@@ -7202,7 +7356,10 @@
         </p:spPr>
         <p:txBody>
           <a:bodyPr/>
-          <a:p/>
+          <a:p>
+            <a:pPr/>
+            <a:endParaRPr/>
+          </a:p>
         </p:txBody>
       </p:sp>
       <p:sp>
@@ -7335,7 +7492,10 @@
         </p:spPr>
         <p:txBody>
           <a:bodyPr/>
-          <a:p/>
+          <a:p>
+            <a:pPr/>
+            <a:endParaRPr/>
+          </a:p>
         </p:txBody>
       </p:sp>
       <p:pic>
@@ -7347,7 +7507,7 @@
           <p:nvPr/>
         </p:nvPicPr>
         <p:blipFill>
-          <a:blip r:embed="rId1">
+          <a:blip>
             <a:extLst>
               <a:ext uri="{96DAC541-7B7A-43D3-8B79-37D633B846F1}">
                 <asvg:svgBlip r:embed="rId1"/>
@@ -7375,11 +7535,11 @@
 </file>
 
 <file path=ppt/slides/slide17.xml><?xml version="1.0" encoding="utf-8"?>
-<p:sld xmlns:p="http://schemas.openxmlformats.org/presentationml/2006/main" xmlns:a="http://schemas.openxmlformats.org/drawingml/2006/main" xmlns:asvg="http://schemas.microsoft.com/office/drawing/2016/SVG/main" xmlns:r="http://schemas.openxmlformats.org/officeDocument/2006/relationships" xmlns:mc="http://schemas.openxmlformats.org/markup-compatibility/2006" mc:Ignorable="asvg">
+<p:sld xmlns:p="http://schemas.openxmlformats.org/presentationml/2006/main" xmlns:a="http://schemas.openxmlformats.org/drawingml/2006/main">
   <p:cSld>
     <p:spTree>
       <p:nvGrpSpPr>
-        <p:cNvPr id="156" name="" descr="&lt;Slide&#10;    style={{&#10;        width: '1280px',&#10;        height: '720px',&#10;        background: '#FAF7F2',&#10;        paddingTop: 20,&#10;        paddingBottom: 20,&#10;        paddingLeft: 64,&#10;        paddingRight: 64,&#10;    }}&#10;&gt;&#10;    {/* ── A · blok judul ── */}&#10;    &lt;Box style={{ height: 110, justifyContent: 'center' }}&gt;&#10;        &lt;Text&#10;            style={{&#10;                fontSize: 34,&#10;                fontWeight: 'bold',&#10;                color: '#51277C',&#10;                fontFamily: 'Trebuchet MS',&#10;                lineHeight: 1.3,&#10;            }}&#10;        &gt;&#10;            Empat hal yang perlu diingat&#10;        &lt;/Text&gt;&#10;        &lt;Box style={{ marginTop: 10, width: 72, height: 6, borderRadius: 3, background: '#51277C' }} /&gt;&#10;    &lt;/Box&gt;&#10;&#10;    {/* ── B · area konten ── */}&#10;    &lt;Box style={{ height: 530 }}&gt;&#10;        &lt;Box style={{ height: 470, flexDirection: 'row', gap: 18 }}&gt;&#10;            {[&#10;                {&#10;                    d: 'M7 2v3M17 2v3M3 9h18M5 5h14a2 2 0 0 1 2 2v12a2 2 0 0 1-2 2H5a2 2 0 0 1-2-2V7a2 2 0 0 1 2-2zM8 13h8',&#10;                    t: 'Kosongkan petugas sebelum terbit',&#10;                    d: 'Bila tanggalnya ingin direbut orang tua, biarkan petugas kosong sebelum dipublikasikan. Setelah terbit, yang masih bisa diisi hanya petugas — menu &amp; catatan tetap terkunci.',&#10;                    g: 'Tentukan sebelum kunci',&#10;                },&#10;                {&#10;                    d: 'M7 4h10a3 3 0 0 1 3 3v10a3 3 0 0 1-3 3H7a3 3 0 0 1-3-3V7a3 3 0 0 1 3-3zM7 11l2 2 3-4M8 16h7',&#10;                    t: 'Selesaikan semua dulu',&#10;                    d: 'Publikasi menolak selama masih ada hari yang belum dikunci. Periksa kartu status per kelas sebelum menekan tombolnya.',&#10;                    g: 'Jangan separuh jadi',&#10;                },&#10;                {&#10;                    d: 'M7 11h10a2 2 0 0 1 2 2v6a2 2 0 0 1-2 2H7a2 2 0 0 1-2-2v-6a2 2 0 0 1 2-2zM8 11V8a4 4 0 0 1 7.5-2',&#10;                    t: 'Revisi sesudah terbit: minta admin',&#10;                    d: 'Membuka kunci jadwal wewenang admin. Korlas tidak bisa mencairkan jadwal yang sudah dikunci atau terbit.',&#10;                    g: 'Sampaikan ke admin',&#10;                },&#10;                {&#10;                    d: 'M7 2v3M17 2v3M3 9h18M5 5h14a2 2 0 0 1 2 2v12a2 2 0 0 1-2 2H5a2 2 0 0 1-2-2V7a2 2 0 0 1 2-2zM9 14l6 6M15 14l-6 6',&#10;                    t: 'Hari libur sekolah wewenang admin',&#10;                    d: 'Korlas bisa menandai libur pada jadwal kelasnya sendiri. Hari libur yang berlaku untuk semua kelas ditambahkan admin.',&#10;                    g: 'Berlaku sekolah',&#10;                },&#10;            ].map((c, idx) =&gt; (&#10;                &lt;Box&#10;                    key={idx}&#10;                    style={{&#10;                        flex: 1,&#10;                        height: '100%',&#10;                        background: '#FFFFFF',&#10;                        borderRadius: 16,&#10;                        boxShadow: '0 4px 20px rgba(0,0,0,0.08)',&#10;                        padding: 24,&#10;                        borderTop: '8px solid #AFC440',&#10;                    }}&#10;                &gt;&#10;                    &lt;Box&#10;                        style={{&#10;                            width: 60,&#10;                            height: 60,&#10;                            borderRadius: 30,&#10;                            background: 'rgba(81,39,124,0.10)',&#10;                            justifyContent: 'center',&#10;                            alignItems: 'center',&#10;                        }}&#10;                    &gt;&#10;                        &lt;svg width={30} height={30} viewBox='0 0 24 24' xmlns=&quot;http://www.w3.org/2000/svg&quot;&gt;&#10;                            &lt;path&#10;                                fill='none'&#10;                                stroke='#51277C'&#10;                                strokeWidth='2'&#10;                                strokeLinecap='round'&#10;                                strokeLinejoin='round'&#10;                                d={c.d}&#10;                            /&gt;&#10;                        &lt;/svg&gt;&#10;                    &lt;/Box&gt;&#10;&#10;                    &lt;Text&#10;                        style={{&#10;                            marginTop: 16,&#10;                            fontSize: 23,&#10;                            fontWeight: 'bold',&#10;                            color: '#51277C',&#10;                            fontFamily: 'Trebuchet MS',&#10;                            lineHeight: 1.32,&#10;                        }}&#10;                    &gt;&#10;                        {c.t}&#10;                    &lt;/Text&gt;&#10;&#10;                    &lt;Box style={{ marginTop: 12, width: 44, height: 3, borderRadius: 2, background: '#AFC440' }} /&gt;&#10;&#10;                    &lt;Text&#10;                        style={{&#10;                            marginTop: 12,&#10;                            fontSize: 17,&#10;                            color: '#6B6478',&#10;                            fontFamily: 'Verdana',&#10;                            lineHeight: 1.5,&#10;                        }}&#10;                    &gt;&#10;                        {c.d}&#10;                    &lt;/Text&gt;&#10;&#10;                    &lt;Box style={{ marginTop: 'auto' }}&gt;&#10;                        &lt;Text&#10;                            style={{&#10;                                fontSize: 16,&#10;                                color: '#51277C',&#10;                                fontFamily: 'Verdana',&#10;                                fontWeight: 'bold',&#10;                            }}&#10;                        &gt;&#10;                            {c.g}&#10;                        &lt;/Text&gt;&#10;                    &lt;/Box&gt;&#10;                &lt;/Box&gt;&#10;            ))}&#10;        &lt;/Box&gt;&#10;&#10;        {/* simpulan */}&#10;        &lt;Box&#10;            style={{&#10;                marginTop: 14,&#10;                height: 46,&#10;                background: '#51277C',&#10;                borderRadius: 14,&#10;                justifyContent: 'center',&#10;                alignItems: 'center',&#10;            }}&#10;        &gt;&#10;            &lt;Text&#10;                style={{&#10;                    fontSize: 19,&#10;                    color: '#FFFFFF',&#10;                    fontFamily: 'Verdana',&#10;                    fontWeight: 'bold',&#10;                }}&#10;            &gt;&#10;                Intinya: susun, tentukan petugas, kunci, lalu terbitkan.&#10;            &lt;/Text&gt;&#10;        &lt;/Box&gt;&#10;    &lt;/Box&gt;&#10;&#10;    {/* ── C · bilah kaki ── */}&#10;    &lt;Box&#10;        style={{&#10;            height: 40,&#10;            flexDirection: 'row',&#10;            alignItems: 'center',&#10;            justifyContent: 'space-between',&#10;        }}&#10;    &gt;&#10;        &lt;Text style={{ fontSize: 14, color: '#6B6478', fontFamily: 'Verdana' }}&gt;&#10;            Pizza Snack Play · Panduan Korlas &amp;amp; Admin&#10;        &lt;/Text&gt;&#10;        &lt;Text style={{ fontSize: 14, color: '#6B6478', fontFamily: 'Verdana' }}&gt;17 / 18&lt;/Text&gt;&#10;    &lt;/Box&gt;&#10;&lt;/Slide&gt;&#10;"/>
+        <p:cNvPr id="156" name=""/>
         <p:cNvGrpSpPr/>
         <p:nvPr/>
       </p:nvGrpSpPr>
@@ -7412,7 +7572,10 @@
         </p:spPr>
         <p:txBody>
           <a:bodyPr/>
-          <a:p/>
+          <a:p>
+            <a:pPr/>
+            <a:endParaRPr/>
+          </a:p>
         </p:txBody>
       </p:sp>
       <p:sp>
@@ -7444,6 +7607,1829 @@
                 <a:latin typeface="Trebuchet MS"/>
                 <a:ea typeface="Trebuchet MS"/>
               </a:rPr>
+              <a:t>Mengabari orang tua lewat WhatsApp</a:t>
+            </a:r>
+            <a:endParaRPr/>
+          </a:p>
+        </p:txBody>
+      </p:sp>
+      <p:sp>
+        <p:nvSpPr>
+          <p:cNvPr id="159" name=""/>
+          <p:cNvSpPr/>
+          <p:nvPr/>
+        </p:nvSpPr>
+        <p:spPr>
+          <a:xfrm rot="0" flipH="0" flipV="0">
+            <a:off x="609600" y="990600"/>
+            <a:ext cx="685800" cy="57150"/>
+          </a:xfrm>
+          <a:prstGeom prst="roundRect">
+            <a:avLst>
+              <a:gd name="adj" fmla="val 50000"/>
+            </a:avLst>
+          </a:prstGeom>
+          <a:solidFill>
+            <a:srgbClr val="AFC440"/>
+          </a:solidFill>
+          <a:ln/>
+        </p:spPr>
+        <p:txBody>
+          <a:bodyPr/>
+          <a:p>
+            <a:pPr/>
+            <a:endParaRPr/>
+          </a:p>
+        </p:txBody>
+      </p:sp>
+      <p:sp>
+        <p:nvSpPr>
+          <p:cNvPr id="160" name=""/>
+          <p:cNvSpPr/>
+          <p:nvPr/>
+        </p:nvSpPr>
+        <p:spPr>
+          <a:xfrm rot="0" flipH="0" flipV="0">
+            <a:off x="609600" y="1314450"/>
+            <a:ext cx="5895975" cy="5048250"/>
+          </a:xfrm>
+          <a:prstGeom prst="roundRect">
+            <a:avLst>
+              <a:gd name="adj" fmla="val 3396"/>
+            </a:avLst>
+          </a:prstGeom>
+          <a:solidFill>
+            <a:srgbClr val="FFFFFF"/>
+          </a:solidFill>
+          <a:ln/>
+          <a:effectLst>
+            <a:outerShdw blurRad="190500" dist="38100" dir="5400000">
+              <a:srgbClr val="000000">
+                <a:alpha val="8000"/>
+              </a:srgbClr>
+            </a:outerShdw>
+          </a:effectLst>
+        </p:spPr>
+        <p:txBody>
+          <a:bodyPr/>
+          <a:p>
+            <a:pPr/>
+            <a:endParaRPr/>
+          </a:p>
+        </p:txBody>
+      </p:sp>
+      <p:sp>
+        <p:nvSpPr>
+          <p:cNvPr id="161" name=""/>
+          <p:cNvSpPr/>
+          <p:nvPr/>
+        </p:nvSpPr>
+        <p:spPr>
+          <a:xfrm rot="0" flipH="0" flipV="0">
+            <a:off x="609600" y="1314450"/>
+            <a:ext cx="5895975" cy="5048250"/>
+          </a:xfrm>
+          <a:custGeom>
+            <a:pathLst>
+              <a:path w="619" h="530">
+                <a:moveTo>
+                  <a:pt x="602" y="0"/>
+                </a:moveTo>
+                <a:cubicBezTo>
+                  <a:pt x="610" y="0"/>
+                  <a:pt x="617" y="7"/>
+                  <a:pt x="619" y="15"/>
+                </a:cubicBezTo>
+                <a:cubicBezTo>
+                  <a:pt x="617" y="11"/>
+                  <a:pt x="613" y="8"/>
+                  <a:pt x="609" y="8"/>
+                </a:cubicBezTo>
+                <a:lnTo>
+                  <a:pt x="10" y="8"/>
+                </a:lnTo>
+                <a:cubicBezTo>
+                  <a:pt x="5" y="8"/>
+                  <a:pt x="1" y="11"/>
+                  <a:pt x="0" y="16"/>
+                </a:cubicBezTo>
+                <a:cubicBezTo>
+                  <a:pt x="1" y="7"/>
+                  <a:pt x="9" y="0"/>
+                  <a:pt x="18" y="0"/>
+                </a:cubicBezTo>
+                <a:lnTo>
+                  <a:pt x="601" y="0"/>
+                </a:lnTo>
+                <a:close/>
+              </a:path>
+            </a:pathLst>
+          </a:custGeom>
+          <a:solidFill>
+            <a:srgbClr val="AFC440"/>
+          </a:solidFill>
+          <a:ln/>
+        </p:spPr>
+        <p:txBody>
+          <a:bodyPr/>
+          <a:p>
+            <a:pPr/>
+            <a:endParaRPr/>
+          </a:p>
+        </p:txBody>
+      </p:sp>
+      <p:sp>
+        <p:nvSpPr>
+          <p:cNvPr id="162" name="" descr="{&quot;isTemplate&quot;:true,&quot;type&quot;:&quot;text&quot;}"/>
+          <p:cNvSpPr txBox="1"/>
+          <p:nvPr/>
+        </p:nvSpPr>
+        <p:spPr>
+          <a:xfrm rot="0" flipH="0" flipV="0">
+            <a:off x="819150" y="1524000"/>
+            <a:ext cx="1952625" cy="333375"/>
+          </a:xfrm>
+          <a:prstGeom prst="rect"/>
+        </p:spPr>
+        <p:txBody>
+          <a:bodyPr wrap="none" lIns="0" tIns="0" rIns="0" bIns="0"/>
+          <a:p>
+            <a:pPr>
+              <a:lnSpc>
+                <a:spcPct val="130000"/>
+              </a:lnSpc>
+            </a:pPr>
+            <a:r>
+              <a:rPr lang="en-US" sz="1650" b="1">
+                <a:solidFill>
+                  <a:srgbClr val="51277C"/>
+                </a:solidFill>
+                <a:latin typeface="Trebuchet MS"/>
+                <a:ea typeface="Trebuchet MS"/>
+              </a:rPr>
+              <a:t>Notifikasi WhatsApp</a:t>
+            </a:r>
+            <a:endParaRPr/>
+          </a:p>
+        </p:txBody>
+      </p:sp>
+      <p:sp>
+        <p:nvSpPr>
+          <p:cNvPr id="163" name=""/>
+          <p:cNvSpPr/>
+          <p:nvPr/>
+        </p:nvSpPr>
+        <p:spPr>
+          <a:xfrm rot="0" flipH="0" flipV="0">
+            <a:off x="5600700" y="1571625"/>
+            <a:ext cx="695325" cy="247650"/>
+          </a:xfrm>
+          <a:prstGeom prst="roundRect">
+            <a:avLst>
+              <a:gd name="adj" fmla="val 46154"/>
+            </a:avLst>
+          </a:prstGeom>
+          <a:solidFill>
+            <a:srgbClr val="AFC440">
+              <a:alpha val="18000"/>
+            </a:srgbClr>
+          </a:solidFill>
+          <a:ln/>
+        </p:spPr>
+        <p:txBody>
+          <a:bodyPr/>
+          <a:p>
+            <a:pPr/>
+            <a:endParaRPr/>
+          </a:p>
+        </p:txBody>
+      </p:sp>
+      <p:sp>
+        <p:nvSpPr>
+          <p:cNvPr id="164" name=""/>
+          <p:cNvSpPr/>
+          <p:nvPr/>
+        </p:nvSpPr>
+        <p:spPr>
+          <a:xfrm rot="0" flipH="0" flipV="0">
+            <a:off x="5715000" y="1657350"/>
+            <a:ext cx="76200" cy="76200"/>
+          </a:xfrm>
+          <a:prstGeom prst="roundRect">
+            <a:avLst>
+              <a:gd name="adj" fmla="val 50000"/>
+            </a:avLst>
+          </a:prstGeom>
+          <a:solidFill>
+            <a:srgbClr val="8FA32E"/>
+          </a:solidFill>
+          <a:ln/>
+        </p:spPr>
+        <p:txBody>
+          <a:bodyPr/>
+          <a:p>
+            <a:pPr/>
+            <a:endParaRPr/>
+          </a:p>
+        </p:txBody>
+      </p:sp>
+      <p:sp>
+        <p:nvSpPr>
+          <p:cNvPr id="165" name="" descr="{&quot;isTemplate&quot;:true,&quot;type&quot;:&quot;text&quot;}"/>
+          <p:cNvSpPr txBox="1"/>
+          <p:nvPr/>
+        </p:nvSpPr>
+        <p:spPr>
+          <a:xfrm rot="0" flipH="0" flipV="0">
+            <a:off x="5848350" y="1619250"/>
+            <a:ext cx="333375" cy="152400"/>
+          </a:xfrm>
+          <a:prstGeom prst="rect"/>
+        </p:spPr>
+        <p:txBody>
+          <a:bodyPr wrap="none" lIns="0" tIns="0" rIns="0" bIns="0"/>
+          <a:p>
+            <a:pPr>
+              <a:lnSpc>
+                <a:spcPct val="100000"/>
+              </a:lnSpc>
+            </a:pPr>
+            <a:r>
+              <a:rPr lang="en-US" sz="975" b="1">
+                <a:solidFill>
+                  <a:srgbClr val="5E6B1E"/>
+                </a:solidFill>
+                <a:latin typeface="Verdana"/>
+                <a:ea typeface="Verdana"/>
+              </a:rPr>
+              <a:t>Aktif</a:t>
+            </a:r>
+            <a:endParaRPr/>
+          </a:p>
+        </p:txBody>
+      </p:sp>
+      <p:sp>
+        <p:nvSpPr>
+          <p:cNvPr id="166" name="" descr="{&quot;isTemplate&quot;:true,&quot;type&quot;:&quot;text&quot;}"/>
+          <p:cNvSpPr txBox="1"/>
+          <p:nvPr/>
+        </p:nvSpPr>
+        <p:spPr>
+          <a:xfrm rot="0" flipH="0" flipV="0">
+            <a:off x="819150" y="1895475"/>
+            <a:ext cx="5476875" cy="228600"/>
+          </a:xfrm>
+          <a:prstGeom prst="rect"/>
+        </p:spPr>
+        <p:txBody>
+          <a:bodyPr wrap="none" lIns="0" tIns="0" rIns="0" bIns="0"/>
+          <a:p>
+            <a:pPr>
+              <a:lnSpc>
+                <a:spcPct val="140000"/>
+              </a:lnSpc>
+            </a:pPr>
+            <a:r>
+              <a:rPr lang="en-US" sz="1050">
+                <a:solidFill>
+                  <a:srgbClr val="6B6478"/>
+                </a:solidFill>
+                <a:latin typeface="Verdana"/>
+                <a:ea typeface="Verdana"/>
+              </a:rPr>
+              <a:t>Nomor sekolah sudah tersambung</a:t>
+            </a:r>
+            <a:endParaRPr/>
+          </a:p>
+        </p:txBody>
+      </p:sp>
+      <p:sp>
+        <p:nvSpPr>
+          <p:cNvPr id="167" name=""/>
+          <p:cNvSpPr/>
+          <p:nvPr/>
+        </p:nvSpPr>
+        <p:spPr>
+          <a:xfrm rot="0" flipH="0" flipV="0">
+            <a:off x="819150" y="2257425"/>
+            <a:ext cx="1057275" cy="314325"/>
+          </a:xfrm>
+          <a:prstGeom prst="roundRect">
+            <a:avLst>
+              <a:gd name="adj" fmla="val 30303"/>
+            </a:avLst>
+          </a:prstGeom>
+          <a:solidFill>
+            <a:srgbClr val="51277C">
+              <a:alpha val="10000"/>
+            </a:srgbClr>
+          </a:solidFill>
+          <a:ln/>
+        </p:spPr>
+        <p:txBody>
+          <a:bodyPr/>
+          <a:p>
+            <a:pPr/>
+            <a:endParaRPr/>
+          </a:p>
+        </p:txBody>
+      </p:sp>
+      <p:sp>
+        <p:nvSpPr>
+          <p:cNvPr id="168" name="" descr="{&quot;isTemplate&quot;:true,&quot;type&quot;:&quot;text&quot;}"/>
+          <p:cNvSpPr txBox="1"/>
+          <p:nvPr/>
+        </p:nvSpPr>
+        <p:spPr>
+          <a:xfrm rot="0" flipH="0" flipV="0">
+            <a:off x="971550" y="2333625"/>
+            <a:ext cx="752475" cy="161925"/>
+          </a:xfrm>
+          <a:prstGeom prst="rect"/>
+        </p:spPr>
+        <p:txBody>
+          <a:bodyPr wrap="none" lIns="0" tIns="0" rIns="0" bIns="0"/>
+          <a:p>
+            <a:pPr>
+              <a:lnSpc>
+                <a:spcPct val="100000"/>
+              </a:lnSpc>
+            </a:pPr>
+            <a:r>
+              <a:rPr lang="en-US" sz="1050" b="1">
+                <a:solidFill>
+                  <a:srgbClr val="51277C"/>
+                </a:solidFill>
+                <a:latin typeface="Verdana"/>
+                <a:ea typeface="Verdana"/>
+              </a:rPr>
+              <a:t>Broadcast</a:t>
+            </a:r>
+            <a:endParaRPr/>
+          </a:p>
+        </p:txBody>
+      </p:sp>
+      <p:sp>
+        <p:nvSpPr>
+          <p:cNvPr id="169" name=""/>
+          <p:cNvSpPr/>
+          <p:nvPr/>
+        </p:nvSpPr>
+        <p:spPr>
+          <a:xfrm rot="0" flipH="0" flipV="0">
+            <a:off x="1952625" y="2257425"/>
+            <a:ext cx="1495425" cy="314325"/>
+          </a:xfrm>
+          <a:prstGeom prst="roundRect">
+            <a:avLst>
+              <a:gd name="adj" fmla="val 30303"/>
+            </a:avLst>
+          </a:prstGeom>
+          <a:solidFill>
+            <a:srgbClr val="51277C"/>
+          </a:solidFill>
+          <a:ln/>
+        </p:spPr>
+        <p:txBody>
+          <a:bodyPr/>
+          <a:p>
+            <a:pPr/>
+            <a:endParaRPr/>
+          </a:p>
+        </p:txBody>
+      </p:sp>
+      <p:sp>
+        <p:nvSpPr>
+          <p:cNvPr id="170" name="" descr="{&quot;isTemplate&quot;:true,&quot;type&quot;:&quot;text&quot;}"/>
+          <p:cNvSpPr txBox="1"/>
+          <p:nvPr/>
+        </p:nvSpPr>
+        <p:spPr>
+          <a:xfrm rot="0" flipH="0" flipV="0">
+            <a:off x="2105025" y="2333625"/>
+            <a:ext cx="1190625" cy="161925"/>
+          </a:xfrm>
+          <a:prstGeom prst="rect"/>
+        </p:spPr>
+        <p:txBody>
+          <a:bodyPr wrap="none" lIns="0" tIns="0" rIns="0" bIns="0"/>
+          <a:p>
+            <a:pPr>
+              <a:lnSpc>
+                <a:spcPct val="100000"/>
+              </a:lnSpc>
+            </a:pPr>
+            <a:r>
+              <a:rPr lang="en-US" sz="1050" b="1">
+                <a:solidFill>
+                  <a:srgbClr val="FFFFFF"/>
+                </a:solidFill>
+                <a:latin typeface="Verdana"/>
+                <a:ea typeface="Verdana"/>
+              </a:rPr>
+              <a:t>Pengingat piket</a:t>
+            </a:r>
+            <a:endParaRPr/>
+          </a:p>
+        </p:txBody>
+      </p:sp>
+      <p:sp>
+        <p:nvSpPr>
+          <p:cNvPr id="171" name="" descr="{&quot;isTemplate&quot;:true,&quot;type&quot;:&quot;text&quot;}"/>
+          <p:cNvSpPr txBox="1"/>
+          <p:nvPr/>
+        </p:nvSpPr>
+        <p:spPr>
+          <a:xfrm rot="0" flipH="0" flipV="0">
+            <a:off x="819150" y="2809875"/>
+            <a:ext cx="514350" cy="161925"/>
+          </a:xfrm>
+          <a:prstGeom prst="rect"/>
+        </p:spPr>
+        <p:txBody>
+          <a:bodyPr wrap="none" lIns="0" tIns="0" rIns="0" bIns="0"/>
+          <a:p>
+            <a:pPr>
+              <a:lnSpc>
+                <a:spcPct val="100000"/>
+              </a:lnSpc>
+            </a:pPr>
+            <a:r>
+              <a:rPr lang="en-US" sz="1050">
+                <a:solidFill>
+                  <a:srgbClr val="6B6478"/>
+                </a:solidFill>
+                <a:latin typeface="Verdana"/>
+                <a:ea typeface="Verdana"/>
+              </a:rPr>
+              <a:t>Tanggal</a:t>
+            </a:r>
+            <a:endParaRPr/>
+          </a:p>
+        </p:txBody>
+      </p:sp>
+      <p:sp>
+        <p:nvSpPr>
+          <p:cNvPr id="172" name=""/>
+          <p:cNvSpPr/>
+          <p:nvPr/>
+        </p:nvSpPr>
+        <p:spPr>
+          <a:xfrm rot="0" flipH="0" flipV="0">
+            <a:off x="1447800" y="2705100"/>
+            <a:ext cx="4057650" cy="361950"/>
+          </a:xfrm>
+          <a:prstGeom prst="roundRect">
+            <a:avLst>
+              <a:gd name="adj" fmla="val 26316"/>
+            </a:avLst>
+          </a:prstGeom>
+          <a:ln w="12700">
+            <a:solidFill>
+              <a:srgbClr val="E3DCD2"/>
+            </a:solidFill>
+            <a:prstDash val="solid"/>
+          </a:ln>
+        </p:spPr>
+        <p:txBody>
+          <a:bodyPr/>
+          <a:p>
+            <a:pPr/>
+            <a:endParaRPr/>
+          </a:p>
+        </p:txBody>
+      </p:sp>
+      <p:sp>
+        <p:nvSpPr>
+          <p:cNvPr id="173" name="" descr="{&quot;isTemplate&quot;:true,&quot;type&quot;:&quot;text&quot;}"/>
+          <p:cNvSpPr txBox="1"/>
+          <p:nvPr/>
+        </p:nvSpPr>
+        <p:spPr>
+          <a:xfrm rot="0" flipH="0" flipV="0">
+            <a:off x="1562100" y="2800350"/>
+            <a:ext cx="3943350" cy="171450"/>
+          </a:xfrm>
+          <a:prstGeom prst="rect"/>
+        </p:spPr>
+        <p:txBody>
+          <a:bodyPr wrap="none" lIns="0" tIns="0" rIns="0" bIns="0"/>
+          <a:p>
+            <a:pPr>
+              <a:lnSpc>
+                <a:spcPct val="100000"/>
+              </a:lnSpc>
+            </a:pPr>
+            <a:r>
+              <a:rPr lang="en-US" sz="1125">
+                <a:solidFill>
+                  <a:srgbClr val="2A2333"/>
+                </a:solidFill>
+                <a:latin typeface="Verdana"/>
+                <a:ea typeface="Verdana"/>
+              </a:rPr>
+              <a:t>1 September 2026</a:t>
+            </a:r>
+            <a:endParaRPr/>
+          </a:p>
+        </p:txBody>
+      </p:sp>
+      <p:sp>
+        <p:nvSpPr>
+          <p:cNvPr id="174" name=""/>
+          <p:cNvSpPr/>
+          <p:nvPr/>
+        </p:nvSpPr>
+        <p:spPr>
+          <a:xfrm rot="0" flipH="0" flipV="0">
+            <a:off x="5619750" y="2705100"/>
+            <a:ext cx="676275" cy="361950"/>
+          </a:xfrm>
+          <a:prstGeom prst="roundRect">
+            <a:avLst>
+              <a:gd name="adj" fmla="val 26316"/>
+            </a:avLst>
+          </a:prstGeom>
+          <a:solidFill>
+            <a:srgbClr val="51277C"/>
+          </a:solidFill>
+          <a:ln/>
+        </p:spPr>
+        <p:txBody>
+          <a:bodyPr/>
+          <a:p>
+            <a:pPr/>
+            <a:endParaRPr/>
+          </a:p>
+        </p:txBody>
+      </p:sp>
+      <p:sp>
+        <p:nvSpPr>
+          <p:cNvPr id="175" name="" descr="{&quot;isTemplate&quot;:true,&quot;type&quot;:&quot;text&quot;}"/>
+          <p:cNvSpPr txBox="1"/>
+          <p:nvPr/>
+        </p:nvSpPr>
+        <p:spPr>
+          <a:xfrm rot="0" flipH="0" flipV="0">
+            <a:off x="5753100" y="2809875"/>
+            <a:ext cx="409575" cy="161925"/>
+          </a:xfrm>
+          <a:prstGeom prst="rect"/>
+        </p:spPr>
+        <p:txBody>
+          <a:bodyPr wrap="none" lIns="0" tIns="0" rIns="0" bIns="0"/>
+          <a:p>
+            <a:pPr>
+              <a:lnSpc>
+                <a:spcPct val="100000"/>
+              </a:lnSpc>
+            </a:pPr>
+            <a:r>
+              <a:rPr lang="en-US" sz="1050" b="1">
+                <a:solidFill>
+                  <a:srgbClr val="FFFFFF"/>
+                </a:solidFill>
+                <a:latin typeface="Verdana"/>
+                <a:ea typeface="Verdana"/>
+              </a:rPr>
+              <a:t>Kirim</a:t>
+            </a:r>
+            <a:endParaRPr/>
+          </a:p>
+        </p:txBody>
+      </p:sp>
+      <p:sp>
+        <p:nvSpPr>
+          <p:cNvPr id="176" name=""/>
+          <p:cNvSpPr/>
+          <p:nvPr/>
+        </p:nvSpPr>
+        <p:spPr>
+          <a:xfrm rot="0" flipH="0" flipV="0">
+            <a:off x="866775" y="3200400"/>
+            <a:ext cx="5476875" cy="1600200"/>
+          </a:xfrm>
+          <a:prstGeom prst="roundRect">
+            <a:avLst>
+              <a:gd name="adj" fmla="val 8333"/>
+            </a:avLst>
+          </a:prstGeom>
+          <a:solidFill>
+            <a:srgbClr val="AFC440">
+              <a:alpha val="10000"/>
+            </a:srgbClr>
+          </a:solidFill>
+          <a:ln/>
+        </p:spPr>
+        <p:txBody>
+          <a:bodyPr/>
+          <a:p>
+            <a:pPr/>
+            <a:endParaRPr/>
+          </a:p>
+        </p:txBody>
+      </p:sp>
+      <p:sp>
+        <p:nvSpPr>
+          <p:cNvPr id="177" name=""/>
+          <p:cNvSpPr/>
+          <p:nvPr/>
+        </p:nvSpPr>
+        <p:spPr>
+          <a:xfrm rot="0" flipH="0" flipV="0">
+            <a:off x="866775" y="3200400"/>
+            <a:ext cx="5476875" cy="1600200"/>
+          </a:xfrm>
+          <a:custGeom>
+            <a:pathLst>
+              <a:path w="575" h="168">
+                <a:moveTo>
+                  <a:pt x="13" y="0"/>
+                </a:moveTo>
+                <a:cubicBezTo>
+                  <a:pt x="9" y="0"/>
+                  <a:pt x="5" y="4"/>
+                  <a:pt x="5" y="9"/>
+                </a:cubicBezTo>
+                <a:lnTo>
+                  <a:pt x="5" y="159"/>
+                </a:lnTo>
+                <a:cubicBezTo>
+                  <a:pt x="5" y="163"/>
+                  <a:pt x="8" y="167"/>
+                  <a:pt x="12" y="168"/>
+                </a:cubicBezTo>
+                <a:cubicBezTo>
+                  <a:pt x="5" y="167"/>
+                  <a:pt x="0" y="161"/>
+                  <a:pt x="0" y="154"/>
+                </a:cubicBezTo>
+                <a:lnTo>
+                  <a:pt x="0" y="14"/>
+                </a:lnTo>
+                <a:cubicBezTo>
+                  <a:pt x="0" y="6"/>
+                  <a:pt x="6" y="0"/>
+                  <a:pt x="14" y="0"/>
+                </a:cubicBezTo>
+                <a:close/>
+              </a:path>
+            </a:pathLst>
+          </a:custGeom>
+          <a:solidFill>
+            <a:srgbClr val="AFC440"/>
+          </a:solidFill>
+          <a:ln/>
+        </p:spPr>
+        <p:txBody>
+          <a:bodyPr/>
+          <a:p>
+            <a:pPr/>
+            <a:endParaRPr/>
+          </a:p>
+        </p:txBody>
+      </p:sp>
+      <p:sp>
+        <p:nvSpPr>
+          <p:cNvPr id="178" name="" descr="{&quot;isTemplate&quot;:true,&quot;type&quot;:&quot;text&quot;}"/>
+          <p:cNvSpPr txBox="1"/>
+          <p:nvPr/>
+        </p:nvSpPr>
+        <p:spPr>
+          <a:xfrm rot="0" flipH="0" flipV="0">
+            <a:off x="1000125" y="3333750"/>
+            <a:ext cx="5162550" cy="209550"/>
+          </a:xfrm>
+          <a:prstGeom prst="rect"/>
+        </p:spPr>
+        <p:txBody>
+          <a:bodyPr wrap="none" lIns="0" tIns="0" rIns="0" bIns="0"/>
+          <a:p>
+            <a:pPr>
+              <a:lnSpc>
+                <a:spcPct val="140000"/>
+              </a:lnSpc>
+            </a:pPr>
+            <a:r>
+              <a:rPr lang="en-US" sz="975">
+                <a:solidFill>
+                  <a:srgbClr val="6B6478"/>
+                </a:solidFill>
+                <a:latin typeface="Verdana"/>
+                <a:ea typeface="Verdana"/>
+              </a:rPr>
+              <a:t>Pesan yang akan terkirim</a:t>
+            </a:r>
+            <a:endParaRPr/>
+          </a:p>
+        </p:txBody>
+      </p:sp>
+      <p:sp>
+        <p:nvSpPr>
+          <p:cNvPr id="179" name="" descr="{&quot;isTemplate&quot;:true,&quot;type&quot;:&quot;text&quot;}"/>
+          <p:cNvSpPr txBox="1"/>
+          <p:nvPr/>
+        </p:nvSpPr>
+        <p:spPr>
+          <a:xfrm rot="0" flipH="0" flipV="0">
+            <a:off x="1000125" y="3619500"/>
+            <a:ext cx="5162550" cy="514350"/>
+          </a:xfrm>
+          <a:prstGeom prst="rect"/>
+        </p:spPr>
+        <p:txBody>
+          <a:bodyPr wrap="square" lIns="0" tIns="0" rIns="0" bIns="0">
+            <a:normAutofit/>
+          </a:bodyPr>
+          <a:p>
+            <a:pPr>
+              <a:lnSpc>
+                <a:spcPct val="150000"/>
+              </a:lnSpc>
+            </a:pPr>
+            <a:r>
+              <a:rPr lang="en-US" sz="1125">
+                <a:solidFill>
+                  <a:srgbClr val="2A2333"/>
+                </a:solidFill>
+                <a:latin typeface="Verdana"/>
+                <a:ea typeface="Verdana"/>
+              </a:rPr>
+              <a:t>Assalamualaikum Bu Ani, Ani bertugas membawa snack pada Selasa, 1 September 2026 (Roti Abon + Susu). Terima kasih.</a:t>
+            </a:r>
+            <a:endParaRPr/>
+          </a:p>
+        </p:txBody>
+      </p:sp>
+      <p:sp>
+        <p:nvSpPr>
+          <p:cNvPr id="180" name="" descr="{&quot;isTemplate&quot;:true,&quot;type&quot;:&quot;text&quot;}"/>
+          <p:cNvSpPr txBox="1"/>
+          <p:nvPr/>
+        </p:nvSpPr>
+        <p:spPr>
+          <a:xfrm rot="0" flipH="0" flipV="0">
+            <a:off x="819150" y="4933950"/>
+            <a:ext cx="1438275" cy="161925"/>
+          </a:xfrm>
+          <a:prstGeom prst="rect"/>
+        </p:spPr>
+        <p:txBody>
+          <a:bodyPr wrap="none" lIns="0" tIns="0" rIns="0" bIns="0"/>
+          <a:p>
+            <a:pPr>
+              <a:lnSpc>
+                <a:spcPct val="100000"/>
+              </a:lnSpc>
+            </a:pPr>
+            <a:r>
+              <a:rPr lang="en-US" sz="1050" b="1">
+                <a:solidFill>
+                  <a:srgbClr val="51277C"/>
+                </a:solidFill>
+                <a:latin typeface="Verdana"/>
+                <a:ea typeface="Verdana"/>
+              </a:rPr>
+              <a:t>1 terkirim · 0 gagal</a:t>
+            </a:r>
+            <a:endParaRPr/>
+          </a:p>
+        </p:txBody>
+      </p:sp>
+      <p:sp>
+        <p:nvSpPr>
+          <p:cNvPr id="181" name="" descr="{&quot;isTemplate&quot;:true,&quot;type&quot;:&quot;text&quot;}"/>
+          <p:cNvSpPr txBox="1"/>
+          <p:nvPr/>
+        </p:nvSpPr>
+        <p:spPr>
+          <a:xfrm rot="0" flipH="0" flipV="0">
+            <a:off x="2352675" y="4943475"/>
+            <a:ext cx="1285875" cy="152400"/>
+          </a:xfrm>
+          <a:prstGeom prst="rect"/>
+        </p:spPr>
+        <p:txBody>
+          <a:bodyPr wrap="none" lIns="0" tIns="0" rIns="0" bIns="0"/>
+          <a:p>
+            <a:pPr>
+              <a:lnSpc>
+                <a:spcPct val="100000"/>
+              </a:lnSpc>
+            </a:pPr>
+            <a:r>
+              <a:rPr lang="en-US" sz="975">
+                <a:solidFill>
+                  <a:srgbClr val="6B6478"/>
+                </a:solidFill>
+                <a:latin typeface="Verdana"/>
+                <a:ea typeface="Verdana"/>
+              </a:rPr>
+              <a:t>tersimpan di riwayat</a:t>
+            </a:r>
+            <a:endParaRPr/>
+          </a:p>
+        </p:txBody>
+      </p:sp>
+      <p:sp>
+        <p:nvSpPr>
+          <p:cNvPr id="182" name=""/>
+          <p:cNvSpPr/>
+          <p:nvPr/>
+        </p:nvSpPr>
+        <p:spPr>
+          <a:xfrm rot="0" flipH="0" flipV="0">
+            <a:off x="819150" y="5248275"/>
+            <a:ext cx="5476875" cy="9525"/>
+          </a:xfrm>
+          <a:prstGeom prst="rect">
+            <a:avLst/>
+          </a:prstGeom>
+          <a:solidFill>
+            <a:srgbClr val="EFEAE1"/>
+          </a:solidFill>
+          <a:ln/>
+        </p:spPr>
+        <p:txBody>
+          <a:bodyPr/>
+          <a:p>
+            <a:pPr/>
+            <a:endParaRPr/>
+          </a:p>
+        </p:txBody>
+      </p:sp>
+      <p:sp>
+        <p:nvSpPr>
+          <p:cNvPr id="183" name="" descr="{&quot;isTemplate&quot;:true,&quot;type&quot;:&quot;text&quot;}"/>
+          <p:cNvSpPr txBox="1"/>
+          <p:nvPr/>
+        </p:nvSpPr>
+        <p:spPr>
+          <a:xfrm rot="0" flipH="0" flipV="0">
+            <a:off x="819150" y="5372100"/>
+            <a:ext cx="5476875" cy="152400"/>
+          </a:xfrm>
+          <a:prstGeom prst="rect"/>
+        </p:spPr>
+        <p:txBody>
+          <a:bodyPr wrap="none" lIns="0" tIns="0" rIns="0" bIns="0"/>
+          <a:p>
+            <a:pPr>
+              <a:lnSpc>
+                <a:spcPct val="100000"/>
+              </a:lnSpc>
+            </a:pPr>
+            <a:r>
+              <a:rPr lang="en-US" sz="975">
+                <a:solidFill>
+                  <a:srgbClr val="6B6478"/>
+                </a:solidFill>
+                <a:latin typeface="Verdana"/>
+                <a:ea typeface="Verdana"/>
+              </a:rPr>
+              <a:t>Riwayat</a:t>
+            </a:r>
+            <a:endParaRPr/>
+          </a:p>
+        </p:txBody>
+      </p:sp>
+      <p:sp>
+        <p:nvSpPr>
+          <p:cNvPr id="184" name="" descr="{&quot;isTemplate&quot;:true,&quot;type&quot;:&quot;text&quot;}"/>
+          <p:cNvSpPr txBox="1"/>
+          <p:nvPr/>
+        </p:nvSpPr>
+        <p:spPr>
+          <a:xfrm rot="0" flipH="0" flipV="0">
+            <a:off x="819150" y="5600700"/>
+            <a:ext cx="1466850" cy="152400"/>
+          </a:xfrm>
+          <a:prstGeom prst="rect"/>
+        </p:spPr>
+        <p:txBody>
+          <a:bodyPr wrap="none" lIns="0" tIns="0" rIns="0" bIns="0"/>
+          <a:p>
+            <a:pPr>
+              <a:lnSpc>
+                <a:spcPct val="100000"/>
+              </a:lnSpc>
+            </a:pPr>
+            <a:r>
+              <a:rPr lang="en-US" sz="975">
+                <a:solidFill>
+                  <a:srgbClr val="2A2333"/>
+                </a:solidFill>
+                <a:latin typeface="Verdana"/>
+                <a:ea typeface="Verdana"/>
+              </a:rPr>
+              <a:t>1 Sep 2026 · 1 terkirim</a:t>
+            </a:r>
+            <a:endParaRPr/>
+          </a:p>
+        </p:txBody>
+      </p:sp>
+      <p:sp>
+        <p:nvSpPr>
+          <p:cNvPr id="185" name="" descr="{&quot;isTemplate&quot;:true,&quot;type&quot;:&quot;text&quot;}"/>
+          <p:cNvSpPr txBox="1"/>
+          <p:nvPr/>
+        </p:nvSpPr>
+        <p:spPr>
+          <a:xfrm rot="0" flipH="0" flipV="0">
+            <a:off x="5876925" y="5600700"/>
+            <a:ext cx="419100" cy="152400"/>
+          </a:xfrm>
+          <a:prstGeom prst="rect"/>
+        </p:spPr>
+        <p:txBody>
+          <a:bodyPr wrap="none" lIns="0" tIns="0" rIns="0" bIns="0"/>
+          <a:p>
+            <a:pPr>
+              <a:lnSpc>
+                <a:spcPct val="100000"/>
+              </a:lnSpc>
+            </a:pPr>
+            <a:r>
+              <a:rPr lang="en-US" sz="975">
+                <a:solidFill>
+                  <a:srgbClr val="5E6B1E"/>
+                </a:solidFill>
+                <a:latin typeface="Verdana"/>
+                <a:ea typeface="Verdana"/>
+              </a:rPr>
+              <a:t>selesai</a:t>
+            </a:r>
+            <a:endParaRPr/>
+          </a:p>
+        </p:txBody>
+      </p:sp>
+      <p:sp>
+        <p:nvSpPr>
+          <p:cNvPr id="186" name="" descr="{&quot;isTemplate&quot;:true,&quot;type&quot;:&quot;text&quot;}"/>
+          <p:cNvSpPr txBox="1"/>
+          <p:nvPr/>
+        </p:nvSpPr>
+        <p:spPr>
+          <a:xfrm rot="0" flipH="0" flipV="0">
+            <a:off x="819150" y="5819775"/>
+            <a:ext cx="1276350" cy="152400"/>
+          </a:xfrm>
+          <a:prstGeom prst="rect"/>
+        </p:spPr>
+        <p:txBody>
+          <a:bodyPr wrap="none" lIns="0" tIns="0" rIns="0" bIns="0"/>
+          <a:p>
+            <a:pPr>
+              <a:lnSpc>
+                <a:spcPct val="100000"/>
+              </a:lnSpc>
+            </a:pPr>
+            <a:r>
+              <a:rPr lang="en-US" sz="975">
+                <a:solidFill>
+                  <a:srgbClr val="2A2333"/>
+                </a:solidFill>
+                <a:latin typeface="Verdana"/>
+                <a:ea typeface="Verdana"/>
+              </a:rPr>
+              <a:t>30 Agu 2026 · gagal</a:t>
+            </a:r>
+            <a:endParaRPr/>
+          </a:p>
+        </p:txBody>
+      </p:sp>
+      <p:sp>
+        <p:nvSpPr>
+          <p:cNvPr id="187" name="" descr="{&quot;isTemplate&quot;:true,&quot;type&quot;:&quot;text&quot;}"/>
+          <p:cNvSpPr txBox="1"/>
+          <p:nvPr/>
+        </p:nvSpPr>
+        <p:spPr>
+          <a:xfrm rot="0" flipH="0" flipV="0">
+            <a:off x="4943475" y="5819775"/>
+            <a:ext cx="1352550" cy="152400"/>
+          </a:xfrm>
+          <a:prstGeom prst="rect"/>
+        </p:spPr>
+        <p:txBody>
+          <a:bodyPr wrap="none" lIns="0" tIns="0" rIns="0" bIns="0"/>
+          <a:p>
+            <a:pPr>
+              <a:lnSpc>
+                <a:spcPct val="100000"/>
+              </a:lnSpc>
+            </a:pPr>
+            <a:r>
+              <a:rPr lang="en-US" sz="975">
+                <a:solidFill>
+                  <a:srgbClr val="A8452C"/>
+                </a:solidFill>
+                <a:latin typeface="Verdana"/>
+                <a:ea typeface="Verdana"/>
+              </a:rPr>
+              <a:t>nomor tidak terdaftar</a:t>
+            </a:r>
+            <a:endParaRPr/>
+          </a:p>
+        </p:txBody>
+      </p:sp>
+      <p:sp>
+        <p:nvSpPr>
+          <p:cNvPr id="188" name=""/>
+          <p:cNvSpPr/>
+          <p:nvPr/>
+        </p:nvSpPr>
+        <p:spPr>
+          <a:xfrm rot="0" flipH="0" flipV="0">
+            <a:off x="6810375" y="1238250"/>
+            <a:ext cx="4829175" cy="1266825"/>
+          </a:xfrm>
+          <a:prstGeom prst="roundRect">
+            <a:avLst>
+              <a:gd name="adj" fmla="val 10526"/>
+            </a:avLst>
+          </a:prstGeom>
+          <a:solidFill>
+            <a:srgbClr val="51277C">
+              <a:alpha val="6000"/>
+            </a:srgbClr>
+          </a:solidFill>
+          <a:ln/>
+        </p:spPr>
+        <p:txBody>
+          <a:bodyPr/>
+          <a:p>
+            <a:pPr/>
+            <a:endParaRPr/>
+          </a:p>
+        </p:txBody>
+      </p:sp>
+      <p:sp>
+        <p:nvSpPr>
+          <p:cNvPr id="189" name=""/>
+          <p:cNvSpPr/>
+          <p:nvPr/>
+        </p:nvSpPr>
+        <p:spPr>
+          <a:xfrm rot="0" flipH="0" flipV="0">
+            <a:off x="6810375" y="1238250"/>
+            <a:ext cx="4829175" cy="1266825"/>
+          </a:xfrm>
+          <a:custGeom>
+            <a:pathLst>
+              <a:path w="507" h="133">
+                <a:moveTo>
+                  <a:pt x="13" y="0"/>
+                </a:moveTo>
+                <a:cubicBezTo>
+                  <a:pt x="9" y="0"/>
+                  <a:pt x="6" y="4"/>
+                  <a:pt x="6" y="8"/>
+                </a:cubicBezTo>
+                <a:lnTo>
+                  <a:pt x="6" y="125"/>
+                </a:lnTo>
+                <a:cubicBezTo>
+                  <a:pt x="6" y="129"/>
+                  <a:pt x="9" y="132"/>
+                  <a:pt x="13" y="133"/>
+                </a:cubicBezTo>
+                <a:cubicBezTo>
+                  <a:pt x="5" y="132"/>
+                  <a:pt x="0" y="126"/>
+                  <a:pt x="0" y="119"/>
+                </a:cubicBezTo>
+                <a:lnTo>
+                  <a:pt x="0" y="14"/>
+                </a:lnTo>
+                <a:cubicBezTo>
+                  <a:pt x="0" y="6"/>
+                  <a:pt x="6" y="0"/>
+                  <a:pt x="14" y="0"/>
+                </a:cubicBezTo>
+                <a:close/>
+              </a:path>
+            </a:pathLst>
+          </a:custGeom>
+          <a:solidFill>
+            <a:srgbClr val="F3B26C"/>
+          </a:solidFill>
+          <a:ln/>
+        </p:spPr>
+        <p:txBody>
+          <a:bodyPr/>
+          <a:p>
+            <a:pPr/>
+            <a:endParaRPr/>
+          </a:p>
+        </p:txBody>
+      </p:sp>
+      <p:sp>
+        <p:nvSpPr>
+          <p:cNvPr id="190" name="" descr="{&quot;isTemplate&quot;:true,&quot;type&quot;:&quot;text&quot;}"/>
+          <p:cNvSpPr txBox="1"/>
+          <p:nvPr/>
+        </p:nvSpPr>
+        <p:spPr>
+          <a:xfrm rot="0" flipH="0" flipV="0">
+            <a:off x="6962775" y="1352550"/>
+            <a:ext cx="4467225" cy="285750"/>
+          </a:xfrm>
+          <a:prstGeom prst="rect"/>
+        </p:spPr>
+        <p:txBody>
+          <a:bodyPr wrap="none" lIns="0" tIns="0" rIns="0" bIns="0"/>
+          <a:p>
+            <a:pPr>
+              <a:lnSpc>
+                <a:spcPct val="130000"/>
+              </a:lnSpc>
+            </a:pPr>
+            <a:r>
+              <a:rPr lang="en-US" sz="1425" b="1">
+                <a:solidFill>
+                  <a:srgbClr val="51277C"/>
+                </a:solidFill>
+                <a:latin typeface="Trebuchet MS"/>
+                <a:ea typeface="Trebuchet MS"/>
+              </a:rPr>
+              <a:t>Pilih tanggal, tekan Kirim</a:t>
+            </a:r>
+            <a:endParaRPr/>
+          </a:p>
+        </p:txBody>
+      </p:sp>
+      <p:sp>
+        <p:nvSpPr>
+          <p:cNvPr id="191" name="" descr="{&quot;isTemplate&quot;:true,&quot;type&quot;:&quot;text&quot;}"/>
+          <p:cNvSpPr txBox="1"/>
+          <p:nvPr/>
+        </p:nvSpPr>
+        <p:spPr>
+          <a:xfrm rot="0" flipH="0" flipV="0">
+            <a:off x="6962775" y="1685925"/>
+            <a:ext cx="4467225" cy="504825"/>
+          </a:xfrm>
+          <a:prstGeom prst="rect"/>
+        </p:spPr>
+        <p:txBody>
+          <a:bodyPr wrap="square" lIns="0" tIns="0" rIns="0" bIns="0">
+            <a:normAutofit/>
+          </a:bodyPr>
+          <a:p>
+            <a:pPr>
+              <a:lnSpc>
+                <a:spcPct val="145000"/>
+              </a:lnSpc>
+            </a:pPr>
+            <a:r>
+              <a:rPr lang="en-US" sz="1125">
+                <a:solidFill>
+                  <a:srgbClr val="2A2333"/>
+                </a:solidFill>
+                <a:latin typeface="Verdana"/>
+                <a:ea typeface="Verdana"/>
+              </a:rPr>
+              <a:t>Pengingat berangkat ke wali petugas pada tanggal itu. Bawaannya besok — biasanya tinggal satu tekan.</a:t>
+            </a:r>
+            <a:endParaRPr/>
+          </a:p>
+        </p:txBody>
+      </p:sp>
+      <p:sp>
+        <p:nvSpPr>
+          <p:cNvPr id="192" name=""/>
+          <p:cNvSpPr/>
+          <p:nvPr/>
+        </p:nvSpPr>
+        <p:spPr>
+          <a:xfrm rot="0" flipH="0" flipV="0">
+            <a:off x="6810375" y="2505075"/>
+            <a:ext cx="4829175" cy="1257300"/>
+          </a:xfrm>
+          <a:prstGeom prst="roundRect">
+            <a:avLst>
+              <a:gd name="adj" fmla="val 10606"/>
+            </a:avLst>
+          </a:prstGeom>
+          <a:solidFill>
+            <a:srgbClr val="51277C">
+              <a:alpha val="6000"/>
+            </a:srgbClr>
+          </a:solidFill>
+          <a:ln/>
+        </p:spPr>
+        <p:txBody>
+          <a:bodyPr/>
+          <a:p>
+            <a:pPr/>
+            <a:endParaRPr/>
+          </a:p>
+        </p:txBody>
+      </p:sp>
+      <p:sp>
+        <p:nvSpPr>
+          <p:cNvPr id="193" name=""/>
+          <p:cNvSpPr/>
+          <p:nvPr/>
+        </p:nvSpPr>
+        <p:spPr>
+          <a:xfrm rot="0" flipH="0" flipV="0">
+            <a:off x="6810375" y="2505075"/>
+            <a:ext cx="4829175" cy="1257300"/>
+          </a:xfrm>
+          <a:custGeom>
+            <a:pathLst>
+              <a:path w="507" h="132">
+                <a:moveTo>
+                  <a:pt x="13" y="0"/>
+                </a:moveTo>
+                <a:cubicBezTo>
+                  <a:pt x="9" y="0"/>
+                  <a:pt x="6" y="4"/>
+                  <a:pt x="6" y="8"/>
+                </a:cubicBezTo>
+                <a:lnTo>
+                  <a:pt x="6" y="124"/>
+                </a:lnTo>
+                <a:cubicBezTo>
+                  <a:pt x="6" y="128"/>
+                  <a:pt x="9" y="131"/>
+                  <a:pt x="13" y="132"/>
+                </a:cubicBezTo>
+                <a:cubicBezTo>
+                  <a:pt x="5" y="131"/>
+                  <a:pt x="0" y="125"/>
+                  <a:pt x="0" y="118"/>
+                </a:cubicBezTo>
+                <a:lnTo>
+                  <a:pt x="0" y="14"/>
+                </a:lnTo>
+                <a:cubicBezTo>
+                  <a:pt x="0" y="6"/>
+                  <a:pt x="6" y="0"/>
+                  <a:pt x="14" y="0"/>
+                </a:cubicBezTo>
+                <a:close/>
+              </a:path>
+            </a:pathLst>
+          </a:custGeom>
+          <a:solidFill>
+            <a:srgbClr val="F3B26C"/>
+          </a:solidFill>
+          <a:ln/>
+        </p:spPr>
+        <p:txBody>
+          <a:bodyPr/>
+          <a:p>
+            <a:pPr/>
+            <a:endParaRPr/>
+          </a:p>
+        </p:txBody>
+      </p:sp>
+      <p:sp>
+        <p:nvSpPr>
+          <p:cNvPr id="194" name="" descr="{&quot;isTemplate&quot;:true,&quot;type&quot;:&quot;text&quot;}"/>
+          <p:cNvSpPr txBox="1"/>
+          <p:nvPr/>
+        </p:nvSpPr>
+        <p:spPr>
+          <a:xfrm rot="0" flipH="0" flipV="0">
+            <a:off x="6962775" y="2619375"/>
+            <a:ext cx="4467225" cy="285750"/>
+          </a:xfrm>
+          <a:prstGeom prst="rect"/>
+        </p:spPr>
+        <p:txBody>
+          <a:bodyPr wrap="none" lIns="0" tIns="0" rIns="0" bIns="0"/>
+          <a:p>
+            <a:pPr>
+              <a:lnSpc>
+                <a:spcPct val="130000"/>
+              </a:lnSpc>
+            </a:pPr>
+            <a:r>
+              <a:rPr lang="en-US" sz="1425" b="1">
+                <a:solidFill>
+                  <a:srgbClr val="51277C"/>
+                </a:solidFill>
+                <a:latin typeface="Trebuchet MS"/>
+                <a:ea typeface="Trebuchet MS"/>
+              </a:rPr>
+              <a:t>Kelas Anda sendiri</a:t>
+            </a:r>
+            <a:endParaRPr/>
+          </a:p>
+        </p:txBody>
+      </p:sp>
+      <p:sp>
+        <p:nvSpPr>
+          <p:cNvPr id="195" name="" descr="{&quot;isTemplate&quot;:true,&quot;type&quot;:&quot;text&quot;}"/>
+          <p:cNvSpPr txBox="1"/>
+          <p:nvPr/>
+        </p:nvSpPr>
+        <p:spPr>
+          <a:xfrm rot="0" flipH="0" flipV="0">
+            <a:off x="6962775" y="2952750"/>
+            <a:ext cx="4467225" cy="504825"/>
+          </a:xfrm>
+          <a:prstGeom prst="rect"/>
+        </p:spPr>
+        <p:txBody>
+          <a:bodyPr wrap="square" lIns="0" tIns="0" rIns="0" bIns="0">
+            <a:normAutofit/>
+          </a:bodyPr>
+          <a:p>
+            <a:pPr>
+              <a:lnSpc>
+                <a:spcPct val="145000"/>
+              </a:lnSpc>
+            </a:pPr>
+            <a:r>
+              <a:rPr lang="en-US" sz="1125">
+                <a:solidFill>
+                  <a:srgbClr val="2A2333"/>
+                </a:solidFill>
+                <a:latin typeface="Verdana"/>
+                <a:ea typeface="Verdana"/>
+              </a:rPr>
+              <a:t>Korlas hanya bisa mengirim untuk kelasnya. Admin boleh memilih semua kelas sekaligus.</a:t>
+            </a:r>
+            <a:endParaRPr/>
+          </a:p>
+        </p:txBody>
+      </p:sp>
+      <p:sp>
+        <p:nvSpPr>
+          <p:cNvPr id="196" name=""/>
+          <p:cNvSpPr/>
+          <p:nvPr/>
+        </p:nvSpPr>
+        <p:spPr>
+          <a:xfrm rot="0" flipH="0" flipV="0">
+            <a:off x="6810375" y="3762375"/>
+            <a:ext cx="4829175" cy="1266825"/>
+          </a:xfrm>
+          <a:prstGeom prst="roundRect">
+            <a:avLst>
+              <a:gd name="adj" fmla="val 10526"/>
+            </a:avLst>
+          </a:prstGeom>
+          <a:solidFill>
+            <a:srgbClr val="51277C">
+              <a:alpha val="6000"/>
+            </a:srgbClr>
+          </a:solidFill>
+          <a:ln/>
+        </p:spPr>
+        <p:txBody>
+          <a:bodyPr/>
+          <a:p>
+            <a:pPr/>
+            <a:endParaRPr/>
+          </a:p>
+        </p:txBody>
+      </p:sp>
+      <p:sp>
+        <p:nvSpPr>
+          <p:cNvPr id="197" name=""/>
+          <p:cNvSpPr/>
+          <p:nvPr/>
+        </p:nvSpPr>
+        <p:spPr>
+          <a:xfrm rot="0" flipH="0" flipV="0">
+            <a:off x="6810375" y="3762375"/>
+            <a:ext cx="4829175" cy="1266825"/>
+          </a:xfrm>
+          <a:custGeom>
+            <a:pathLst>
+              <a:path w="507" h="133">
+                <a:moveTo>
+                  <a:pt x="13" y="0"/>
+                </a:moveTo>
+                <a:cubicBezTo>
+                  <a:pt x="9" y="0"/>
+                  <a:pt x="6" y="4"/>
+                  <a:pt x="6" y="8"/>
+                </a:cubicBezTo>
+                <a:lnTo>
+                  <a:pt x="6" y="125"/>
+                </a:lnTo>
+                <a:cubicBezTo>
+                  <a:pt x="6" y="129"/>
+                  <a:pt x="9" y="132"/>
+                  <a:pt x="13" y="133"/>
+                </a:cubicBezTo>
+                <a:cubicBezTo>
+                  <a:pt x="5" y="132"/>
+                  <a:pt x="0" y="126"/>
+                  <a:pt x="0" y="119"/>
+                </a:cubicBezTo>
+                <a:lnTo>
+                  <a:pt x="0" y="14"/>
+                </a:lnTo>
+                <a:cubicBezTo>
+                  <a:pt x="0" y="6"/>
+                  <a:pt x="6" y="0"/>
+                  <a:pt x="14" y="0"/>
+                </a:cubicBezTo>
+                <a:close/>
+              </a:path>
+            </a:pathLst>
+          </a:custGeom>
+          <a:solidFill>
+            <a:srgbClr val="F3B26C"/>
+          </a:solidFill>
+          <a:ln/>
+        </p:spPr>
+        <p:txBody>
+          <a:bodyPr/>
+          <a:p>
+            <a:pPr/>
+            <a:endParaRPr/>
+          </a:p>
+        </p:txBody>
+      </p:sp>
+      <p:sp>
+        <p:nvSpPr>
+          <p:cNvPr id="198" name="" descr="{&quot;isTemplate&quot;:true,&quot;type&quot;:&quot;text&quot;}"/>
+          <p:cNvSpPr txBox="1"/>
+          <p:nvPr/>
+        </p:nvSpPr>
+        <p:spPr>
+          <a:xfrm rot="0" flipH="0" flipV="0">
+            <a:off x="6962775" y="3876675"/>
+            <a:ext cx="4467225" cy="285750"/>
+          </a:xfrm>
+          <a:prstGeom prst="rect"/>
+        </p:spPr>
+        <p:txBody>
+          <a:bodyPr wrap="none" lIns="0" tIns="0" rIns="0" bIns="0"/>
+          <a:p>
+            <a:pPr>
+              <a:lnSpc>
+                <a:spcPct val="130000"/>
+              </a:lnSpc>
+            </a:pPr>
+            <a:r>
+              <a:rPr lang="en-US" sz="1425" b="1">
+                <a:solidFill>
+                  <a:srgbClr val="51277C"/>
+                </a:solidFill>
+                <a:latin typeface="Trebuchet MS"/>
+                <a:ea typeface="Trebuchet MS"/>
+              </a:rPr>
+              <a:t>Konfirmasi berjalan sendiri</a:t>
+            </a:r>
+            <a:endParaRPr/>
+          </a:p>
+        </p:txBody>
+      </p:sp>
+      <p:sp>
+        <p:nvSpPr>
+          <p:cNvPr id="199" name="" descr="{&quot;isTemplate&quot;:true,&quot;type&quot;:&quot;text&quot;}"/>
+          <p:cNvSpPr txBox="1"/>
+          <p:nvPr/>
+        </p:nvSpPr>
+        <p:spPr>
+          <a:xfrm rot="0" flipH="0" flipV="0">
+            <a:off x="6962775" y="4210050"/>
+            <a:ext cx="4467225" cy="504825"/>
+          </a:xfrm>
+          <a:prstGeom prst="rect"/>
+        </p:spPr>
+        <p:txBody>
+          <a:bodyPr wrap="square" lIns="0" tIns="0" rIns="0" bIns="0">
+            <a:normAutofit/>
+          </a:bodyPr>
+          <a:p>
+            <a:pPr>
+              <a:lnSpc>
+                <a:spcPct val="145000"/>
+              </a:lnSpc>
+            </a:pPr>
+            <a:r>
+              <a:rPr lang="en-US" sz="1125">
+                <a:solidFill>
+                  <a:srgbClr val="2A2333"/>
+                </a:solidFill>
+                <a:latin typeface="Verdana"/>
+                <a:ea typeface="Verdana"/>
+              </a:rPr>
+              <a:t>Begitu orang tua mengambil tanggal, wali langsung menerima konfirmasi — Anda tidak perlu mengabari lagi.</a:t>
+            </a:r>
+            <a:endParaRPr/>
+          </a:p>
+        </p:txBody>
+      </p:sp>
+      <p:sp>
+        <p:nvSpPr>
+          <p:cNvPr id="200" name=""/>
+          <p:cNvSpPr/>
+          <p:nvPr/>
+        </p:nvSpPr>
+        <p:spPr>
+          <a:xfrm rot="0" flipH="0" flipV="0">
+            <a:off x="6810375" y="5029200"/>
+            <a:ext cx="4829175" cy="1257300"/>
+          </a:xfrm>
+          <a:prstGeom prst="roundRect">
+            <a:avLst>
+              <a:gd name="adj" fmla="val 10606"/>
+            </a:avLst>
+          </a:prstGeom>
+          <a:solidFill>
+            <a:srgbClr val="51277C">
+              <a:alpha val="6000"/>
+            </a:srgbClr>
+          </a:solidFill>
+          <a:ln/>
+        </p:spPr>
+        <p:txBody>
+          <a:bodyPr/>
+          <a:p>
+            <a:pPr/>
+            <a:endParaRPr/>
+          </a:p>
+        </p:txBody>
+      </p:sp>
+      <p:sp>
+        <p:nvSpPr>
+          <p:cNvPr id="201" name=""/>
+          <p:cNvSpPr/>
+          <p:nvPr/>
+        </p:nvSpPr>
+        <p:spPr>
+          <a:xfrm rot="0" flipH="0" flipV="0">
+            <a:off x="6810375" y="5029200"/>
+            <a:ext cx="4829175" cy="1257300"/>
+          </a:xfrm>
+          <a:custGeom>
+            <a:pathLst>
+              <a:path w="507" h="132">
+                <a:moveTo>
+                  <a:pt x="13" y="0"/>
+                </a:moveTo>
+                <a:cubicBezTo>
+                  <a:pt x="9" y="0"/>
+                  <a:pt x="6" y="4"/>
+                  <a:pt x="6" y="8"/>
+                </a:cubicBezTo>
+                <a:lnTo>
+                  <a:pt x="6" y="124"/>
+                </a:lnTo>
+                <a:cubicBezTo>
+                  <a:pt x="6" y="128"/>
+                  <a:pt x="9" y="131"/>
+                  <a:pt x="13" y="132"/>
+                </a:cubicBezTo>
+                <a:cubicBezTo>
+                  <a:pt x="5" y="131"/>
+                  <a:pt x="0" y="125"/>
+                  <a:pt x="0" y="118"/>
+                </a:cubicBezTo>
+                <a:lnTo>
+                  <a:pt x="0" y="14"/>
+                </a:lnTo>
+                <a:cubicBezTo>
+                  <a:pt x="0" y="6"/>
+                  <a:pt x="6" y="0"/>
+                  <a:pt x="14" y="0"/>
+                </a:cubicBezTo>
+                <a:close/>
+              </a:path>
+            </a:pathLst>
+          </a:custGeom>
+          <a:solidFill>
+            <a:srgbClr val="F3B26C"/>
+          </a:solidFill>
+          <a:ln/>
+        </p:spPr>
+        <p:txBody>
+          <a:bodyPr/>
+          <a:p>
+            <a:pPr/>
+            <a:endParaRPr/>
+          </a:p>
+        </p:txBody>
+      </p:sp>
+      <p:sp>
+        <p:nvSpPr>
+          <p:cNvPr id="202" name="" descr="{&quot;isTemplate&quot;:true,&quot;type&quot;:&quot;text&quot;}"/>
+          <p:cNvSpPr txBox="1"/>
+          <p:nvPr/>
+        </p:nvSpPr>
+        <p:spPr>
+          <a:xfrm rot="0" flipH="0" flipV="0">
+            <a:off x="6962775" y="5143500"/>
+            <a:ext cx="4467225" cy="285750"/>
+          </a:xfrm>
+          <a:prstGeom prst="rect"/>
+        </p:spPr>
+        <p:txBody>
+          <a:bodyPr wrap="none" lIns="0" tIns="0" rIns="0" bIns="0"/>
+          <a:p>
+            <a:pPr>
+              <a:lnSpc>
+                <a:spcPct val="130000"/>
+              </a:lnSpc>
+            </a:pPr>
+            <a:r>
+              <a:rPr lang="en-US" sz="1425" b="1">
+                <a:solidFill>
+                  <a:srgbClr val="51277C"/>
+                </a:solidFill>
+                <a:latin typeface="Trebuchet MS"/>
+                <a:ea typeface="Trebuchet MS"/>
+              </a:rPr>
+              <a:t>Kalau gagal, alasannya tertulis</a:t>
+            </a:r>
+            <a:endParaRPr/>
+          </a:p>
+        </p:txBody>
+      </p:sp>
+      <p:sp>
+        <p:nvSpPr>
+          <p:cNvPr id="203" name="" descr="{&quot;isTemplate&quot;:true,&quot;type&quot;:&quot;text&quot;}"/>
+          <p:cNvSpPr txBox="1"/>
+          <p:nvPr/>
+        </p:nvSpPr>
+        <p:spPr>
+          <a:xfrm rot="0" flipH="0" flipV="0">
+            <a:off x="6962775" y="5476875"/>
+            <a:ext cx="4467225" cy="504825"/>
+          </a:xfrm>
+          <a:prstGeom prst="rect"/>
+        </p:spPr>
+        <p:txBody>
+          <a:bodyPr wrap="square" lIns="0" tIns="0" rIns="0" bIns="0">
+            <a:normAutofit/>
+          </a:bodyPr>
+          <a:p>
+            <a:pPr>
+              <a:lnSpc>
+                <a:spcPct val="145000"/>
+              </a:lnSpc>
+            </a:pPr>
+            <a:r>
+              <a:rPr lang="en-US" sz="1125">
+                <a:solidFill>
+                  <a:srgbClr val="2A2333"/>
+                </a:solidFill>
+                <a:latin typeface="Verdana"/>
+                <a:ea typeface="Verdana"/>
+              </a:rPr>
+              <a:t>Riwayat menyimpan sebabnya, misalnya nomor wali belum terdaftar di WhatsApp.</a:t>
+            </a:r>
+            <a:endParaRPr/>
+          </a:p>
+        </p:txBody>
+      </p:sp>
+      <p:sp>
+        <p:nvSpPr>
+          <p:cNvPr id="204" name="" descr="{&quot;isTemplate&quot;:true,&quot;type&quot;:&quot;text&quot;}"/>
+          <p:cNvSpPr txBox="1"/>
+          <p:nvPr/>
+        </p:nvSpPr>
+        <p:spPr>
+          <a:xfrm rot="0" flipH="0" flipV="0">
+            <a:off x="609600" y="6400800"/>
+            <a:ext cx="2905125" cy="161925"/>
+          </a:xfrm>
+          <a:prstGeom prst="rect"/>
+        </p:spPr>
+        <p:txBody>
+          <a:bodyPr wrap="none" lIns="0" tIns="0" rIns="0" bIns="0"/>
+          <a:p>
+            <a:pPr>
+              <a:lnSpc>
+                <a:spcPct val="100000"/>
+              </a:lnSpc>
+            </a:pPr>
+            <a:r>
+              <a:rPr lang="en-US" sz="1050">
+                <a:solidFill>
+                  <a:srgbClr val="6B6478"/>
+                </a:solidFill>
+                <a:latin typeface="Verdana"/>
+                <a:ea typeface="Verdana"/>
+              </a:rPr>
+              <a:t>Pizza Snack Play · Panduan Korlas &amp; Admin</a:t>
+            </a:r>
+            <a:endParaRPr/>
+          </a:p>
+        </p:txBody>
+      </p:sp>
+      <p:sp>
+        <p:nvSpPr>
+          <p:cNvPr id="205" name="" descr="{&quot;isTemplate&quot;:true,&quot;type&quot;:&quot;text&quot;}"/>
+          <p:cNvSpPr txBox="1"/>
+          <p:nvPr/>
+        </p:nvSpPr>
+        <p:spPr>
+          <a:xfrm rot="0" flipH="0" flipV="0">
+            <a:off x="11087100" y="6400800"/>
+            <a:ext cx="495300" cy="161925"/>
+          </a:xfrm>
+          <a:prstGeom prst="rect"/>
+        </p:spPr>
+        <p:txBody>
+          <a:bodyPr wrap="none" lIns="0" tIns="0" rIns="0" bIns="0"/>
+          <a:p>
+            <a:pPr>
+              <a:lnSpc>
+                <a:spcPct val="100000"/>
+              </a:lnSpc>
+            </a:pPr>
+            <a:r>
+              <a:rPr lang="en-US" sz="1050">
+                <a:solidFill>
+                  <a:srgbClr val="6B6478"/>
+                </a:solidFill>
+                <a:latin typeface="Verdana"/>
+                <a:ea typeface="Verdana"/>
+              </a:rPr>
+              <a:t>17 / 19</a:t>
+            </a:r>
+            <a:endParaRPr/>
+          </a:p>
+        </p:txBody>
+      </p:sp>
+    </p:spTree>
+  </p:cSld>
+</p:sld>
+</file>
+
+<file path=ppt/slides/slide18.xml><?xml version="1.0" encoding="utf-8"?>
+<p:sld xmlns:p="http://schemas.openxmlformats.org/presentationml/2006/main" xmlns:a="http://schemas.openxmlformats.org/drawingml/2006/main" xmlns:asvg="http://schemas.microsoft.com/office/drawing/2016/SVG/main" xmlns:r="http://schemas.openxmlformats.org/officeDocument/2006/relationships" xmlns:mc="http://schemas.openxmlformats.org/markup-compatibility/2006" mc:Ignorable="asvg">
+  <p:cSld>
+    <p:spTree>
+      <p:nvGrpSpPr>
+        <p:cNvPr id="206" name="" descr="&lt;Slide&#10;    style={{&#10;        width: '1280px',&#10;        height: '720px',&#10;        background: '#FAF7F2',&#10;        paddingTop: 20,&#10;        paddingBottom: 20,&#10;        paddingLeft: 64,&#10;        paddingRight: 64,&#10;    }}&#10;&gt;&#10;    {/* ── A · blok judul ── */}&#10;    &lt;Box style={{ height: 110, justifyContent: 'center' }}&gt;&#10;        &lt;Text&#10;            style={{&#10;                fontSize: 34,&#10;                fontWeight: 'bold',&#10;                color: '#51277C',&#10;                fontFamily: 'Trebuchet MS',&#10;                lineHeight: 1.3,&#10;            }}&#10;        &gt;&#10;            Empat hal yang perlu diingat&#10;        &lt;/Text&gt;&#10;        &lt;Box style={{ marginTop: 10, width: 72, height: 6, borderRadius: 3, background: '#51277C' }} /&gt;&#10;    &lt;/Box&gt;&#10;&#10;    {/* ── B · area konten ── */}&#10;    &lt;Box style={{ height: 530 }}&gt;&#10;        &lt;Box style={{ height: 470, flexDirection: 'row', gap: 18 }}&gt;&#10;            {[&#10;                {&#10;                    p: 'M7 2v3M17 2v3M3 9h18M5 5h14a2 2 0 0 1 2 2v12a2 2 0 0 1-2 2H5a2 2 0 0 1-2-2V7a2 2 0 0 1 2-2zM8 13h8',&#10;                    t: 'Kosongkan petugas sebelum terbit',&#10;                    d: 'Bila tanggalnya ingin direbut orang tua, biarkan petugas kosong sebelum terbit. Setelah terbit, hanya petugas yang bisa diisi — menu &amp; catatan terkunci.',&#10;                    g: 'Tentukan sebelum kunci',&#10;                },&#10;                {&#10;                    p: 'M7 4h10a3 3 0 0 1 3 3v10a3 3 0 0 1-3 3H7a3 3 0 0 1-3-3V7a3 3 0 0 1 3-3zM7 11l2 2 3-4M8 16h7',&#10;                    t: 'Selesaikan semua dulu',&#10;                    d: 'Publikasi menolak selama masih ada hari yang belum dikunci. Periksa kartu status per kelas sebelum menekan tombolnya.',&#10;                    g: 'Jangan separuh jadi',&#10;                },&#10;                {&#10;                    p: 'M7 11h10a2 2 0 0 1 2 2v6a2 2 0 0 1-2 2H7a2 2 0 0 1-2-2v-6a2 2 0 0 1 2-2zM8 11V8a4 4 0 0 1 7.5-2',&#10;                    t: 'Revisi sesudah terbit: minta admin',&#10;                    d: 'Membuka kunci jadwal wewenang admin. Korlas tidak bisa mencairkan jadwal yang sudah dikunci atau terbit.',&#10;                    g: 'Sampaikan ke admin',&#10;                },&#10;                {&#10;                    p: 'M7 2v3M17 2v3M3 9h18M5 5h14a2 2 0 0 1 2 2v12a2 2 0 0 1-2 2H5a2 2 0 0 1-2-2V7a2 2 0 0 1 2-2zM9 14l6 6M15 14l-6 6',&#10;                    t: 'Hari libur sekolah wewenang admin',&#10;                    d: 'Korlas bisa menandai libur pada jadwal kelasnya sendiri. Hari libur yang berlaku untuk semua kelas ditambahkan admin.',&#10;                    g: 'Berlaku sekolah',&#10;                },&#10;            ].map((c, idx) =&gt; (&#10;                &lt;Box&#10;                    key={idx}&#10;                    style={{&#10;                        flex: 1,&#10;                        height: '100%',&#10;                        background: '#FFFFFF',&#10;                        borderRadius: 16,&#10;                        boxShadow: '0 4px 20px rgba(0,0,0,0.08)',&#10;                        padding: 24,&#10;                        borderTop: '8px solid #AFC440',&#10;                    }}&#10;                &gt;&#10;                    &lt;Box&#10;                        style={{&#10;                            width: 60,&#10;                            height: 60,&#10;                            borderRadius: 30,&#10;                            background: 'rgba(81,39,124,0.10)',&#10;                            justifyContent: 'center',&#10;                            alignItems: 'center',&#10;                        }}&#10;                    &gt;&#10;                        &lt;svg width={30} height={30} viewBox='0 0 24 24' xmlns=&quot;http://www.w3.org/2000/svg&quot;&gt;&#10;                            &lt;path&#10;                                fill='none'&#10;                                stroke='#51277C'&#10;                                strokeWidth='2'&#10;                                strokeLinecap='round'&#10;                                strokeLinejoin='round'&#10;                                d={c.p}&#10;                            /&gt;&#10;                        &lt;/svg&gt;&#10;                    &lt;/Box&gt;&#10;&#10;                    &lt;Text&#10;                        style={{&#10;                            marginTop: 16,&#10;                            fontSize: 23,&#10;                            fontWeight: 'bold',&#10;                            color: '#51277C',&#10;                            fontFamily: 'Trebuchet MS',&#10;                            lineHeight: 1.32,&#10;                        }}&#10;                    &gt;&#10;                        {c.t}&#10;                    &lt;/Text&gt;&#10;&#10;                    &lt;Box style={{ marginTop: 12, width: 44, height: 3, borderRadius: 2, background: '#AFC440' }} /&gt;&#10;&#10;                    &lt;Text&#10;                        style={{&#10;                            marginTop: 12,&#10;                            fontSize: 17,&#10;                            color: '#6B6478',&#10;                            fontFamily: 'Verdana',&#10;                            lineHeight: 1.5,&#10;                        }}&#10;                    &gt;&#10;                        {c.d}&#10;                    &lt;/Text&gt;&#10;&#10;                    &lt;Box style={{ marginTop: 'auto' }}&gt;&#10;                        &lt;Text&#10;                            style={{&#10;                                fontSize: 16,&#10;                                color: '#51277C',&#10;                                fontFamily: 'Verdana',&#10;                                fontWeight: 'bold',&#10;                            }}&#10;                        &gt;&#10;                            {c.g}&#10;                        &lt;/Text&gt;&#10;                    &lt;/Box&gt;&#10;                &lt;/Box&gt;&#10;            ))}&#10;        &lt;/Box&gt;&#10;&#10;        {/* simpulan */}&#10;        &lt;Box&#10;            style={{&#10;                marginTop: 14,&#10;                height: 46,&#10;                background: '#51277C',&#10;                borderRadius: 14,&#10;                justifyContent: 'center',&#10;                alignItems: 'center',&#10;            }}&#10;        &gt;&#10;            &lt;Text&#10;                style={{&#10;                    fontSize: 19,&#10;                    color: '#FFFFFF',&#10;                    fontFamily: 'Verdana',&#10;                    fontWeight: 'bold',&#10;                }}&#10;            &gt;&#10;                Intinya: susun, tentukan petugas, kunci, lalu terbitkan.&#10;            &lt;/Text&gt;&#10;        &lt;/Box&gt;&#10;    &lt;/Box&gt;&#10;&#10;    {/* ── C · bilah kaki ── */}&#10;    &lt;Box&#10;        style={{&#10;            height: 40,&#10;            flexDirection: 'row',&#10;            alignItems: 'center',&#10;            justifyContent: 'space-between',&#10;        }}&#10;    &gt;&#10;        &lt;Text style={{ fontSize: 14, color: '#6B6478', fontFamily: 'Verdana' }}&gt;&#10;            Pizza Snack Play · Panduan Korlas &amp;amp; Admin&#10;        &lt;/Text&gt;&#10;        &lt;Text style={{ fontSize: 14, color: '#6B6478', fontFamily: 'Verdana' }}&gt;18 / 19&lt;/Text&gt;&#10;    &lt;/Box&gt;&#10;&lt;/Slide&gt;&#10;"/>
+        <p:cNvGrpSpPr/>
+        <p:nvPr/>
+      </p:nvGrpSpPr>
+      <p:grpSpPr>
+        <a:xfrm>
+          <a:off x="0" y="0"/>
+          <a:ext cx="0" cy="0"/>
+          <a:chOff x="0" y="0"/>
+          <a:chExt cx="0" cy="0"/>
+        </a:xfrm>
+      </p:grpSpPr>
+      <p:sp>
+        <p:nvSpPr>
+          <p:cNvPr id="207" name=""/>
+          <p:cNvSpPr/>
+          <p:nvPr/>
+        </p:nvSpPr>
+        <p:spPr>
+          <a:xfrm rot="0" flipH="0" flipV="0">
+            <a:off x="0" y="0"/>
+            <a:ext cx="12192000" cy="6858000"/>
+          </a:xfrm>
+          <a:prstGeom prst="rect">
+            <a:avLst/>
+          </a:prstGeom>
+          <a:solidFill>
+            <a:srgbClr val="FAF7F2"/>
+          </a:solidFill>
+          <a:ln/>
+        </p:spPr>
+        <p:txBody>
+          <a:bodyPr/>
+          <a:p/>
+        </p:txBody>
+      </p:sp>
+      <p:sp>
+        <p:nvSpPr>
+          <p:cNvPr id="208" name="" descr="{&quot;isTemplate&quot;:true,&quot;type&quot;:&quot;text&quot;}"/>
+          <p:cNvSpPr txBox="1"/>
+          <p:nvPr/>
+        </p:nvSpPr>
+        <p:spPr>
+          <a:xfrm rot="0" flipH="0" flipV="0">
+            <a:off x="609600" y="381000"/>
+            <a:ext cx="10972800" cy="514350"/>
+          </a:xfrm>
+          <a:prstGeom prst="rect"/>
+        </p:spPr>
+        <p:txBody>
+          <a:bodyPr wrap="none" lIns="0" tIns="0" rIns="0" bIns="0"/>
+          <a:p>
+            <a:pPr>
+              <a:lnSpc>
+                <a:spcPct val="130000"/>
+              </a:lnSpc>
+            </a:pPr>
+            <a:r>
+              <a:rPr lang="en-US" sz="2550" b="1">
+                <a:solidFill>
+                  <a:srgbClr val="51277C"/>
+                </a:solidFill>
+                <a:latin typeface="Trebuchet MS"/>
+                <a:ea typeface="Trebuchet MS"/>
+              </a:rPr>
               <a:t>Empat hal yang perlu diingat</a:t>
             </a:r>
             <a:endParaRPr/>
@@ -7452,7 +9438,7 @@
       </p:sp>
       <p:sp>
         <p:nvSpPr>
-          <p:cNvPr id="159" name=""/>
+          <p:cNvPr id="209" name=""/>
           <p:cNvSpPr/>
           <p:nvPr/>
         </p:nvSpPr>
@@ -7478,7 +9464,7 @@
       </p:sp>
       <p:sp>
         <p:nvSpPr>
-          <p:cNvPr id="160" name=""/>
+          <p:cNvPr id="210" name=""/>
           <p:cNvSpPr/>
           <p:nvPr/>
         </p:nvSpPr>
@@ -7511,7 +9497,7 @@
       </p:sp>
       <p:sp>
         <p:nvSpPr>
-          <p:cNvPr id="161" name=""/>
+          <p:cNvPr id="211" name=""/>
           <p:cNvSpPr/>
           <p:nvPr/>
         </p:nvSpPr>
@@ -7568,7 +9554,7 @@
       </p:sp>
       <p:sp>
         <p:nvSpPr>
-          <p:cNvPr id="162" name=""/>
+          <p:cNvPr id="212" name=""/>
           <p:cNvSpPr/>
           <p:nvPr/>
         </p:nvSpPr>
@@ -7596,14 +9582,14 @@
       </p:sp>
       <p:pic>
         <p:nvPicPr>
-          <p:cNvPr id="163" name=""/>
+          <p:cNvPr id="213" name=""/>
           <p:cNvPicPr>
             <a:picLocks noChangeAspect="1"/>
           </p:cNvPicPr>
           <p:nvPr/>
         </p:nvPicPr>
         <p:blipFill>
-          <a:blip r:embed="rId1">
+          <a:blip>
             <a:extLst>
               <a:ext uri="{96DAC541-7B7A-43D3-8B79-37D633B846F1}">
                 <asvg:svgBlip r:embed="rId1"/>
@@ -7627,7 +9613,7 @@
       </p:pic>
       <p:sp>
         <p:nvSpPr>
-          <p:cNvPr id="164" name="" descr="{&quot;isTemplate&quot;:true,&quot;type&quot;:&quot;text&quot;}"/>
+          <p:cNvPr id="214" name="" descr="{&quot;isTemplate&quot;:true,&quot;type&quot;:&quot;text&quot;}"/>
           <p:cNvSpPr txBox="1"/>
           <p:nvPr/>
         </p:nvSpPr>
@@ -7664,7 +9650,7 @@
       </p:sp>
       <p:sp>
         <p:nvSpPr>
-          <p:cNvPr id="165" name=""/>
+          <p:cNvPr id="215" name=""/>
           <p:cNvSpPr/>
           <p:nvPr/>
         </p:nvSpPr>
@@ -7690,14 +9676,14 @@
       </p:sp>
       <p:sp>
         <p:nvSpPr>
-          <p:cNvPr id="166" name="" descr="{&quot;isTemplate&quot;:true,&quot;type&quot;:&quot;text&quot;}"/>
+          <p:cNvPr id="216" name="" descr="{&quot;isTemplate&quot;:true,&quot;type&quot;:&quot;text&quot;}"/>
           <p:cNvSpPr txBox="1"/>
           <p:nvPr/>
         </p:nvSpPr>
         <p:spPr>
           <a:xfrm rot="0" flipH="0" flipV="0">
             <a:off x="838200" y="3219450"/>
-            <a:ext cx="2162175" cy="2333625"/>
+            <a:ext cx="2162175" cy="2047875"/>
           </a:xfrm>
           <a:prstGeom prst="rect"/>
         </p:spPr>
@@ -7719,15 +9705,15 @@
                 <a:latin typeface="Verdana"/>
                 <a:ea typeface="Verdana"/>
               </a:rPr>
-              <a:t>Bila tanggalnya ingin direbut orang tua, biarkan petugas kosong sebelum dipublikasikan. Setelah terbit, yang masih bisa diisi hanya petugas — menu &amp; catatan tetap terkunci.</a:t>
-            </a:r>
-            <a:endParaRPr/>
-          </a:p>
-        </p:txBody>
-      </p:sp>
-      <p:sp>
-        <p:nvSpPr>
-          <p:cNvPr id="167" name="" descr="{&quot;isTemplate&quot;:true,&quot;type&quot;:&quot;text&quot;}"/>
+              <a:t>Bila tanggalnya ingin direbut orang tua, biarkan petugas kosong sebelum terbit. Setelah terbit, hanya petugas yang bisa diisi — menu &amp; catatan terkunci.</a:t>
+            </a:r>
+            <a:endParaRPr/>
+          </a:p>
+        </p:txBody>
+      </p:sp>
+      <p:sp>
+        <p:nvSpPr>
+          <p:cNvPr id="217" name="" descr="{&quot;isTemplate&quot;:true,&quot;type&quot;:&quot;text&quot;}"/>
           <p:cNvSpPr txBox="1"/>
           <p:nvPr/>
         </p:nvSpPr>
@@ -7762,7 +9748,7 @@
       </p:sp>
       <p:sp>
         <p:nvSpPr>
-          <p:cNvPr id="168" name=""/>
+          <p:cNvPr id="218" name=""/>
           <p:cNvSpPr/>
           <p:nvPr/>
         </p:nvSpPr>
@@ -7795,7 +9781,7 @@
       </p:sp>
       <p:sp>
         <p:nvSpPr>
-          <p:cNvPr id="169" name=""/>
+          <p:cNvPr id="219" name=""/>
           <p:cNvSpPr/>
           <p:nvPr/>
         </p:nvSpPr>
@@ -7852,7 +9838,7 @@
       </p:sp>
       <p:sp>
         <p:nvSpPr>
-          <p:cNvPr id="170" name=""/>
+          <p:cNvPr id="220" name=""/>
           <p:cNvSpPr/>
           <p:nvPr/>
         </p:nvSpPr>
@@ -7880,14 +9866,14 @@
       </p:sp>
       <p:pic>
         <p:nvPicPr>
-          <p:cNvPr id="171" name=""/>
+          <p:cNvPr id="221" name=""/>
           <p:cNvPicPr>
             <a:picLocks noChangeAspect="1"/>
           </p:cNvPicPr>
           <p:nvPr/>
         </p:nvPicPr>
         <p:blipFill>
-          <a:blip r:embed="rId2">
+          <a:blip>
             <a:extLst>
               <a:ext uri="{96DAC541-7B7A-43D3-8B79-37D633B846F1}">
                 <asvg:svgBlip r:embed="rId2"/>
@@ -7911,7 +9897,7 @@
       </p:pic>
       <p:sp>
         <p:nvSpPr>
-          <p:cNvPr id="172" name="" descr="{&quot;isTemplate&quot;:true,&quot;type&quot;:&quot;text&quot;}"/>
+          <p:cNvPr id="222" name="" descr="{&quot;isTemplate&quot;:true,&quot;type&quot;:&quot;text&quot;}"/>
           <p:cNvSpPr txBox="1"/>
           <p:nvPr/>
         </p:nvSpPr>
@@ -7948,7 +9934,7 @@
       </p:sp>
       <p:sp>
         <p:nvSpPr>
-          <p:cNvPr id="173" name=""/>
+          <p:cNvPr id="223" name=""/>
           <p:cNvSpPr/>
           <p:nvPr/>
         </p:nvSpPr>
@@ -7974,7 +9960,7 @@
       </p:sp>
       <p:sp>
         <p:nvSpPr>
-          <p:cNvPr id="174" name="" descr="{&quot;isTemplate&quot;:true,&quot;type&quot;:&quot;text&quot;}"/>
+          <p:cNvPr id="224" name="" descr="{&quot;isTemplate&quot;:true,&quot;type&quot;:&quot;text&quot;}"/>
           <p:cNvSpPr txBox="1"/>
           <p:nvPr/>
         </p:nvSpPr>
@@ -8011,7 +9997,7 @@
       </p:sp>
       <p:sp>
         <p:nvSpPr>
-          <p:cNvPr id="175" name="" descr="{&quot;isTemplate&quot;:true,&quot;type&quot;:&quot;text&quot;}"/>
+          <p:cNvPr id="225" name="" descr="{&quot;isTemplate&quot;:true,&quot;type&quot;:&quot;text&quot;}"/>
           <p:cNvSpPr txBox="1"/>
           <p:nvPr/>
         </p:nvSpPr>
@@ -8046,7 +10032,7 @@
       </p:sp>
       <p:sp>
         <p:nvSpPr>
-          <p:cNvPr id="176" name=""/>
+          <p:cNvPr id="226" name=""/>
           <p:cNvSpPr/>
           <p:nvPr/>
         </p:nvSpPr>
@@ -8079,7 +10065,7 @@
       </p:sp>
       <p:sp>
         <p:nvSpPr>
-          <p:cNvPr id="177" name=""/>
+          <p:cNvPr id="227" name=""/>
           <p:cNvSpPr/>
           <p:nvPr/>
         </p:nvSpPr>
@@ -8136,7 +10122,7 @@
       </p:sp>
       <p:sp>
         <p:nvSpPr>
-          <p:cNvPr id="178" name=""/>
+          <p:cNvPr id="228" name=""/>
           <p:cNvSpPr/>
           <p:nvPr/>
         </p:nvSpPr>
@@ -8164,14 +10150,14 @@
       </p:sp>
       <p:pic>
         <p:nvPicPr>
-          <p:cNvPr id="179" name=""/>
+          <p:cNvPr id="229" name=""/>
           <p:cNvPicPr>
             <a:picLocks noChangeAspect="1"/>
           </p:cNvPicPr>
           <p:nvPr/>
         </p:nvPicPr>
         <p:blipFill>
-          <a:blip r:embed="rId3">
+          <a:blip>
             <a:extLst>
               <a:ext uri="{96DAC541-7B7A-43D3-8B79-37D633B846F1}">
                 <asvg:svgBlip r:embed="rId3"/>
@@ -8195,7 +10181,7 @@
       </p:pic>
       <p:sp>
         <p:nvSpPr>
-          <p:cNvPr id="180" name="" descr="{&quot;isTemplate&quot;:true,&quot;type&quot;:&quot;text&quot;}"/>
+          <p:cNvPr id="230" name="" descr="{&quot;isTemplate&quot;:true,&quot;type&quot;:&quot;text&quot;}"/>
           <p:cNvSpPr txBox="1"/>
           <p:nvPr/>
         </p:nvSpPr>
@@ -8232,7 +10218,7 @@
       </p:sp>
       <p:sp>
         <p:nvSpPr>
-          <p:cNvPr id="181" name=""/>
+          <p:cNvPr id="231" name=""/>
           <p:cNvSpPr/>
           <p:nvPr/>
         </p:nvSpPr>
@@ -8258,7 +10244,7 @@
       </p:sp>
       <p:sp>
         <p:nvSpPr>
-          <p:cNvPr id="182" name="" descr="{&quot;isTemplate&quot;:true,&quot;type&quot;:&quot;text&quot;}"/>
+          <p:cNvPr id="232" name="" descr="{&quot;isTemplate&quot;:true,&quot;type&quot;:&quot;text&quot;}"/>
           <p:cNvSpPr txBox="1"/>
           <p:nvPr/>
         </p:nvSpPr>
@@ -8295,7 +10281,7 @@
       </p:sp>
       <p:sp>
         <p:nvSpPr>
-          <p:cNvPr id="183" name="" descr="{&quot;isTemplate&quot;:true,&quot;type&quot;:&quot;text&quot;}"/>
+          <p:cNvPr id="233" name="" descr="{&quot;isTemplate&quot;:true,&quot;type&quot;:&quot;text&quot;}"/>
           <p:cNvSpPr txBox="1"/>
           <p:nvPr/>
         </p:nvSpPr>
@@ -8330,7 +10316,7 @@
       </p:sp>
       <p:sp>
         <p:nvSpPr>
-          <p:cNvPr id="184" name=""/>
+          <p:cNvPr id="234" name=""/>
           <p:cNvSpPr/>
           <p:nvPr/>
         </p:nvSpPr>
@@ -8363,7 +10349,7 @@
       </p:sp>
       <p:sp>
         <p:nvSpPr>
-          <p:cNvPr id="185" name=""/>
+          <p:cNvPr id="235" name=""/>
           <p:cNvSpPr/>
           <p:nvPr/>
         </p:nvSpPr>
@@ -8420,7 +10406,7 @@
       </p:sp>
       <p:sp>
         <p:nvSpPr>
-          <p:cNvPr id="186" name=""/>
+          <p:cNvPr id="236" name=""/>
           <p:cNvSpPr/>
           <p:nvPr/>
         </p:nvSpPr>
@@ -8448,14 +10434,14 @@
       </p:sp>
       <p:pic>
         <p:nvPicPr>
-          <p:cNvPr id="187" name=""/>
+          <p:cNvPr id="237" name=""/>
           <p:cNvPicPr>
             <a:picLocks noChangeAspect="1"/>
           </p:cNvPicPr>
           <p:nvPr/>
         </p:nvPicPr>
         <p:blipFill>
-          <a:blip r:embed="rId4">
+          <a:blip>
             <a:extLst>
               <a:ext uri="{96DAC541-7B7A-43D3-8B79-37D633B846F1}">
                 <asvg:svgBlip r:embed="rId4"/>
@@ -8479,7 +10465,7 @@
       </p:pic>
       <p:sp>
         <p:nvSpPr>
-          <p:cNvPr id="188" name="" descr="{&quot;isTemplate&quot;:true,&quot;type&quot;:&quot;text&quot;}"/>
+          <p:cNvPr id="238" name="" descr="{&quot;isTemplate&quot;:true,&quot;type&quot;:&quot;text&quot;}"/>
           <p:cNvSpPr txBox="1"/>
           <p:nvPr/>
         </p:nvSpPr>
@@ -8516,7 +10502,7 @@
       </p:sp>
       <p:sp>
         <p:nvSpPr>
-          <p:cNvPr id="189" name=""/>
+          <p:cNvPr id="239" name=""/>
           <p:cNvSpPr/>
           <p:nvPr/>
         </p:nvSpPr>
@@ -8542,7 +10528,7 @@
       </p:sp>
       <p:sp>
         <p:nvSpPr>
-          <p:cNvPr id="190" name="" descr="{&quot;isTemplate&quot;:true,&quot;type&quot;:&quot;text&quot;}"/>
+          <p:cNvPr id="240" name="" descr="{&quot;isTemplate&quot;:true,&quot;type&quot;:&quot;text&quot;}"/>
           <p:cNvSpPr txBox="1"/>
           <p:nvPr/>
         </p:nvSpPr>
@@ -8579,7 +10565,7 @@
       </p:sp>
       <p:sp>
         <p:nvSpPr>
-          <p:cNvPr id="191" name="" descr="{&quot;isTemplate&quot;:true,&quot;type&quot;:&quot;text&quot;}"/>
+          <p:cNvPr id="241" name="" descr="{&quot;isTemplate&quot;:true,&quot;type&quot;:&quot;text&quot;}"/>
           <p:cNvSpPr txBox="1"/>
           <p:nvPr/>
         </p:nvSpPr>
@@ -8614,7 +10600,7 @@
       </p:sp>
       <p:sp>
         <p:nvSpPr>
-          <p:cNvPr id="192" name=""/>
+          <p:cNvPr id="242" name=""/>
           <p:cNvSpPr/>
           <p:nvPr/>
         </p:nvSpPr>
@@ -8640,7 +10626,7 @@
       </p:sp>
       <p:sp>
         <p:nvSpPr>
-          <p:cNvPr id="193" name="" descr="{&quot;isTemplate&quot;:true,&quot;type&quot;:&quot;text&quot;}"/>
+          <p:cNvPr id="243" name="" descr="{&quot;isTemplate&quot;:true,&quot;type&quot;:&quot;text&quot;}"/>
           <p:cNvSpPr txBox="1"/>
           <p:nvPr/>
         </p:nvSpPr>
@@ -8675,7 +10661,7 @@
       </p:sp>
       <p:sp>
         <p:nvSpPr>
-          <p:cNvPr id="194" name="" descr="{&quot;isTemplate&quot;:true,&quot;type&quot;:&quot;text&quot;}"/>
+          <p:cNvPr id="244" name="" descr="{&quot;isTemplate&quot;:true,&quot;type&quot;:&quot;text&quot;}"/>
           <p:cNvSpPr txBox="1"/>
           <p:nvPr/>
         </p:nvSpPr>
@@ -8710,7 +10696,7 @@
       </p:sp>
       <p:sp>
         <p:nvSpPr>
-          <p:cNvPr id="195" name="" descr="{&quot;isTemplate&quot;:true,&quot;type&quot;:&quot;text&quot;}"/>
+          <p:cNvPr id="245" name="" descr="{&quot;isTemplate&quot;:true,&quot;type&quot;:&quot;text&quot;}"/>
           <p:cNvSpPr txBox="1"/>
           <p:nvPr/>
         </p:nvSpPr>
@@ -8737,7 +10723,7 @@
                 <a:latin typeface="Verdana"/>
                 <a:ea typeface="Verdana"/>
               </a:rPr>
-              <a:t>17 / 18</a:t>
+              <a:t>18 / 19</a:t>
             </a:r>
             <a:endParaRPr/>
           </a:p>
@@ -8748,12 +10734,12 @@
 </p:sld>
 </file>
 
-<file path=ppt/slides/slide18.xml><?xml version="1.0" encoding="utf-8"?>
+<file path=ppt/slides/slide19.xml><?xml version="1.0" encoding="utf-8"?>
 <p:sld xmlns:p="http://schemas.openxmlformats.org/presentationml/2006/main" xmlns:a="http://schemas.openxmlformats.org/drawingml/2006/main" xmlns:asvg="http://schemas.microsoft.com/office/drawing/2016/SVG/main" xmlns:r="http://schemas.openxmlformats.org/officeDocument/2006/relationships" xmlns:mc="http://schemas.openxmlformats.org/markup-compatibility/2006" mc:Ignorable="asvg">
   <p:cSld>
     <p:spTree>
       <p:nvGrpSpPr>
-        <p:cNvPr id="196" name="" descr="&lt;Slide&#10;    style={{&#10;        width: '1280px',&#10;        height: '720px',&#10;        background: '#FAF7F2',&#10;        justifyContent: 'center',&#10;        alignItems: 'center',&#10;        position: 'relative',&#10;        overflow: 'hidden',&#10;    }}&#10;&gt;&#10;    &lt;Box&#10;        style={{&#10;            position: 'absolute',&#10;            top: 90,&#10;            width: 520,&#10;            height: 520,&#10;            borderRadius: 260,&#10;            background: 'linear-gradient(135deg, #51277C 0%, #7A45A8 100%)',&#10;            opacity: 0.10,&#10;        }}&#10;    /&gt;&#10;    &lt;Box&#10;        style={{&#10;            position: 'absolute',&#10;            bottom: -80,&#10;            left: -80,&#10;            width: 320,&#10;            height: 320,&#10;            borderRadius: 160,&#10;            background: 'linear-gradient(135deg, #AFC440 0%, #F3B26C 100%)',&#10;            opacity: 0.18,&#10;        }}&#10;    /&gt;&#10;&#10;    &lt;Box style={{ position: 'relative', zIndex: 1, alignItems: 'center', paddingLeft: 72, paddingRight: 72 }}&gt;&#10;        &lt;Image src=&quot;assets/app_logo.png&quot; style={{ width: 200, height: 194, objectFit: 'contain' }} /&gt;&#10;&#10;        &lt;Text&#10;            style={{&#10;                marginTop: 26,&#10;                fontSize: 60,&#10;                fontWeight: 'bold',&#10;                color: '#51277C',&#10;                fontFamily: 'Trebuchet MS',&#10;                lineHeight: 1.15,&#10;            }}&#10;        &gt;&#10;            Terima kasih&#10;        &lt;/Text&gt;&#10;&#10;        &lt;Box style={{ marginTop: 18, width: 96, height: 7, borderRadius: 4, background: '#AFC440' }} /&gt;&#10;&#10;        &lt;Text&#10;            style={{&#10;                marginTop: 22,&#10;                fontSize: 22,&#10;                color: '#2A2333',&#10;                fontFamily: 'Verdana',&#10;                lineHeight: 1.5,&#10;                textAlign: 'center',&#10;            }}&#10;        &gt;&#10;            Coba tempel jadwal dari teks sekolah minggu ini, lalu periksa Laporannya.&#10;        &lt;/Text&gt;&#10;&#10;        &lt;Text&#10;            style={{&#10;                marginTop: 14,&#10;                fontSize: 19,&#10;                color: '#6B6478',&#10;                fontFamily: 'Verdana',&#10;                lineHeight: 1.5,&#10;                textAlign: 'center',&#10;            }}&#10;        &gt;&#10;            Ada yang tidak beres? Sampaikan kepada admin sekolah.&#10;        &lt;/Text&gt;&#10;&#10;        &lt;Box&#10;            style={{&#10;                marginTop: 26,&#10;                flexDirection: 'row',&#10;                alignItems: 'center',&#10;                gap: 12,&#10;                background: '#F3B26C',&#10;                borderRadius: 999,&#10;                paddingTop: 13,&#10;                paddingBottom: 13,&#10;                paddingLeft: 28,&#10;                paddingRight: 30,&#10;            }}&#10;        &gt;&#10;            &lt;svg width={22} height={22} viewBox=&quot;0 0 576 512&quot; xmlns=&quot;http://www.w3.org/2000/svg&quot;&gt;&lt;path fill=&quot;#51277C&quot; d=&quot;M316.9 18C311.6 7 300.4 0 288.1 0s-23.4 7-28.8 18L195 150.3 51.4 171.5c-12 1.8-22 10.2-25.7 21.7s-.7 24.2 7.9 32.7L137.8 329 113.2 474.7c-2 12 3 24.2 12.9 31.3s23 8 33.8 2.3l128.3-68.5 128.3 68.5c10.8 5.7 23.9 4.9 33.8-2.3s14.9-19.3 12.9-31.3L438.5 329 542.7 225.9c8.6-8.5 11.7-21.2 7.9-32.7s-13.7-19.9-25.7-21.7L381.2 150.3 316.9 18z&quot; /&gt;&lt;/svg&gt;&#10;            &lt;Text style={{ fontSize: 19, color: '#51277C', fontFamily: 'Trebuchet MS', fontWeight: 'bold' }}&gt;&#10;                Pizza Snack Play&#10;            &lt;/Text&gt;&#10;        &lt;/Box&gt;&#10;    &lt;/Box&gt;&#10;&lt;/Slide&gt;&#10;"/>
+        <p:cNvPr id="246" name=""/>
         <p:cNvGrpSpPr/>
         <p:nvPr/>
       </p:nvGrpSpPr>
@@ -8767,7 +10753,7 @@
       </p:grpSpPr>
       <p:sp>
         <p:nvSpPr>
-          <p:cNvPr id="197" name=""/>
+          <p:cNvPr id="247" name=""/>
           <p:cNvSpPr/>
           <p:nvPr/>
         </p:nvSpPr>
@@ -8786,12 +10772,15 @@
         </p:spPr>
         <p:txBody>
           <a:bodyPr/>
-          <a:p/>
-        </p:txBody>
-      </p:sp>
-      <p:sp>
-        <p:nvSpPr>
-          <p:cNvPr id="198" name=""/>
+          <a:p>
+            <a:pPr/>
+            <a:endParaRPr/>
+          </a:p>
+        </p:txBody>
+      </p:sp>
+      <p:sp>
+        <p:nvSpPr>
+          <p:cNvPr id="248" name=""/>
           <p:cNvSpPr/>
           <p:nvPr/>
         </p:nvSpPr>
@@ -8824,12 +10813,15 @@
         </p:spPr>
         <p:txBody>
           <a:bodyPr/>
-          <a:p/>
-        </p:txBody>
-      </p:sp>
-      <p:sp>
-        <p:nvSpPr>
-          <p:cNvPr id="199" name=""/>
+          <a:p>
+            <a:pPr/>
+            <a:endParaRPr/>
+          </a:p>
+        </p:txBody>
+      </p:sp>
+      <p:sp>
+        <p:nvSpPr>
+          <p:cNvPr id="249" name=""/>
           <p:cNvSpPr/>
           <p:nvPr/>
         </p:nvSpPr>
@@ -8888,12 +10880,15 @@
         </p:spPr>
         <p:txBody>
           <a:bodyPr/>
-          <a:p/>
+          <a:p>
+            <a:pPr/>
+            <a:endParaRPr/>
+          </a:p>
         </p:txBody>
       </p:sp>
       <p:pic>
         <p:nvPicPr>
-          <p:cNvPr id="200" name=""/>
+          <p:cNvPr id="250" name=""/>
           <p:cNvPicPr>
             <a:picLocks noChangeAspect="1"/>
           </p:cNvPicPr>
@@ -8919,7 +10914,7 @@
       </p:pic>
       <p:sp>
         <p:nvSpPr>
-          <p:cNvPr id="201" name="" descr="{&quot;isTemplate&quot;:true,&quot;type&quot;:&quot;text&quot;}"/>
+          <p:cNvPr id="251" name="" descr="{&quot;isTemplate&quot;:true,&quot;type&quot;:&quot;text&quot;}"/>
           <p:cNvSpPr txBox="1"/>
           <p:nvPr/>
         </p:nvSpPr>
@@ -8954,7 +10949,7 @@
       </p:sp>
       <p:sp>
         <p:nvSpPr>
-          <p:cNvPr id="202" name=""/>
+          <p:cNvPr id="252" name=""/>
           <p:cNvSpPr/>
           <p:nvPr/>
         </p:nvSpPr>
@@ -8975,12 +10970,15 @@
         </p:spPr>
         <p:txBody>
           <a:bodyPr/>
-          <a:p/>
-        </p:txBody>
-      </p:sp>
-      <p:sp>
-        <p:nvSpPr>
-          <p:cNvPr id="203" name="" descr="{&quot;isTemplate&quot;:true,&quot;type&quot;:&quot;text&quot;}"/>
+          <a:p>
+            <a:pPr/>
+            <a:endParaRPr/>
+          </a:p>
+        </p:txBody>
+      </p:sp>
+      <p:sp>
+        <p:nvSpPr>
+          <p:cNvPr id="253" name="" descr="{&quot;isTemplate&quot;:true,&quot;type&quot;:&quot;text&quot;}"/>
           <p:cNvSpPr txBox="1"/>
           <p:nvPr/>
         </p:nvSpPr>
@@ -9015,7 +11013,7 @@
       </p:sp>
       <p:sp>
         <p:nvSpPr>
-          <p:cNvPr id="204" name="" descr="{&quot;isTemplate&quot;:true,&quot;type&quot;:&quot;text&quot;}"/>
+          <p:cNvPr id="254" name="" descr="{&quot;isTemplate&quot;:true,&quot;type&quot;:&quot;text&quot;}"/>
           <p:cNvSpPr txBox="1"/>
           <p:nvPr/>
         </p:nvSpPr>
@@ -9050,7 +11048,7 @@
       </p:sp>
       <p:sp>
         <p:nvSpPr>
-          <p:cNvPr id="205" name=""/>
+          <p:cNvPr id="255" name=""/>
           <p:cNvSpPr/>
           <p:nvPr/>
         </p:nvSpPr>
@@ -9071,19 +11069,22 @@
         </p:spPr>
         <p:txBody>
           <a:bodyPr/>
-          <a:p/>
+          <a:p>
+            <a:pPr/>
+            <a:endParaRPr/>
+          </a:p>
         </p:txBody>
       </p:sp>
       <p:pic>
         <p:nvPicPr>
-          <p:cNvPr id="206" name=""/>
+          <p:cNvPr id="256" name=""/>
           <p:cNvPicPr>
             <a:picLocks noChangeAspect="1"/>
           </p:cNvPicPr>
           <p:nvPr/>
         </p:nvPicPr>
         <p:blipFill>
-          <a:blip r:embed="rId2">
+          <a:blip>
             <a:extLst>
               <a:ext uri="{96DAC541-7B7A-43D3-8B79-37D633B846F1}">
                 <asvg:svgBlip r:embed="rId2"/>
@@ -9107,7 +11108,7 @@
       </p:pic>
       <p:sp>
         <p:nvSpPr>
-          <p:cNvPr id="207" name="" descr="{&quot;isTemplate&quot;:true,&quot;type&quot;:&quot;text&quot;}"/>
+          <p:cNvPr id="257" name="" descr="{&quot;isTemplate&quot;:true,&quot;type&quot;:&quot;text&quot;}"/>
           <p:cNvSpPr txBox="1"/>
           <p:nvPr/>
         </p:nvSpPr>
@@ -9150,7 +11151,7 @@
   <p:cSld>
     <p:spTree>
       <p:nvGrpSpPr>
-        <p:cNvPr id="208" name="" descr="&lt;Slide&#10;    style={{&#10;        width: '1280px',&#10;        height: '720px',&#10;        background: '#FAF7F2',&#10;        paddingTop: 20,&#10;        paddingBottom: 20,&#10;        paddingLeft: 64,&#10;        paddingRight: 64,&#10;    }}&#10;&gt;&#10;    {/* ── A · blok judul ── */}&#10;    &lt;Box style={{ height: 110, justifyContent: 'center' }}&gt;&#10;        &lt;Text&#10;            style={{&#10;                fontSize: 34,&#10;                fontWeight: 'bold',&#10;                color: '#51277C',&#10;                fontFamily: 'Trebuchet MS',&#10;                lineHeight: 1.3,&#10;            }}&#10;        &gt;&#10;            Isi panduan ini&#10;        &lt;/Text&gt;&#10;        &lt;Box style={{ marginTop: 10, width: 72, height: 6, borderRadius: 3, background: '#51277C' }} /&gt;&#10;    &lt;/Box&gt;&#10;&#10;    {/* ── B · area konten ── */}&#10;    &lt;Box style={{ height: 530, flexDirection: 'row', gap: 28 }}&gt;&#10;        &lt;Box&#10;            style={{&#10;                width: '32%',&#10;                height: '100%',&#10;                background: 'linear-gradient(135deg, #51277C 0%, #7A45A8 100%)',&#10;                borderRadius: 18,&#10;                padding: 28,&#10;                justifyContent: 'space-between',&#10;            }}&#10;        &gt;&#10;            &lt;Box&gt;&#10;                &lt;Text&#10;                    style={{&#10;                        fontSize: 96,&#10;                        fontWeight: 'bold',&#10;                        color: '#FFFFFF',&#10;                        fontFamily: 'Trebuchet MS',&#10;                        lineHeight: 1,&#10;                    }}&#10;                &gt;&#10;                    4&#10;                &lt;/Text&gt;&#10;                &lt;Text&#10;                    style={{&#10;                        marginTop: 6,&#10;                        fontSize: 24,&#10;                        fontWeight: 'bold',&#10;                        color: '#F3B26C',&#10;                        fontFamily: 'Trebuchet MS',&#10;                    }}&#10;                &gt;&#10;                    bagian&#10;                &lt;/Text&gt;&#10;            &lt;/Box&gt;&#10;            &lt;Text&#10;                style={{&#10;                    fontSize: 17,&#10;                    color: 'rgba(255,255,255,0.88)',&#10;                    fontFamily: 'Verdana',&#10;                    lineHeight: 1.5,&#10;                }}&#10;            &gt;&#10;                Bagian 3 dan 4 yang dipakai setiap bulan, menjelang jadwal baru.&#10;            &lt;/Text&gt;&#10;        &lt;/Box&gt;&#10;&#10;        &lt;Box style={{ width: '68%', height: '100%', justifyContent: 'space-between' }}&gt;&#10;            {[&#10;                {&#10;                    n: '01',&#10;                    t: 'Peran Anda',&#10;                    d: 'Tiga tugas korlas, sesuai urutan mengerjakannya.',&#10;                    p: '4',&#10;                },&#10;                {&#10;                    n: '02',&#10;                    t: 'Akun &amp; wewenang',&#10;                    d: 'Batas wewenang, dan cara mengurus akun sekaligus.',&#10;                    p: '6–7',&#10;                },&#10;                {&#10;                    n: '03',&#10;                    t: 'Menyusun jadwal',&#10;                    d: 'Isi menu, salin Sepekan, atau tempel teks sekolah.',&#10;                    p: '9–11',&#10;                },&#10;                {&#10;                    n: '04',&#10;                    t: 'Kunci, publikasi &amp; laporan',&#10;                    d: 'Kunci–terbit, aksi massal, pantauan, lalu rekap piket.',&#10;                    p: '13–17',&#10;                },&#10;            ].map((it, i) =&gt; (&#10;                &lt;Box&#10;                    key={i}&#10;                    style={{&#10;                        flexDirection: 'row',&#10;                        alignItems: 'center',&#10;                        gap: 20,&#10;                        height: 122,&#10;                        background: '#FFFFFF',&#10;                        borderRadius: 16,&#10;                        boxShadow: '0 4px 20px rgba(0,0,0,0.08)',&#10;                        paddingLeft: 24,&#10;                        paddingRight: 28,&#10;                        borderLeft: '8px solid #AFC440',&#10;                    }}&#10;                &gt;&#10;                    &lt;Box&#10;                        style={{&#10;                            width: 56,&#10;                            height: 56,&#10;                            borderRadius: 28,&#10;                            background: 'rgba(81,39,124,0.09)',&#10;                            justifyContent: 'center',&#10;                            alignItems: 'center',&#10;                        }}&#10;                    &gt;&#10;                        &lt;Text&#10;                            style={{&#10;                                fontSize: 24,&#10;                                fontWeight: 'bold',&#10;                                color: '#51277C',&#10;                                fontFamily: 'Trebuchet MS',&#10;                            }}&#10;                        &gt;&#10;                            {it.n}&#10;                        &lt;/Text&gt;&#10;                    &lt;/Box&gt;&#10;                    &lt;Box style={{ flex: 1 }}&gt;&#10;                        &lt;Text&#10;                            style={{&#10;                                fontSize: 25,&#10;                                fontWeight: 'bold',&#10;                                color: '#2A2333',&#10;                                fontFamily: 'Trebuchet MS',&#10;                                lineHeight: 1.3,&#10;                            }}&#10;                        &gt;&#10;                            {it.t}&#10;                        &lt;/Text&gt;&#10;                        &lt;Text&#10;                            style={{&#10;                                marginTop: 5,&#10;                                fontSize: 18,&#10;                                color: '#6B6478',&#10;                                fontFamily: 'Verdana',&#10;                                lineHeight: 1.45,&#10;                            }}&#10;                        &gt;&#10;                            {it.d}&#10;                        &lt;/Text&gt;&#10;                    &lt;/Box&gt;&#10;                    &lt;Text&#10;                        style={{&#10;                            fontSize: 17,&#10;                            color: '#51277C',&#10;                            fontFamily: 'Verdana',&#10;                            fontWeight: 'bold',&#10;                        }}&#10;                    &gt;&#10;                        {it.p}&#10;                    &lt;/Text&gt;&#10;                &lt;/Box&gt;&#10;            ))}&#10;        &lt;/Box&gt;&#10;    &lt;/Box&gt;&#10;&#10;    {/* ── C · bilah kaki ── */}&#10;    &lt;Box&#10;        style={{&#10;            height: 40,&#10;            flexDirection: 'row',&#10;            alignItems: 'center',&#10;            justifyContent: 'space-between',&#10;        }}&#10;    &gt;&#10;        &lt;Text style={{ fontSize: 14, color: '#6B6478', fontFamily: 'Verdana' }}&gt;&#10;            Pizza Snack Play · Panduan Korlas &amp;amp; Admin&#10;        &lt;/Text&gt;&#10;        &lt;Text style={{ fontSize: 14, color: '#6B6478', fontFamily: 'Verdana' }}&gt;02 / 18&lt;/Text&gt;&#10;    &lt;/Box&gt;&#10;&lt;/Slide&gt;&#10;"/>
+        <p:cNvPr id="258" name=""/>
         <p:cNvGrpSpPr/>
         <p:nvPr/>
       </p:nvGrpSpPr>
@@ -9164,7 +11165,7 @@
       </p:grpSpPr>
       <p:sp>
         <p:nvSpPr>
-          <p:cNvPr id="209" name=""/>
+          <p:cNvPr id="259" name=""/>
           <p:cNvSpPr/>
           <p:nvPr/>
         </p:nvSpPr>
@@ -9183,12 +11184,15 @@
         </p:spPr>
         <p:txBody>
           <a:bodyPr/>
-          <a:p/>
-        </p:txBody>
-      </p:sp>
-      <p:sp>
-        <p:nvSpPr>
-          <p:cNvPr id="210" name="" descr="{&quot;isTemplate&quot;:true,&quot;type&quot;:&quot;text&quot;}"/>
+          <a:p>
+            <a:pPr/>
+            <a:endParaRPr/>
+          </a:p>
+        </p:txBody>
+      </p:sp>
+      <p:sp>
+        <p:nvSpPr>
+          <p:cNvPr id="260" name="" descr="{&quot;isTemplate&quot;:true,&quot;type&quot;:&quot;text&quot;}"/>
           <p:cNvSpPr txBox="1"/>
           <p:nvPr/>
         </p:nvSpPr>
@@ -9223,7 +11227,7 @@
       </p:sp>
       <p:sp>
         <p:nvSpPr>
-          <p:cNvPr id="211" name=""/>
+          <p:cNvPr id="261" name=""/>
           <p:cNvSpPr/>
           <p:nvPr/>
         </p:nvSpPr>
@@ -9244,12 +11248,15 @@
         </p:spPr>
         <p:txBody>
           <a:bodyPr/>
-          <a:p/>
-        </p:txBody>
-      </p:sp>
-      <p:sp>
-        <p:nvSpPr>
-          <p:cNvPr id="212" name=""/>
+          <a:p>
+            <a:pPr/>
+            <a:endParaRPr/>
+          </a:p>
+        </p:txBody>
+      </p:sp>
+      <p:sp>
+        <p:nvSpPr>
+          <p:cNvPr id="262" name=""/>
           <p:cNvSpPr/>
           <p:nvPr/>
         </p:nvSpPr>
@@ -9278,12 +11285,15 @@
         </p:spPr>
         <p:txBody>
           <a:bodyPr/>
-          <a:p/>
-        </p:txBody>
-      </p:sp>
-      <p:sp>
-        <p:nvSpPr>
-          <p:cNvPr id="213" name="" descr="{&quot;isTemplate&quot;:true,&quot;type&quot;:&quot;text&quot;}"/>
+          <a:p>
+            <a:pPr/>
+            <a:endParaRPr/>
+          </a:p>
+        </p:txBody>
+      </p:sp>
+      <p:sp>
+        <p:nvSpPr>
+          <p:cNvPr id="263" name="" descr="{&quot;isTemplate&quot;:true,&quot;type&quot;:&quot;text&quot;}"/>
           <p:cNvSpPr txBox="1"/>
           <p:nvPr/>
         </p:nvSpPr>
@@ -9318,7 +11328,7 @@
       </p:sp>
       <p:sp>
         <p:nvSpPr>
-          <p:cNvPr id="214" name="" descr="{&quot;isTemplate&quot;:true,&quot;type&quot;:&quot;text&quot;}"/>
+          <p:cNvPr id="264" name="" descr="{&quot;isTemplate&quot;:true,&quot;type&quot;:&quot;text&quot;}"/>
           <p:cNvSpPr txBox="1"/>
           <p:nvPr/>
         </p:nvSpPr>
@@ -9353,7 +11363,7 @@
       </p:sp>
       <p:sp>
         <p:nvSpPr>
-          <p:cNvPr id="215" name="" descr="{&quot;isTemplate&quot;:true,&quot;type&quot;:&quot;text&quot;}"/>
+          <p:cNvPr id="265" name="" descr="{&quot;isTemplate&quot;:true,&quot;type&quot;:&quot;text&quot;}"/>
           <p:cNvSpPr txBox="1"/>
           <p:nvPr/>
         </p:nvSpPr>
@@ -9392,7 +11402,7 @@
       </p:sp>
       <p:sp>
         <p:nvSpPr>
-          <p:cNvPr id="216" name=""/>
+          <p:cNvPr id="266" name=""/>
           <p:cNvSpPr/>
           <p:nvPr/>
         </p:nvSpPr>
@@ -9420,12 +11430,15 @@
         </p:spPr>
         <p:txBody>
           <a:bodyPr/>
-          <a:p/>
-        </p:txBody>
-      </p:sp>
-      <p:sp>
-        <p:nvSpPr>
-          <p:cNvPr id="217" name=""/>
+          <a:p>
+            <a:pPr/>
+            <a:endParaRPr/>
+          </a:p>
+        </p:txBody>
+      </p:sp>
+      <p:sp>
+        <p:nvSpPr>
+          <p:cNvPr id="267" name=""/>
           <p:cNvSpPr/>
           <p:nvPr/>
         </p:nvSpPr>
@@ -9477,12 +11490,15 @@
         </p:spPr>
         <p:txBody>
           <a:bodyPr/>
-          <a:p/>
-        </p:txBody>
-      </p:sp>
-      <p:sp>
-        <p:nvSpPr>
-          <p:cNvPr id="218" name=""/>
+          <a:p>
+            <a:pPr/>
+            <a:endParaRPr/>
+          </a:p>
+        </p:txBody>
+      </p:sp>
+      <p:sp>
+        <p:nvSpPr>
+          <p:cNvPr id="268" name=""/>
           <p:cNvSpPr/>
           <p:nvPr/>
         </p:nvSpPr>
@@ -9505,12 +11521,15 @@
         </p:spPr>
         <p:txBody>
           <a:bodyPr/>
-          <a:p/>
-        </p:txBody>
-      </p:sp>
-      <p:sp>
-        <p:nvSpPr>
-          <p:cNvPr id="219" name="" descr="{&quot;isTemplate&quot;:true,&quot;type&quot;:&quot;text&quot;}"/>
+          <a:p>
+            <a:pPr/>
+            <a:endParaRPr/>
+          </a:p>
+        </p:txBody>
+      </p:sp>
+      <p:sp>
+        <p:nvSpPr>
+          <p:cNvPr id="269" name="" descr="{&quot;isTemplate&quot;:true,&quot;type&quot;:&quot;text&quot;}"/>
           <p:cNvSpPr txBox="1"/>
           <p:nvPr/>
         </p:nvSpPr>
@@ -9545,7 +11564,7 @@
       </p:sp>
       <p:sp>
         <p:nvSpPr>
-          <p:cNvPr id="220" name="" descr="{&quot;isTemplate&quot;:true,&quot;type&quot;:&quot;text&quot;}"/>
+          <p:cNvPr id="270" name="" descr="{&quot;isTemplate&quot;:true,&quot;type&quot;:&quot;text&quot;}"/>
           <p:cNvSpPr txBox="1"/>
           <p:nvPr/>
         </p:nvSpPr>
@@ -9580,7 +11599,7 @@
       </p:sp>
       <p:sp>
         <p:nvSpPr>
-          <p:cNvPr id="221" name="" descr="{&quot;isTemplate&quot;:true,&quot;type&quot;:&quot;text&quot;}"/>
+          <p:cNvPr id="271" name="" descr="{&quot;isTemplate&quot;:true,&quot;type&quot;:&quot;text&quot;}"/>
           <p:cNvSpPr txBox="1"/>
           <p:nvPr/>
         </p:nvSpPr>
@@ -9615,7 +11634,7 @@
       </p:sp>
       <p:sp>
         <p:nvSpPr>
-          <p:cNvPr id="222" name="" descr="{&quot;isTemplate&quot;:true,&quot;type&quot;:&quot;text&quot;}"/>
+          <p:cNvPr id="272" name="" descr="{&quot;isTemplate&quot;:true,&quot;type&quot;:&quot;text&quot;}"/>
           <p:cNvSpPr txBox="1"/>
           <p:nvPr/>
         </p:nvSpPr>
@@ -9650,7 +11669,7 @@
       </p:sp>
       <p:sp>
         <p:nvSpPr>
-          <p:cNvPr id="223" name=""/>
+          <p:cNvPr id="273" name=""/>
           <p:cNvSpPr/>
           <p:nvPr/>
         </p:nvSpPr>
@@ -9678,12 +11697,15 @@
         </p:spPr>
         <p:txBody>
           <a:bodyPr/>
-          <a:p/>
-        </p:txBody>
-      </p:sp>
-      <p:sp>
-        <p:nvSpPr>
-          <p:cNvPr id="224" name=""/>
+          <a:p>
+            <a:pPr/>
+            <a:endParaRPr/>
+          </a:p>
+        </p:txBody>
+      </p:sp>
+      <p:sp>
+        <p:nvSpPr>
+          <p:cNvPr id="274" name=""/>
           <p:cNvSpPr/>
           <p:nvPr/>
         </p:nvSpPr>
@@ -9735,12 +11757,15 @@
         </p:spPr>
         <p:txBody>
           <a:bodyPr/>
-          <a:p/>
-        </p:txBody>
-      </p:sp>
-      <p:sp>
-        <p:nvSpPr>
-          <p:cNvPr id="225" name=""/>
+          <a:p>
+            <a:pPr/>
+            <a:endParaRPr/>
+          </a:p>
+        </p:txBody>
+      </p:sp>
+      <p:sp>
+        <p:nvSpPr>
+          <p:cNvPr id="275" name=""/>
           <p:cNvSpPr/>
           <p:nvPr/>
         </p:nvSpPr>
@@ -9763,12 +11788,15 @@
         </p:spPr>
         <p:txBody>
           <a:bodyPr/>
-          <a:p/>
-        </p:txBody>
-      </p:sp>
-      <p:sp>
-        <p:nvSpPr>
-          <p:cNvPr id="226" name="" descr="{&quot;isTemplate&quot;:true,&quot;type&quot;:&quot;text&quot;}"/>
+          <a:p>
+            <a:pPr/>
+            <a:endParaRPr/>
+          </a:p>
+        </p:txBody>
+      </p:sp>
+      <p:sp>
+        <p:nvSpPr>
+          <p:cNvPr id="276" name="" descr="{&quot;isTemplate&quot;:true,&quot;type&quot;:&quot;text&quot;}"/>
           <p:cNvSpPr txBox="1"/>
           <p:nvPr/>
         </p:nvSpPr>
@@ -9803,7 +11831,7 @@
       </p:sp>
       <p:sp>
         <p:nvSpPr>
-          <p:cNvPr id="227" name="" descr="{&quot;isTemplate&quot;:true,&quot;type&quot;:&quot;text&quot;}"/>
+          <p:cNvPr id="277" name="" descr="{&quot;isTemplate&quot;:true,&quot;type&quot;:&quot;text&quot;}"/>
           <p:cNvSpPr txBox="1"/>
           <p:nvPr/>
         </p:nvSpPr>
@@ -9838,7 +11866,7 @@
       </p:sp>
       <p:sp>
         <p:nvSpPr>
-          <p:cNvPr id="228" name="" descr="{&quot;isTemplate&quot;:true,&quot;type&quot;:&quot;text&quot;}"/>
+          <p:cNvPr id="278" name="" descr="{&quot;isTemplate&quot;:true,&quot;type&quot;:&quot;text&quot;}"/>
           <p:cNvSpPr txBox="1"/>
           <p:nvPr/>
         </p:nvSpPr>
@@ -9873,7 +11901,7 @@
       </p:sp>
       <p:sp>
         <p:nvSpPr>
-          <p:cNvPr id="229" name="" descr="{&quot;isTemplate&quot;:true,&quot;type&quot;:&quot;text&quot;}"/>
+          <p:cNvPr id="279" name="" descr="{&quot;isTemplate&quot;:true,&quot;type&quot;:&quot;text&quot;}"/>
           <p:cNvSpPr txBox="1"/>
           <p:nvPr/>
         </p:nvSpPr>
@@ -9908,7 +11936,7 @@
       </p:sp>
       <p:sp>
         <p:nvSpPr>
-          <p:cNvPr id="230" name=""/>
+          <p:cNvPr id="280" name=""/>
           <p:cNvSpPr/>
           <p:nvPr/>
         </p:nvSpPr>
@@ -9936,12 +11964,15 @@
         </p:spPr>
         <p:txBody>
           <a:bodyPr/>
-          <a:p/>
-        </p:txBody>
-      </p:sp>
-      <p:sp>
-        <p:nvSpPr>
-          <p:cNvPr id="231" name=""/>
+          <a:p>
+            <a:pPr/>
+            <a:endParaRPr/>
+          </a:p>
+        </p:txBody>
+      </p:sp>
+      <p:sp>
+        <p:nvSpPr>
+          <p:cNvPr id="281" name=""/>
           <p:cNvSpPr/>
           <p:nvPr/>
         </p:nvSpPr>
@@ -9993,12 +12024,15 @@
         </p:spPr>
         <p:txBody>
           <a:bodyPr/>
-          <a:p/>
-        </p:txBody>
-      </p:sp>
-      <p:sp>
-        <p:nvSpPr>
-          <p:cNvPr id="232" name=""/>
+          <a:p>
+            <a:pPr/>
+            <a:endParaRPr/>
+          </a:p>
+        </p:txBody>
+      </p:sp>
+      <p:sp>
+        <p:nvSpPr>
+          <p:cNvPr id="282" name=""/>
           <p:cNvSpPr/>
           <p:nvPr/>
         </p:nvSpPr>
@@ -10021,12 +12055,15 @@
         </p:spPr>
         <p:txBody>
           <a:bodyPr/>
-          <a:p/>
-        </p:txBody>
-      </p:sp>
-      <p:sp>
-        <p:nvSpPr>
-          <p:cNvPr id="233" name="" descr="{&quot;isTemplate&quot;:true,&quot;type&quot;:&quot;text&quot;}"/>
+          <a:p>
+            <a:pPr/>
+            <a:endParaRPr/>
+          </a:p>
+        </p:txBody>
+      </p:sp>
+      <p:sp>
+        <p:nvSpPr>
+          <p:cNvPr id="283" name="" descr="{&quot;isTemplate&quot;:true,&quot;type&quot;:&quot;text&quot;}"/>
           <p:cNvSpPr txBox="1"/>
           <p:nvPr/>
         </p:nvSpPr>
@@ -10061,7 +12098,7 @@
       </p:sp>
       <p:sp>
         <p:nvSpPr>
-          <p:cNvPr id="234" name="" descr="{&quot;isTemplate&quot;:true,&quot;type&quot;:&quot;text&quot;}"/>
+          <p:cNvPr id="284" name="" descr="{&quot;isTemplate&quot;:true,&quot;type&quot;:&quot;text&quot;}"/>
           <p:cNvSpPr txBox="1"/>
           <p:nvPr/>
         </p:nvSpPr>
@@ -10096,7 +12133,7 @@
       </p:sp>
       <p:sp>
         <p:nvSpPr>
-          <p:cNvPr id="235" name="" descr="{&quot;isTemplate&quot;:true,&quot;type&quot;:&quot;text&quot;}"/>
+          <p:cNvPr id="285" name="" descr="{&quot;isTemplate&quot;:true,&quot;type&quot;:&quot;text&quot;}"/>
           <p:cNvSpPr txBox="1"/>
           <p:nvPr/>
         </p:nvSpPr>
@@ -10131,7 +12168,7 @@
       </p:sp>
       <p:sp>
         <p:nvSpPr>
-          <p:cNvPr id="236" name="" descr="{&quot;isTemplate&quot;:true,&quot;type&quot;:&quot;text&quot;}"/>
+          <p:cNvPr id="286" name="" descr="{&quot;isTemplate&quot;:true,&quot;type&quot;:&quot;text&quot;}"/>
           <p:cNvSpPr txBox="1"/>
           <p:nvPr/>
         </p:nvSpPr>
@@ -10166,7 +12203,7 @@
       </p:sp>
       <p:sp>
         <p:nvSpPr>
-          <p:cNvPr id="237" name=""/>
+          <p:cNvPr id="287" name=""/>
           <p:cNvSpPr/>
           <p:nvPr/>
         </p:nvSpPr>
@@ -10194,12 +12231,15 @@
         </p:spPr>
         <p:txBody>
           <a:bodyPr/>
-          <a:p/>
-        </p:txBody>
-      </p:sp>
-      <p:sp>
-        <p:nvSpPr>
-          <p:cNvPr id="238" name=""/>
+          <a:p>
+            <a:pPr/>
+            <a:endParaRPr/>
+          </a:p>
+        </p:txBody>
+      </p:sp>
+      <p:sp>
+        <p:nvSpPr>
+          <p:cNvPr id="288" name=""/>
           <p:cNvSpPr/>
           <p:nvPr/>
         </p:nvSpPr>
@@ -10251,12 +12291,15 @@
         </p:spPr>
         <p:txBody>
           <a:bodyPr/>
-          <a:p/>
-        </p:txBody>
-      </p:sp>
-      <p:sp>
-        <p:nvSpPr>
-          <p:cNvPr id="239" name=""/>
+          <a:p>
+            <a:pPr/>
+            <a:endParaRPr/>
+          </a:p>
+        </p:txBody>
+      </p:sp>
+      <p:sp>
+        <p:nvSpPr>
+          <p:cNvPr id="289" name=""/>
           <p:cNvSpPr/>
           <p:nvPr/>
         </p:nvSpPr>
@@ -10279,12 +12322,15 @@
         </p:spPr>
         <p:txBody>
           <a:bodyPr/>
-          <a:p/>
-        </p:txBody>
-      </p:sp>
-      <p:sp>
-        <p:nvSpPr>
-          <p:cNvPr id="240" name="" descr="{&quot;isTemplate&quot;:true,&quot;type&quot;:&quot;text&quot;}"/>
+          <a:p>
+            <a:pPr/>
+            <a:endParaRPr/>
+          </a:p>
+        </p:txBody>
+      </p:sp>
+      <p:sp>
+        <p:nvSpPr>
+          <p:cNvPr id="290" name="" descr="{&quot;isTemplate&quot;:true,&quot;type&quot;:&quot;text&quot;}"/>
           <p:cNvSpPr txBox="1"/>
           <p:nvPr/>
         </p:nvSpPr>
@@ -10319,13 +12365,13 @@
       </p:sp>
       <p:sp>
         <p:nvSpPr>
-          <p:cNvPr id="241" name="" descr="{&quot;isTemplate&quot;:true,&quot;type&quot;:&quot;text&quot;}"/>
-          <p:cNvSpPr txBox="1"/>
-          <p:nvPr/>
-        </p:nvSpPr>
-        <p:spPr>
-          <a:xfrm rot="0" flipH="0" flipV="0">
-            <a:off x="5334000" y="5343525"/>
+          <p:cNvPr id="291" name="" descr="{&quot;isTemplate&quot;:true,&quot;type&quot;:&quot;text&quot;}"/>
+          <p:cNvSpPr txBox="1"/>
+          <p:nvPr/>
+        </p:nvSpPr>
+        <p:spPr>
+          <a:xfrm rot="0" flipH="0" flipV="0">
+            <a:off x="5334000" y="5200650"/>
             <a:ext cx="5210175" cy="371475"/>
           </a:xfrm>
           <a:prstGeom prst="rect"/>
@@ -10354,19 +12400,21 @@
       </p:sp>
       <p:sp>
         <p:nvSpPr>
-          <p:cNvPr id="242" name="" descr="{&quot;isTemplate&quot;:true,&quot;type&quot;:&quot;text&quot;}"/>
-          <p:cNvSpPr txBox="1"/>
-          <p:nvPr/>
-        </p:nvSpPr>
-        <p:spPr>
-          <a:xfrm rot="0" flipH="0" flipV="0">
-            <a:off x="5334000" y="5762625"/>
-            <a:ext cx="5210175" cy="304800"/>
-          </a:xfrm>
-          <a:prstGeom prst="rect"/>
-        </p:spPr>
-        <p:txBody>
-          <a:bodyPr wrap="none" lIns="0" tIns="0" rIns="0" bIns="0"/>
+          <p:cNvPr id="292" name="" descr="{&quot;isTemplate&quot;:true,&quot;type&quot;:&quot;text&quot;}"/>
+          <p:cNvSpPr txBox="1"/>
+          <p:nvPr/>
+        </p:nvSpPr>
+        <p:spPr>
+          <a:xfrm rot="0" flipH="0" flipV="0">
+            <a:off x="5334000" y="5619750"/>
+            <a:ext cx="5210175" cy="600075"/>
+          </a:xfrm>
+          <a:prstGeom prst="rect"/>
+        </p:spPr>
+        <p:txBody>
+          <a:bodyPr wrap="square" lIns="0" tIns="0" rIns="0" bIns="0">
+            <a:normAutofit/>
+          </a:bodyPr>
           <a:p>
             <a:pPr>
               <a:lnSpc>
@@ -10381,15 +12429,15 @@
                 <a:latin typeface="Verdana"/>
                 <a:ea typeface="Verdana"/>
               </a:rPr>
-              <a:t>Kunci–terbit, aksi massal, pantauan, lalu rekap piket.</a:t>
-            </a:r>
-            <a:endParaRPr/>
-          </a:p>
-        </p:txBody>
-      </p:sp>
-      <p:sp>
-        <p:nvSpPr>
-          <p:cNvPr id="243" name="" descr="{&quot;isTemplate&quot;:true,&quot;type&quot;:&quot;text&quot;}"/>
+              <a:t>Kunci–terbit, aksi massal, pantauan, rekap piket, lalu pengingat WhatsApp.</a:t>
+            </a:r>
+            <a:endParaRPr/>
+          </a:p>
+        </p:txBody>
+      </p:sp>
+      <p:sp>
+        <p:nvSpPr>
+          <p:cNvPr id="293" name="" descr="{&quot;isTemplate&quot;:true,&quot;type&quot;:&quot;text&quot;}"/>
           <p:cNvSpPr txBox="1"/>
           <p:nvPr/>
         </p:nvSpPr>
@@ -10416,15 +12464,15 @@
                 <a:latin typeface="Verdana"/>
                 <a:ea typeface="Verdana"/>
               </a:rPr>
-              <a:t>13–17</a:t>
-            </a:r>
-            <a:endParaRPr/>
-          </a:p>
-        </p:txBody>
-      </p:sp>
-      <p:sp>
-        <p:nvSpPr>
-          <p:cNvPr id="244" name="" descr="{&quot;isTemplate&quot;:true,&quot;type&quot;:&quot;text&quot;}"/>
+              <a:t>13–18</a:t>
+            </a:r>
+            <a:endParaRPr/>
+          </a:p>
+        </p:txBody>
+      </p:sp>
+      <p:sp>
+        <p:nvSpPr>
+          <p:cNvPr id="294" name="" descr="{&quot;isTemplate&quot;:true,&quot;type&quot;:&quot;text&quot;}"/>
           <p:cNvSpPr txBox="1"/>
           <p:nvPr/>
         </p:nvSpPr>
@@ -10459,7 +12507,7 @@
       </p:sp>
       <p:sp>
         <p:nvSpPr>
-          <p:cNvPr id="245" name="" descr="{&quot;isTemplate&quot;:true,&quot;type&quot;:&quot;text&quot;}"/>
+          <p:cNvPr id="295" name="" descr="{&quot;isTemplate&quot;:true,&quot;type&quot;:&quot;text&quot;}"/>
           <p:cNvSpPr txBox="1"/>
           <p:nvPr/>
         </p:nvSpPr>
@@ -10486,7 +12534,7 @@
                 <a:latin typeface="Verdana"/>
                 <a:ea typeface="Verdana"/>
               </a:rPr>
-              <a:t>02 / 18</a:t>
+              <a:t>02 / 19</a:t>
             </a:r>
             <a:endParaRPr/>
           </a:p>
@@ -10502,7 +12550,7 @@
   <p:cSld>
     <p:spTree>
       <p:nvGrpSpPr>
-        <p:cNvPr id="246" name=""/>
+        <p:cNvPr id="296" name=""/>
         <p:cNvGrpSpPr/>
         <p:nvPr/>
       </p:nvGrpSpPr>
@@ -10516,7 +12564,7 @@
       </p:grpSpPr>
       <p:sp>
         <p:nvSpPr>
-          <p:cNvPr id="247" name=""/>
+          <p:cNvPr id="297" name=""/>
           <p:cNvSpPr/>
           <p:nvPr/>
         </p:nvSpPr>
@@ -10551,7 +12599,7 @@
       </p:sp>
       <p:sp>
         <p:nvSpPr>
-          <p:cNvPr id="248" name=""/>
+          <p:cNvPr id="298" name=""/>
           <p:cNvSpPr/>
           <p:nvPr/>
         </p:nvSpPr>
@@ -10950,14 +12998,14 @@
       </p:sp>
       <p:pic>
         <p:nvPicPr>
-          <p:cNvPr id="249" name=""/>
+          <p:cNvPr id="299" name=""/>
           <p:cNvPicPr>
             <a:picLocks noChangeAspect="1"/>
           </p:cNvPicPr>
           <p:nvPr/>
         </p:nvPicPr>
         <p:blipFill>
-          <a:blip r:embed="rId1">
+          <a:blip>
             <a:alphaModFix amt="16000"/>
             <a:extLst>
               <a:ext uri="{96DAC541-7B7A-43D3-8B79-37D633B846F1}">
@@ -10982,7 +13030,7 @@
       </p:pic>
       <p:sp>
         <p:nvSpPr>
-          <p:cNvPr id="250" name="" descr="{&quot;isTemplate&quot;:true,&quot;type&quot;:&quot;text&quot;}"/>
+          <p:cNvPr id="300" name="" descr="{&quot;isTemplate&quot;:true,&quot;type&quot;:&quot;text&quot;}"/>
           <p:cNvSpPr txBox="1"/>
           <p:nvPr/>
         </p:nvSpPr>
@@ -11017,7 +13065,7 @@
       </p:sp>
       <p:sp>
         <p:nvSpPr>
-          <p:cNvPr id="251" name=""/>
+          <p:cNvPr id="301" name=""/>
           <p:cNvSpPr/>
           <p:nvPr/>
         </p:nvSpPr>
@@ -11046,7 +13094,7 @@
       </p:sp>
       <p:sp>
         <p:nvSpPr>
-          <p:cNvPr id="252" name="" descr="{&quot;isTemplate&quot;:true,&quot;type&quot;:&quot;text&quot;}"/>
+          <p:cNvPr id="302" name="" descr="{&quot;isTemplate&quot;:true,&quot;type&quot;:&quot;text&quot;}"/>
           <p:cNvSpPr txBox="1"/>
           <p:nvPr/>
         </p:nvSpPr>
@@ -11083,7 +13131,7 @@
       </p:sp>
       <p:sp>
         <p:nvSpPr>
-          <p:cNvPr id="253" name="" descr="{&quot;isTemplate&quot;:true,&quot;type&quot;:&quot;text&quot;}"/>
+          <p:cNvPr id="303" name="" descr="{&quot;isTemplate&quot;:true,&quot;type&quot;:&quot;text&quot;}"/>
           <p:cNvSpPr txBox="1"/>
           <p:nvPr/>
         </p:nvSpPr>
@@ -11136,7 +13184,7 @@
       </p:sp>
       <p:sp>
         <p:nvSpPr>
-          <p:cNvPr id="254" name="" descr="{&quot;isTemplate&quot;:true,&quot;type&quot;:&quot;text&quot;}"/>
+          <p:cNvPr id="304" name="" descr="{&quot;isTemplate&quot;:true,&quot;type&quot;:&quot;text&quot;}"/>
           <p:cNvSpPr txBox="1"/>
           <p:nvPr/>
         </p:nvSpPr>
@@ -11183,7 +13231,7 @@
   <p:cSld>
     <p:spTree>
       <p:nvGrpSpPr>
-        <p:cNvPr id="255" name="" descr="&lt;Slide&#10;    style={{&#10;        width: '1280px',&#10;        height: '720px',&#10;        background: '#FAF7F2',&#10;        paddingTop: 20,&#10;        paddingBottom: 20,&#10;        paddingLeft: 64,&#10;        paddingRight: 64,&#10;    }}&#10;&gt;&#10;    {/* ── A · blok judul ── */}&#10;    &lt;Box style={{ height: 110, justifyContent: 'center' }}&gt;&#10;        &lt;Text&#10;            style={{&#10;                fontSize: 34,&#10;                fontWeight: 'bold',&#10;                color: '#51277C',&#10;                fontFamily: 'Trebuchet MS',&#10;                lineHeight: 1.3,&#10;            }}&#10;        &gt;&#10;            Tiga tugas Anda&#10;        &lt;/Text&gt;&#10;        &lt;Box style={{ marginTop: 10, width: 72, height: 6, borderRadius: 3, background: '#51277C' }} /&gt;&#10;    &lt;/Box&gt;&#10;&#10;    {/* ── B · area konten ── */}&#10;    &lt;Box style={{ height: 530, flexDirection: 'row', gap: 30 }}&gt;&#10;        {/* kiri 55% · alur tiga langkah */}&#10;        &lt;Box&#10;            style={{&#10;                width: '55%',&#10;                height: '100%',&#10;                background: 'rgba(81,39,124,0.06)',&#10;                borderRadius: 20,&#10;                justifyContent: 'center',&#10;                alignItems: 'center',&#10;            }}&#10;        &gt;&#10;            &lt;svg width={520} height={430} viewBox='0 0 520 430'&gt;&#10;                {/* langkah 1 */}&#10;                &lt;rect x='14' y='8' width='492' height='112' rx='16' fill='#FFFFFF' stroke='#E6DFD2' strokeWidth='2' /&gt;&#10;                &lt;circle cx='62' cy='64' r='28' fill='#51277C' /&gt;&#10;                &lt;text x='62' y='74' fontFamily='Trebuchet MS' fontSize='28' fontWeight='bold' fill='#FFFFFF' textAnchor='middle'&gt;&#10;                    1&#10;                &lt;/text&gt;&#10;                &lt;text x='112' y='54' fontFamily='Trebuchet MS' fontSize='24' fontWeight='bold' fill='#51277C'&gt;&#10;                    Susun&#10;                &lt;/text&gt;&#10;                &lt;text x='112' y='86' fontFamily='Verdana' fontSize='16' fill='#6B6478'&gt;&#10;                    Menu untuk Senin sampai Jumat&#10;                &lt;/text&gt;&#10;                {/* panah */}&#10;                &lt;path d='M260 126v30' stroke='#AFC440' strokeWidth='5' strokeLinecap='round' /&gt;&#10;                &lt;path d='M250 150l10 12 10-12' fill='none' stroke='#AFC440' strokeWidth='5' strokeLinecap='round' /&gt;&#10;&#10;                {/* langkah 2 */}&#10;                &lt;rect x='14' y='164' width='492' height='112' rx='16' fill='#FFFFFF' stroke='#E6DFD2' strokeWidth='2' /&gt;&#10;                &lt;circle cx='62' cy='220' r='28' fill='#51277C' /&gt;&#10;                &lt;text x='62' y='230' fontFamily='Trebuchet MS' fontSize='28' fontWeight='bold' fill='#FFFFFF' textAnchor='middle'&gt;&#10;                    2&#10;                &lt;/text&gt;&#10;                &lt;text x='112' y='210' fontFamily='Trebuchet MS' fontSize='24' fontWeight='bold' fill='#51277C'&gt;&#10;                    Tentukan petugas&#10;                &lt;/text&gt;&#10;                &lt;text x='112' y='242' fontFamily='Verdana' fontSize='16' fill='#6B6478'&gt;&#10;                    Atau biarkan kosong supaya direbut orang tua&#10;                &lt;/text&gt;&#10;                {/* panah */}&#10;                &lt;path d='M260 282v30' stroke='#AFC440' strokeWidth='5' strokeLinecap='round' /&gt;&#10;                &lt;path d='M250 306l10 12 10-12' fill='none' stroke='#AFC440' strokeWidth='5' strokeLinecap='round' /&gt;&#10;&#10;                {/* langkah 3 */}&#10;                &lt;rect x='14' y='320' width='492' height='104' rx='16' fill='#51277C' /&gt;&#10;                &lt;circle cx='62' cy='372' r='28' fill='#F3B26C' /&gt;&#10;                &lt;text x='62' y='382' fontFamily='Trebuchet MS' fontSize='28' fontWeight='bold' fill='#51277C' textAnchor='middle'&gt;&#10;                    3&#10;                &lt;/text&gt;&#10;                &lt;text x='112' y='362' fontFamily='Trebuchet MS' fontSize='24' fontWeight='bold' fill='#FFFFFF'&gt;&#10;                    Umumkan&#10;                &lt;/text&gt;&#10;                &lt;text x='112' y='394' fontFamily='Verdana' fontSize='16' fill='#EFEAE1'&gt;&#10;                    Kunci lebih dulu, baru terbit ke orang tua&#10;                &lt;/text&gt;&#10;            &lt;/svg&gt;&#10;        &lt;/Box&gt;&#10;&#10;        {/* kanan 45% · tiga keterangan */}&#10;        &lt;Box style={{ width: '45%', height: '100%', justifyContent: 'space-between' }}&gt;&#10;            {[&#10;                {&#10;                    t: 'Susun — isi menunya',&#10;                    d: 'Satu bulan lebih baik dikerjakan sekaligus. Tiga cara: ketik per hari, salin dari minggu lain, atau tempel teks dari sekolah.',&#10;                    g: 'Bagian 3',&#10;                },&#10;                {&#10;                    t: 'Petugas — siapa ambil snack',&#10;                    d: 'Pilih dari daftar siswa kelas Anda; nama orang tuanya terisi sendiri. Dikosongkan pun boleh.',&#10;                    g: 'Bisa dikosongkan',&#10;                },&#10;                {&#10;                    t: 'Umumkan — baru kelihatan',&#10;                    d: 'Sebelum diumumkan, orang tua tidak melihat apa pun. Jadi jangan khawatir kalau belum muncul.',&#10;                    g: 'Bagian 4',&#10;                },&#10;            ].map((it, i) =&gt; (&#10;                &lt;Box&#10;                    key={i}&#10;                    style={{&#10;                        height: 166,&#10;                        background: '#FFFFFF',&#10;                        borderRadius: 16,&#10;                        boxShadow: '0 4px 20px rgba(0,0,0,0.08)',&#10;                        padding: 22,&#10;                        borderLeft: i === 2 ? '8px solid #F3B26C' : '8px solid #AFC440',&#10;                    }}&#10;                &gt;&#10;                    &lt;Text&#10;                        style={{&#10;                            fontSize: 24,&#10;                            fontWeight: 'bold',&#10;                            color: '#51277C',&#10;                            fontFamily: 'Trebuchet MS',&#10;                            lineHeight: 1.3,&#10;                        }}&#10;                    &gt;&#10;                        {it.t}&#10;                    &lt;/Text&gt;&#10;                    &lt;Text&#10;                        style={{&#10;                            marginTop: 10,&#10;                            fontSize: 17,&#10;                            color: '#6B6478',&#10;                            fontFamily: 'Verdana',&#10;                            lineHeight: 1.5,&#10;                        }}&#10;                    &gt;&#10;                        {it.d}&#10;                    &lt;/Text&gt;&#10;                    &lt;Box style={{ marginTop: 'auto' }}&gt;&#10;                        &lt;Text&#10;                            style={{&#10;                                fontSize: 16,&#10;                                color: '#51277C',&#10;                                fontFamily: 'Verdana',&#10;                                fontWeight: 'bold',&#10;                            }}&#10;                        &gt;&#10;                            {it.g}&#10;                        &lt;/Text&gt;&#10;                    &lt;/Box&gt;&#10;                &lt;/Box&gt;&#10;            ))}&#10;        &lt;/Box&gt;&#10;    &lt;/Box&gt;&#10;&#10;    {/* ── C · bilah kaki ── */}&#10;    &lt;Box&#10;        style={{&#10;            height: 40,&#10;            flexDirection: 'row',&#10;            alignItems: 'center',&#10;            justifyContent: 'space-between',&#10;        }}&#10;    &gt;&#10;        &lt;Text style={{ fontSize: 14, color: '#6B6478', fontFamily: 'Verdana' }}&gt;&#10;            Pizza Snack Play · Panduan Korlas &amp;amp; Admin&#10;        &lt;/Text&gt;&#10;        &lt;Text style={{ fontSize: 14, color: '#6B6478', fontFamily: 'Verdana' }}&gt;04 / 18&lt;/Text&gt;&#10;    &lt;/Box&gt;&#10;&lt;/Slide&gt;&#10;"/>
+        <p:cNvPr id="305" name=""/>
         <p:cNvGrpSpPr/>
         <p:nvPr/>
       </p:nvGrpSpPr>
@@ -11197,7 +13245,7 @@
       </p:grpSpPr>
       <p:sp>
         <p:nvSpPr>
-          <p:cNvPr id="256" name=""/>
+          <p:cNvPr id="306" name=""/>
           <p:cNvSpPr/>
           <p:nvPr/>
         </p:nvSpPr>
@@ -11216,12 +13264,15 @@
         </p:spPr>
         <p:txBody>
           <a:bodyPr/>
-          <a:p/>
-        </p:txBody>
-      </p:sp>
-      <p:sp>
-        <p:nvSpPr>
-          <p:cNvPr id="257" name="" descr="{&quot;isTemplate&quot;:true,&quot;type&quot;:&quot;text&quot;}"/>
+          <a:p>
+            <a:pPr/>
+            <a:endParaRPr/>
+          </a:p>
+        </p:txBody>
+      </p:sp>
+      <p:sp>
+        <p:nvSpPr>
+          <p:cNvPr id="307" name="" descr="{&quot;isTemplate&quot;:true,&quot;type&quot;:&quot;text&quot;}"/>
           <p:cNvSpPr txBox="1"/>
           <p:nvPr/>
         </p:nvSpPr>
@@ -11256,7 +13307,7 @@
       </p:sp>
       <p:sp>
         <p:nvSpPr>
-          <p:cNvPr id="258" name=""/>
+          <p:cNvPr id="308" name=""/>
           <p:cNvSpPr/>
           <p:nvPr/>
         </p:nvSpPr>
@@ -11277,12 +13328,15 @@
         </p:spPr>
         <p:txBody>
           <a:bodyPr/>
-          <a:p/>
-        </p:txBody>
-      </p:sp>
-      <p:sp>
-        <p:nvSpPr>
-          <p:cNvPr id="259" name=""/>
+          <a:p>
+            <a:pPr/>
+            <a:endParaRPr/>
+          </a:p>
+        </p:txBody>
+      </p:sp>
+      <p:sp>
+        <p:nvSpPr>
+          <p:cNvPr id="309" name=""/>
           <p:cNvSpPr/>
           <p:nvPr/>
         </p:nvSpPr>
@@ -11305,19 +13359,22 @@
         </p:spPr>
         <p:txBody>
           <a:bodyPr/>
-          <a:p/>
+          <a:p>
+            <a:pPr/>
+            <a:endParaRPr/>
+          </a:p>
         </p:txBody>
       </p:sp>
       <p:pic>
         <p:nvPicPr>
-          <p:cNvPr id="260" name=""/>
+          <p:cNvPr id="310" name=""/>
           <p:cNvPicPr>
             <a:picLocks noChangeAspect="1"/>
           </p:cNvPicPr>
           <p:nvPr/>
         </p:nvPicPr>
         <p:blipFill>
-          <a:blip r:embed="rId1">
+          <a:blip>
             <a:extLst>
               <a:ext uri="{96DAC541-7B7A-43D3-8B79-37D633B846F1}">
                 <asvg:svgBlip r:embed="rId1"/>
@@ -11341,7 +13398,7 @@
       </p:pic>
       <p:sp>
         <p:nvSpPr>
-          <p:cNvPr id="261" name=""/>
+          <p:cNvPr id="311" name=""/>
           <p:cNvSpPr/>
           <p:nvPr/>
         </p:nvSpPr>
@@ -11369,12 +13426,15 @@
         </p:spPr>
         <p:txBody>
           <a:bodyPr/>
-          <a:p/>
-        </p:txBody>
-      </p:sp>
-      <p:sp>
-        <p:nvSpPr>
-          <p:cNvPr id="262" name=""/>
+          <a:p>
+            <a:pPr/>
+            <a:endParaRPr/>
+          </a:p>
+        </p:txBody>
+      </p:sp>
+      <p:sp>
+        <p:nvSpPr>
+          <p:cNvPr id="312" name=""/>
           <p:cNvSpPr/>
           <p:nvPr/>
         </p:nvSpPr>
@@ -11426,12 +13486,15 @@
         </p:spPr>
         <p:txBody>
           <a:bodyPr/>
-          <a:p/>
-        </p:txBody>
-      </p:sp>
-      <p:sp>
-        <p:nvSpPr>
-          <p:cNvPr id="263" name="" descr="{&quot;isTemplate&quot;:true,&quot;type&quot;:&quot;text&quot;}"/>
+          <a:p>
+            <a:pPr/>
+            <a:endParaRPr/>
+          </a:p>
+        </p:txBody>
+      </p:sp>
+      <p:sp>
+        <p:nvSpPr>
+          <p:cNvPr id="313" name="" descr="{&quot;isTemplate&quot;:true,&quot;type&quot;:&quot;text&quot;}"/>
           <p:cNvSpPr txBox="1"/>
           <p:nvPr/>
         </p:nvSpPr>
@@ -11466,7 +13529,7 @@
       </p:sp>
       <p:sp>
         <p:nvSpPr>
-          <p:cNvPr id="264" name="" descr="{&quot;isTemplate&quot;:true,&quot;type&quot;:&quot;text&quot;}"/>
+          <p:cNvPr id="314" name="" descr="{&quot;isTemplate&quot;:true,&quot;type&quot;:&quot;text&quot;}"/>
           <p:cNvSpPr txBox="1"/>
           <p:nvPr/>
         </p:nvSpPr>
@@ -11503,7 +13566,7 @@
       </p:sp>
       <p:sp>
         <p:nvSpPr>
-          <p:cNvPr id="265" name="" descr="{&quot;isTemplate&quot;:true,&quot;type&quot;:&quot;text&quot;}"/>
+          <p:cNvPr id="315" name="" descr="{&quot;isTemplate&quot;:true,&quot;type&quot;:&quot;text&quot;}"/>
           <p:cNvSpPr txBox="1"/>
           <p:nvPr/>
         </p:nvSpPr>
@@ -11538,7 +13601,7 @@
       </p:sp>
       <p:sp>
         <p:nvSpPr>
-          <p:cNvPr id="266" name=""/>
+          <p:cNvPr id="316" name=""/>
           <p:cNvSpPr/>
           <p:nvPr/>
         </p:nvSpPr>
@@ -11566,12 +13629,15 @@
         </p:spPr>
         <p:txBody>
           <a:bodyPr/>
-          <a:p/>
-        </p:txBody>
-      </p:sp>
-      <p:sp>
-        <p:nvSpPr>
-          <p:cNvPr id="267" name=""/>
+          <a:p>
+            <a:pPr/>
+            <a:endParaRPr/>
+          </a:p>
+        </p:txBody>
+      </p:sp>
+      <p:sp>
+        <p:nvSpPr>
+          <p:cNvPr id="317" name=""/>
           <p:cNvSpPr/>
           <p:nvPr/>
         </p:nvSpPr>
@@ -11623,12 +13689,15 @@
         </p:spPr>
         <p:txBody>
           <a:bodyPr/>
-          <a:p/>
-        </p:txBody>
-      </p:sp>
-      <p:sp>
-        <p:nvSpPr>
-          <p:cNvPr id="268" name="" descr="{&quot;isTemplate&quot;:true,&quot;type&quot;:&quot;text&quot;}"/>
+          <a:p>
+            <a:pPr/>
+            <a:endParaRPr/>
+          </a:p>
+        </p:txBody>
+      </p:sp>
+      <p:sp>
+        <p:nvSpPr>
+          <p:cNvPr id="318" name="" descr="{&quot;isTemplate&quot;:true,&quot;type&quot;:&quot;text&quot;}"/>
           <p:cNvSpPr txBox="1"/>
           <p:nvPr/>
         </p:nvSpPr>
@@ -11663,7 +13732,7 @@
       </p:sp>
       <p:sp>
         <p:nvSpPr>
-          <p:cNvPr id="269" name="" descr="{&quot;isTemplate&quot;:true,&quot;type&quot;:&quot;text&quot;}"/>
+          <p:cNvPr id="319" name="" descr="{&quot;isTemplate&quot;:true,&quot;type&quot;:&quot;text&quot;}"/>
           <p:cNvSpPr txBox="1"/>
           <p:nvPr/>
         </p:nvSpPr>
@@ -11700,7 +13769,7 @@
       </p:sp>
       <p:sp>
         <p:nvSpPr>
-          <p:cNvPr id="270" name="" descr="{&quot;isTemplate&quot;:true,&quot;type&quot;:&quot;text&quot;}"/>
+          <p:cNvPr id="320" name="" descr="{&quot;isTemplate&quot;:true,&quot;type&quot;:&quot;text&quot;}"/>
           <p:cNvSpPr txBox="1"/>
           <p:nvPr/>
         </p:nvSpPr>
@@ -11735,7 +13804,7 @@
       </p:sp>
       <p:sp>
         <p:nvSpPr>
-          <p:cNvPr id="271" name=""/>
+          <p:cNvPr id="321" name=""/>
           <p:cNvSpPr/>
           <p:nvPr/>
         </p:nvSpPr>
@@ -11763,12 +13832,15 @@
         </p:spPr>
         <p:txBody>
           <a:bodyPr/>
-          <a:p/>
-        </p:txBody>
-      </p:sp>
-      <p:sp>
-        <p:nvSpPr>
-          <p:cNvPr id="272" name=""/>
+          <a:p>
+            <a:pPr/>
+            <a:endParaRPr/>
+          </a:p>
+        </p:txBody>
+      </p:sp>
+      <p:sp>
+        <p:nvSpPr>
+          <p:cNvPr id="322" name=""/>
           <p:cNvSpPr/>
           <p:nvPr/>
         </p:nvSpPr>
@@ -11820,12 +13892,15 @@
         </p:spPr>
         <p:txBody>
           <a:bodyPr/>
-          <a:p/>
-        </p:txBody>
-      </p:sp>
-      <p:sp>
-        <p:nvSpPr>
-          <p:cNvPr id="273" name="" descr="{&quot;isTemplate&quot;:true,&quot;type&quot;:&quot;text&quot;}"/>
+          <a:p>
+            <a:pPr/>
+            <a:endParaRPr/>
+          </a:p>
+        </p:txBody>
+      </p:sp>
+      <p:sp>
+        <p:nvSpPr>
+          <p:cNvPr id="323" name="" descr="{&quot;isTemplate&quot;:true,&quot;type&quot;:&quot;text&quot;}"/>
           <p:cNvSpPr txBox="1"/>
           <p:nvPr/>
         </p:nvSpPr>
@@ -11860,7 +13935,7 @@
       </p:sp>
       <p:sp>
         <p:nvSpPr>
-          <p:cNvPr id="274" name="" descr="{&quot;isTemplate&quot;:true,&quot;type&quot;:&quot;text&quot;}"/>
+          <p:cNvPr id="324" name="" descr="{&quot;isTemplate&quot;:true,&quot;type&quot;:&quot;text&quot;}"/>
           <p:cNvSpPr txBox="1"/>
           <p:nvPr/>
         </p:nvSpPr>
@@ -11897,7 +13972,7 @@
       </p:sp>
       <p:sp>
         <p:nvSpPr>
-          <p:cNvPr id="275" name="" descr="{&quot;isTemplate&quot;:true,&quot;type&quot;:&quot;text&quot;}"/>
+          <p:cNvPr id="325" name="" descr="{&quot;isTemplate&quot;:true,&quot;type&quot;:&quot;text&quot;}"/>
           <p:cNvSpPr txBox="1"/>
           <p:nvPr/>
         </p:nvSpPr>
@@ -11932,7 +14007,7 @@
       </p:sp>
       <p:sp>
         <p:nvSpPr>
-          <p:cNvPr id="276" name="" descr="{&quot;isTemplate&quot;:true,&quot;type&quot;:&quot;text&quot;}"/>
+          <p:cNvPr id="326" name="" descr="{&quot;isTemplate&quot;:true,&quot;type&quot;:&quot;text&quot;}"/>
           <p:cNvSpPr txBox="1"/>
           <p:nvPr/>
         </p:nvSpPr>
@@ -11967,7 +14042,7 @@
       </p:sp>
       <p:sp>
         <p:nvSpPr>
-          <p:cNvPr id="277" name="" descr="{&quot;isTemplate&quot;:true,&quot;type&quot;:&quot;text&quot;}"/>
+          <p:cNvPr id="327" name="" descr="{&quot;isTemplate&quot;:true,&quot;type&quot;:&quot;text&quot;}"/>
           <p:cNvSpPr txBox="1"/>
           <p:nvPr/>
         </p:nvSpPr>
@@ -11994,7 +14069,7 @@
                 <a:latin typeface="Verdana"/>
                 <a:ea typeface="Verdana"/>
               </a:rPr>
-              <a:t>04 / 18</a:t>
+              <a:t>04 / 19</a:t>
             </a:r>
             <a:endParaRPr/>
           </a:p>
@@ -12010,7 +14085,7 @@
   <p:cSld>
     <p:spTree>
       <p:nvGrpSpPr>
-        <p:cNvPr id="278" name=""/>
+        <p:cNvPr id="328" name=""/>
         <p:cNvGrpSpPr/>
         <p:nvPr/>
       </p:nvGrpSpPr>
@@ -12024,7 +14099,7 @@
       </p:grpSpPr>
       <p:sp>
         <p:nvSpPr>
-          <p:cNvPr id="279" name=""/>
+          <p:cNvPr id="329" name=""/>
           <p:cNvSpPr/>
           <p:nvPr/>
         </p:nvSpPr>
@@ -12059,7 +14134,7 @@
       </p:sp>
       <p:sp>
         <p:nvSpPr>
-          <p:cNvPr id="280" name=""/>
+          <p:cNvPr id="330" name=""/>
           <p:cNvSpPr/>
           <p:nvPr/>
         </p:nvSpPr>
@@ -12458,14 +14533,14 @@
       </p:sp>
       <p:pic>
         <p:nvPicPr>
-          <p:cNvPr id="281" name=""/>
+          <p:cNvPr id="331" name=""/>
           <p:cNvPicPr>
             <a:picLocks noChangeAspect="1"/>
           </p:cNvPicPr>
           <p:nvPr/>
         </p:nvPicPr>
         <p:blipFill>
-          <a:blip r:embed="rId1">
+          <a:blip>
             <a:alphaModFix amt="16000"/>
             <a:extLst>
               <a:ext uri="{96DAC541-7B7A-43D3-8B79-37D633B846F1}">
@@ -12490,7 +14565,7 @@
       </p:pic>
       <p:sp>
         <p:nvSpPr>
-          <p:cNvPr id="282" name="" descr="{&quot;isTemplate&quot;:true,&quot;type&quot;:&quot;text&quot;}"/>
+          <p:cNvPr id="332" name="" descr="{&quot;isTemplate&quot;:true,&quot;type&quot;:&quot;text&quot;}"/>
           <p:cNvSpPr txBox="1"/>
           <p:nvPr/>
         </p:nvSpPr>
@@ -12525,7 +14600,7 @@
       </p:sp>
       <p:sp>
         <p:nvSpPr>
-          <p:cNvPr id="283" name=""/>
+          <p:cNvPr id="333" name=""/>
           <p:cNvSpPr/>
           <p:nvPr/>
         </p:nvSpPr>
@@ -12554,7 +14629,7 @@
       </p:sp>
       <p:sp>
         <p:nvSpPr>
-          <p:cNvPr id="284" name="" descr="{&quot;isTemplate&quot;:true,&quot;type&quot;:&quot;text&quot;}"/>
+          <p:cNvPr id="334" name="" descr="{&quot;isTemplate&quot;:true,&quot;type&quot;:&quot;text&quot;}"/>
           <p:cNvSpPr txBox="1"/>
           <p:nvPr/>
         </p:nvSpPr>
@@ -12591,7 +14666,7 @@
       </p:sp>
       <p:sp>
         <p:nvSpPr>
-          <p:cNvPr id="285" name="" descr="{&quot;isTemplate&quot;:true,&quot;type&quot;:&quot;text&quot;}"/>
+          <p:cNvPr id="335" name="" descr="{&quot;isTemplate&quot;:true,&quot;type&quot;:&quot;text&quot;}"/>
           <p:cNvSpPr txBox="1"/>
           <p:nvPr/>
         </p:nvSpPr>
@@ -12644,7 +14719,7 @@
       </p:sp>
       <p:sp>
         <p:nvSpPr>
-          <p:cNvPr id="286" name="" descr="{&quot;isTemplate&quot;:true,&quot;type&quot;:&quot;text&quot;}"/>
+          <p:cNvPr id="336" name="" descr="{&quot;isTemplate&quot;:true,&quot;type&quot;:&quot;text&quot;}"/>
           <p:cNvSpPr txBox="1"/>
           <p:nvPr/>
         </p:nvSpPr>
@@ -12691,7 +14766,7 @@
   <p:cSld>
     <p:spTree>
       <p:nvGrpSpPr>
-        <p:cNvPr id="287" name="" descr="&lt;Slide&#10;    style={{&#10;        width: '1280px',&#10;        height: '720px',&#10;        background: '#FAF7F2',&#10;        paddingTop: 20,&#10;        paddingBottom: 20,&#10;        paddingLeft: 64,&#10;        paddingRight: 64,&#10;    }}&#10;&gt;&#10;    {/* ── A · blok judul ── */}&#10;    &lt;Box style={{ height: 110, justifyContent: 'center' }}&gt;&#10;        &lt;Text&#10;            style={{&#10;                fontSize: 34,&#10;                fontWeight: 'bold',&#10;                color: '#51277C',&#10;                fontFamily: 'Trebuchet MS',&#10;                lineHeight: 1.3,&#10;            }}&#10;        &gt;&#10;            Admin &amp;amp; Korlas: bedanya di mana&#10;        &lt;/Text&gt;&#10;        &lt;Box style={{ marginTop: 10, width: 72, height: 6, borderRadius: 3, background: '#51277C' }} /&gt;&#10;    &lt;/Box&gt;&#10;&#10;    {/* ── B · area konten ── */}&#10;    &lt;Box style={{ height: 530, flexDirection: 'row', gap: 26 }}&gt;&#10;        {/* kiri 60% · dua kartu wewenang */}&#10;        &lt;Box style={{ width: '60%', height: '100%', justifyContent: 'space-between' }}&gt;&#10;            &lt;Box&#10;                style={{&#10;                    height: 258,&#10;                    background: '#FFFFFF',&#10;                    borderRadius: 16,&#10;                    boxShadow: '0 4px 20px rgba(0,0,0,0.08)',&#10;                    padding: 22,&#10;                    borderTop: '8px solid #AFC440',&#10;                }}&#10;            &gt;&#10;                &lt;Text&#10;                    style={{&#10;                        fontSize: 25,&#10;                        fontWeight: 'bold',&#10;                        color: '#51277C',&#10;                        fontFamily: 'Trebuchet MS',&#10;                    }}&#10;                &gt;&#10;                    Korlas boleh sendiri&#10;                &lt;/Text&gt;&#10;                &lt;Box style={{ marginTop: 12 }}&gt;&#10;                    {[&#10;                        'Menyusun &amp; mengubah jadwal kelasnya, selama belum dikunci',&#10;                        'Menentukan petugas, atau membiarkannya kosong',&#10;                        'Menyalin Sepekan &amp; menempel teks jadwal dari sekolah',&#10;                        'Mengunci lalu mempublikasikan jadwal kelasnya',&#10;                        'Mengambil tanggal piket seperti orang tua lainnya',&#10;                    ].map((s, i) =&gt; (&#10;                        &lt;Box key={i} style={{ flexDirection: 'row', alignItems: 'center', gap: 10, marginTop: 7 }}&gt;&#10;                            &lt;svg width={18} height={18} viewBox='0 0 24 24'&gt;&#10;                                &lt;path d='M5 13l4 4 10-11' fill='none' stroke='#AFC440' strokeWidth='3' strokeLinecap='round' strokeLinejoin='round' /&gt;&#10;                            &lt;/svg&gt;&#10;                            &lt;Text style={{ flex: 1, fontSize: 16, color: '#2A2333', fontFamily: 'Verdana', lineHeight: 1.45 }}&gt;&#10;                                {s}&#10;                            &lt;/Text&gt;&#10;                        &lt;/Box&gt;&#10;                    ))}&#10;                &lt;/Box&gt;&#10;            &lt;/Box&gt;&#10;&#10;            &lt;Box&#10;                style={{&#10;                    height: 254,&#10;                    background: '#FFFFFF',&#10;                    borderRadius: 16,&#10;                    boxShadow: '0 4px 20px rgba(0,0,0,0.08)',&#10;                    padding: 22,&#10;                    borderTop: '8px solid #F3B26C',&#10;                }}&#10;            &gt;&#10;                &lt;Text&#10;                    style={{&#10;                        fontSize: 25,&#10;                        fontWeight: 'bold',&#10;                        color: '#51277C',&#10;                        fontFamily: 'Trebuchet MS',&#10;                    }}&#10;                &gt;&#10;                    Tetap wewenang admin&#10;                &lt;/Text&gt;&#10;                &lt;Box style={{ marginTop: 12 }}&gt;&#10;                    {[&#10;                        'Mengelola katalog menu, kategori, dan gambarnya',&#10;                        'Mengelola akun orang tua, termasuk mengangkat korlas',&#10;                        'Hari libur sekolah — berlaku untuk semua kelas',&#10;                        'Membuka kunci jadwal yang sudah dikunci atau terbit',&#10;                    ].map((s, i) =&gt; (&#10;                        &lt;Box key={i} style={{ flexDirection: 'row', alignItems: 'center', gap: 10, marginTop: 7 }}&gt;&#10;                            &lt;svg width={18} height={18} viewBox='0 0 24 24'&gt;&#10;                                &lt;path d='M7 7l10 10M17 7L7 17' fill='none' stroke='#F3B26C' strokeWidth='3' strokeLinecap='round' /&gt;&#10;                            &lt;/svg&gt;&#10;                            &lt;Text style={{ flex: 1, fontSize: 16, color: '#2A2333', fontFamily: 'Verdana', lineHeight: 1.45 }}&gt;&#10;                                {s}&#10;                            &lt;/Text&gt;&#10;                        &lt;/Box&gt;&#10;                    ))}&#10;                &lt;/Box&gt;&#10;            &lt;/Box&gt;&#10;        &lt;/Box&gt;&#10;&#10;        {/* kanan 40% · ilustrasi dua peran */}&#10;        &lt;Box&#10;            style={{&#10;                width: '40%',&#10;                height: '100%',&#10;                background: 'rgba(81,39,124,0.06)',&#10;                borderRadius: 20,&#10;                justifyContent: 'center',&#10;                alignItems: 'center',&#10;            }}&#10;        &gt;&#10;            &lt;svg width={360} height={400} viewBox='0 0 360 400'&gt;&#10;                {/* korlas */}&#10;                &lt;rect x='24' y='24' width='312' height='150' rx='18' fill='#FFFFFF' stroke='#AFC440' strokeWidth='3' /&gt;&#10;                &lt;circle cx='76' cy='78' r='30' fill='#AFC440' /&gt;&#10;                &lt;text x='76' y='90' fontFamily='Trebuchet MS' fontSize='30' fontWeight='bold' fill='#3F4718' textAnchor='middle'&gt;&#10;                    K&#10;                &lt;/text&gt;&#10;                &lt;text x='124' y='70' fontFamily='Trebuchet MS' fontSize='24' fontWeight='bold' fill='#51277C'&gt;&#10;                    Korlas&#10;                &lt;/text&gt;&#10;                &lt;text x='124' y='102' fontFamily='Verdana' fontSize='15' fill='#6B6478'&gt;&#10;                    satu kelas&#10;                &lt;/text&gt;&#10;                &lt;rect x='52' y='122' width='256' height='9' rx='5' fill='#DED7CB' /&gt;&#10;                &lt;rect x='52' y='140' width='196' height='9' rx='5' fill='#EDE8DF' /&gt;&#10;&#10;                {/* admin */}&#10;                &lt;rect x='24' y='196' width='312' height='150' rx='18' fill='#51277C' /&gt;&#10;                &lt;circle cx='76' cy='250' r='30' fill='#F3B26C' /&gt;&#10;                &lt;text x='76' y='262' fontFamily='Trebuchet MS' fontSize='30' fontWeight='bold' fill='#51277C' textAnchor='middle'&gt;&#10;                    A&#10;                &lt;/text&gt;&#10;                &lt;text x='124' y='242' fontFamily='Trebuchet MS' fontSize='24' fontWeight='bold' fill='#FFFFFF'&gt;&#10;                    Admin&#10;                &lt;/text&gt;&#10;                &lt;text x='124' y='274' fontFamily='Verdana' fontSize='15' fill='#EFEAE1'&gt;&#10;                    semua kelas&#10;                &lt;/text&gt;&#10;                &lt;rect x='52' y='294' width='256' height='9' rx='5' fill='rgba(255,255,255,0.5)' /&gt;&#10;                &lt;rect x='52' y='312' width='216' height='9' rx='5' fill='rgba(255,255,255,0.3)' /&gt;&#10;&#10;                &lt;text x='180' y='380' fontFamily='Verdana' fontSize='16' fill='#6B6478' textAnchor='middle'&gt;&#10;                    Admin melihat semua kelas&#10;                &lt;/text&gt;&#10;            &lt;/svg&gt;&#10;        &lt;/Box&gt;&#10;    &lt;/Box&gt;&#10;&#10;    {/* ── C · bilah kaki ── */}&#10;    &lt;Box&#10;        style={{&#10;            height: 40,&#10;            flexDirection: 'row',&#10;            alignItems: 'center',&#10;            justifyContent: 'space-between',&#10;        }}&#10;    &gt;&#10;        &lt;Text style={{ fontSize: 14, color: '#6B6478', fontFamily: 'Verdana' }}&gt;&#10;            Pizza Snack Play · Panduan Korlas &amp;amp; Admin&#10;        &lt;/Text&gt;&#10;        &lt;Text style={{ fontSize: 14, color: '#6B6478', fontFamily: 'Verdana' }}&gt;06 / 18&lt;/Text&gt;&#10;    &lt;/Box&gt;&#10;&lt;/Slide&gt;&#10;"/>
+        <p:cNvPr id="337" name=""/>
         <p:cNvGrpSpPr/>
         <p:nvPr/>
       </p:nvGrpSpPr>
@@ -12705,7 +14780,7 @@
       </p:grpSpPr>
       <p:sp>
         <p:nvSpPr>
-          <p:cNvPr id="288" name=""/>
+          <p:cNvPr id="338" name=""/>
           <p:cNvSpPr/>
           <p:nvPr/>
         </p:nvSpPr>
@@ -12724,12 +14799,15 @@
         </p:spPr>
         <p:txBody>
           <a:bodyPr/>
-          <a:p/>
-        </p:txBody>
-      </p:sp>
-      <p:sp>
-        <p:nvSpPr>
-          <p:cNvPr id="289" name="" descr="{&quot;isTemplate&quot;:true,&quot;type&quot;:&quot;text&quot;}"/>
+          <a:p>
+            <a:pPr/>
+            <a:endParaRPr/>
+          </a:p>
+        </p:txBody>
+      </p:sp>
+      <p:sp>
+        <p:nvSpPr>
+          <p:cNvPr id="339" name="" descr="{&quot;isTemplate&quot;:true,&quot;type&quot;:&quot;text&quot;}"/>
           <p:cNvSpPr txBox="1"/>
           <p:nvPr/>
         </p:nvSpPr>
@@ -12764,7 +14842,7 @@
       </p:sp>
       <p:sp>
         <p:nvSpPr>
-          <p:cNvPr id="290" name=""/>
+          <p:cNvPr id="340" name=""/>
           <p:cNvSpPr/>
           <p:nvPr/>
         </p:nvSpPr>
@@ -12785,12 +14863,15 @@
         </p:spPr>
         <p:txBody>
           <a:bodyPr/>
-          <a:p/>
-        </p:txBody>
-      </p:sp>
-      <p:sp>
-        <p:nvSpPr>
-          <p:cNvPr id="291" name=""/>
+          <a:p>
+            <a:pPr/>
+            <a:endParaRPr/>
+          </a:p>
+        </p:txBody>
+      </p:sp>
+      <p:sp>
+        <p:nvSpPr>
+          <p:cNvPr id="341" name=""/>
           <p:cNvSpPr/>
           <p:nvPr/>
         </p:nvSpPr>
@@ -12818,12 +14899,15 @@
         </p:spPr>
         <p:txBody>
           <a:bodyPr/>
-          <a:p/>
-        </p:txBody>
-      </p:sp>
-      <p:sp>
-        <p:nvSpPr>
-          <p:cNvPr id="292" name=""/>
+          <a:p>
+            <a:pPr/>
+            <a:endParaRPr/>
+          </a:p>
+        </p:txBody>
+      </p:sp>
+      <p:sp>
+        <p:nvSpPr>
+          <p:cNvPr id="342" name=""/>
           <p:cNvSpPr/>
           <p:nvPr/>
         </p:nvSpPr>
@@ -12875,12 +14959,15 @@
         </p:spPr>
         <p:txBody>
           <a:bodyPr/>
-          <a:p/>
-        </p:txBody>
-      </p:sp>
-      <p:sp>
-        <p:nvSpPr>
-          <p:cNvPr id="293" name="" descr="{&quot;isTemplate&quot;:true,&quot;type&quot;:&quot;text&quot;}"/>
+          <a:p>
+            <a:pPr/>
+            <a:endParaRPr/>
+          </a:p>
+        </p:txBody>
+      </p:sp>
+      <p:sp>
+        <p:nvSpPr>
+          <p:cNvPr id="343" name="" descr="{&quot;isTemplate&quot;:true,&quot;type&quot;:&quot;text&quot;}"/>
           <p:cNvSpPr txBox="1"/>
           <p:nvPr/>
         </p:nvSpPr>
@@ -12915,14 +15002,14 @@
       </p:sp>
       <p:pic>
         <p:nvPicPr>
-          <p:cNvPr id="294" name=""/>
+          <p:cNvPr id="344" name=""/>
           <p:cNvPicPr>
             <a:picLocks noChangeAspect="1"/>
           </p:cNvPicPr>
           <p:nvPr/>
         </p:nvPicPr>
         <p:blipFill>
-          <a:blip r:embed="rId1">
+          <a:blip>
             <a:extLst>
               <a:ext uri="{96DAC541-7B7A-43D3-8B79-37D633B846F1}">
                 <asvg:svgBlip r:embed="rId1"/>
@@ -12946,7 +15033,7 @@
       </p:pic>
       <p:sp>
         <p:nvSpPr>
-          <p:cNvPr id="295" name="" descr="{&quot;isTemplate&quot;:true,&quot;type&quot;:&quot;text&quot;}"/>
+          <p:cNvPr id="345" name="" descr="{&quot;isTemplate&quot;:true,&quot;type&quot;:&quot;text&quot;}"/>
           <p:cNvSpPr txBox="1"/>
           <p:nvPr/>
         </p:nvSpPr>
@@ -12981,14 +15068,14 @@
       </p:sp>
       <p:pic>
         <p:nvPicPr>
-          <p:cNvPr id="296" name=""/>
+          <p:cNvPr id="346" name=""/>
           <p:cNvPicPr>
             <a:picLocks noChangeAspect="1"/>
           </p:cNvPicPr>
           <p:nvPr/>
         </p:nvPicPr>
         <p:blipFill>
-          <a:blip r:embed="rId1">
+          <a:blip>
             <a:extLst>
               <a:ext uri="{96DAC541-7B7A-43D3-8B79-37D633B846F1}">
                 <asvg:svgBlip r:embed="rId1"/>
@@ -13012,7 +15099,7 @@
       </p:pic>
       <p:sp>
         <p:nvSpPr>
-          <p:cNvPr id="297" name="" descr="{&quot;isTemplate&quot;:true,&quot;type&quot;:&quot;text&quot;}"/>
+          <p:cNvPr id="347" name="" descr="{&quot;isTemplate&quot;:true,&quot;type&quot;:&quot;text&quot;}"/>
           <p:cNvSpPr txBox="1"/>
           <p:nvPr/>
         </p:nvSpPr>
@@ -13047,14 +15134,14 @@
       </p:sp>
       <p:pic>
         <p:nvPicPr>
-          <p:cNvPr id="298" name=""/>
+          <p:cNvPr id="348" name=""/>
           <p:cNvPicPr>
             <a:picLocks noChangeAspect="1"/>
           </p:cNvPicPr>
           <p:nvPr/>
         </p:nvPicPr>
         <p:blipFill>
-          <a:blip r:embed="rId1">
+          <a:blip>
             <a:extLst>
               <a:ext uri="{96DAC541-7B7A-43D3-8B79-37D633B846F1}">
                 <asvg:svgBlip r:embed="rId1"/>
@@ -13078,7 +15165,7 @@
       </p:pic>
       <p:sp>
         <p:nvSpPr>
-          <p:cNvPr id="299" name="" descr="{&quot;isTemplate&quot;:true,&quot;type&quot;:&quot;text&quot;}"/>
+          <p:cNvPr id="349" name="" descr="{&quot;isTemplate&quot;:true,&quot;type&quot;:&quot;text&quot;}"/>
           <p:cNvSpPr txBox="1"/>
           <p:nvPr/>
         </p:nvSpPr>
@@ -13113,14 +15200,14 @@
       </p:sp>
       <p:pic>
         <p:nvPicPr>
-          <p:cNvPr id="300" name=""/>
+          <p:cNvPr id="350" name=""/>
           <p:cNvPicPr>
             <a:picLocks noChangeAspect="1"/>
           </p:cNvPicPr>
           <p:nvPr/>
         </p:nvPicPr>
         <p:blipFill>
-          <a:blip r:embed="rId1">
+          <a:blip>
             <a:extLst>
               <a:ext uri="{96DAC541-7B7A-43D3-8B79-37D633B846F1}">
                 <asvg:svgBlip r:embed="rId1"/>
@@ -13144,7 +15231,7 @@
       </p:pic>
       <p:sp>
         <p:nvSpPr>
-          <p:cNvPr id="301" name="" descr="{&quot;isTemplate&quot;:true,&quot;type&quot;:&quot;text&quot;}"/>
+          <p:cNvPr id="351" name="" descr="{&quot;isTemplate&quot;:true,&quot;type&quot;:&quot;text&quot;}"/>
           <p:cNvSpPr txBox="1"/>
           <p:nvPr/>
         </p:nvSpPr>
@@ -13179,14 +15266,14 @@
       </p:sp>
       <p:pic>
         <p:nvPicPr>
-          <p:cNvPr id="302" name=""/>
+          <p:cNvPr id="352" name=""/>
           <p:cNvPicPr>
             <a:picLocks noChangeAspect="1"/>
           </p:cNvPicPr>
           <p:nvPr/>
         </p:nvPicPr>
         <p:blipFill>
-          <a:blip r:embed="rId1">
+          <a:blip>
             <a:extLst>
               <a:ext uri="{96DAC541-7B7A-43D3-8B79-37D633B846F1}">
                 <asvg:svgBlip r:embed="rId1"/>
@@ -13210,7 +15297,7 @@
       </p:pic>
       <p:sp>
         <p:nvSpPr>
-          <p:cNvPr id="303" name="" descr="{&quot;isTemplate&quot;:true,&quot;type&quot;:&quot;text&quot;}"/>
+          <p:cNvPr id="353" name="" descr="{&quot;isTemplate&quot;:true,&quot;type&quot;:&quot;text&quot;}"/>
           <p:cNvSpPr txBox="1"/>
           <p:nvPr/>
         </p:nvSpPr>
@@ -13245,7 +15332,7 @@
       </p:sp>
       <p:sp>
         <p:nvSpPr>
-          <p:cNvPr id="304" name=""/>
+          <p:cNvPr id="354" name=""/>
           <p:cNvSpPr/>
           <p:nvPr/>
         </p:nvSpPr>
@@ -13273,12 +15360,15 @@
         </p:spPr>
         <p:txBody>
           <a:bodyPr/>
-          <a:p/>
-        </p:txBody>
-      </p:sp>
-      <p:sp>
-        <p:nvSpPr>
-          <p:cNvPr id="305" name=""/>
+          <a:p>
+            <a:pPr/>
+            <a:endParaRPr/>
+          </a:p>
+        </p:txBody>
+      </p:sp>
+      <p:sp>
+        <p:nvSpPr>
+          <p:cNvPr id="355" name=""/>
           <p:cNvSpPr/>
           <p:nvPr/>
         </p:nvSpPr>
@@ -13330,12 +15420,15 @@
         </p:spPr>
         <p:txBody>
           <a:bodyPr/>
-          <a:p/>
-        </p:txBody>
-      </p:sp>
-      <p:sp>
-        <p:nvSpPr>
-          <p:cNvPr id="306" name="" descr="{&quot;isTemplate&quot;:true,&quot;type&quot;:&quot;text&quot;}"/>
+          <a:p>
+            <a:pPr/>
+            <a:endParaRPr/>
+          </a:p>
+        </p:txBody>
+      </p:sp>
+      <p:sp>
+        <p:nvSpPr>
+          <p:cNvPr id="356" name="" descr="{&quot;isTemplate&quot;:true,&quot;type&quot;:&quot;text&quot;}"/>
           <p:cNvSpPr txBox="1"/>
           <p:nvPr/>
         </p:nvSpPr>
@@ -13370,14 +15463,14 @@
       </p:sp>
       <p:pic>
         <p:nvPicPr>
-          <p:cNvPr id="307" name=""/>
+          <p:cNvPr id="357" name=""/>
           <p:cNvPicPr>
             <a:picLocks noChangeAspect="1"/>
           </p:cNvPicPr>
           <p:nvPr/>
         </p:nvPicPr>
         <p:blipFill>
-          <a:blip r:embed="rId2">
+          <a:blip>
             <a:extLst>
               <a:ext uri="{96DAC541-7B7A-43D3-8B79-37D633B846F1}">
                 <asvg:svgBlip r:embed="rId2"/>
@@ -13401,7 +15494,7 @@
       </p:pic>
       <p:sp>
         <p:nvSpPr>
-          <p:cNvPr id="308" name="" descr="{&quot;isTemplate&quot;:true,&quot;type&quot;:&quot;text&quot;}"/>
+          <p:cNvPr id="358" name="" descr="{&quot;isTemplate&quot;:true,&quot;type&quot;:&quot;text&quot;}"/>
           <p:cNvSpPr txBox="1"/>
           <p:nvPr/>
         </p:nvSpPr>
@@ -13436,14 +15529,14 @@
       </p:sp>
       <p:pic>
         <p:nvPicPr>
-          <p:cNvPr id="309" name=""/>
+          <p:cNvPr id="359" name=""/>
           <p:cNvPicPr>
             <a:picLocks noChangeAspect="1"/>
           </p:cNvPicPr>
           <p:nvPr/>
         </p:nvPicPr>
         <p:blipFill>
-          <a:blip r:embed="rId2">
+          <a:blip>
             <a:extLst>
               <a:ext uri="{96DAC541-7B7A-43D3-8B79-37D633B846F1}">
                 <asvg:svgBlip r:embed="rId2"/>
@@ -13467,7 +15560,7 @@
       </p:pic>
       <p:sp>
         <p:nvSpPr>
-          <p:cNvPr id="310" name="" descr="{&quot;isTemplate&quot;:true,&quot;type&quot;:&quot;text&quot;}"/>
+          <p:cNvPr id="360" name="" descr="{&quot;isTemplate&quot;:true,&quot;type&quot;:&quot;text&quot;}"/>
           <p:cNvSpPr txBox="1"/>
           <p:nvPr/>
         </p:nvSpPr>
@@ -13502,14 +15595,14 @@
       </p:sp>
       <p:pic>
         <p:nvPicPr>
-          <p:cNvPr id="311" name=""/>
+          <p:cNvPr id="361" name=""/>
           <p:cNvPicPr>
             <a:picLocks noChangeAspect="1"/>
           </p:cNvPicPr>
           <p:nvPr/>
         </p:nvPicPr>
         <p:blipFill>
-          <a:blip r:embed="rId2">
+          <a:blip>
             <a:extLst>
               <a:ext uri="{96DAC541-7B7A-43D3-8B79-37D633B846F1}">
                 <asvg:svgBlip r:embed="rId2"/>
@@ -13533,7 +15626,7 @@
       </p:pic>
       <p:sp>
         <p:nvSpPr>
-          <p:cNvPr id="312" name="" descr="{&quot;isTemplate&quot;:true,&quot;type&quot;:&quot;text&quot;}"/>
+          <p:cNvPr id="362" name="" descr="{&quot;isTemplate&quot;:true,&quot;type&quot;:&quot;text&quot;}"/>
           <p:cNvSpPr txBox="1"/>
           <p:nvPr/>
         </p:nvSpPr>
@@ -13568,14 +15661,14 @@
       </p:sp>
       <p:pic>
         <p:nvPicPr>
-          <p:cNvPr id="313" name=""/>
+          <p:cNvPr id="363" name=""/>
           <p:cNvPicPr>
             <a:picLocks noChangeAspect="1"/>
           </p:cNvPicPr>
           <p:nvPr/>
         </p:nvPicPr>
         <p:blipFill>
-          <a:blip r:embed="rId2">
+          <a:blip>
             <a:extLst>
               <a:ext uri="{96DAC541-7B7A-43D3-8B79-37D633B846F1}">
                 <asvg:svgBlip r:embed="rId2"/>
@@ -13599,7 +15692,7 @@
       </p:pic>
       <p:sp>
         <p:nvSpPr>
-          <p:cNvPr id="314" name="" descr="{&quot;isTemplate&quot;:true,&quot;type&quot;:&quot;text&quot;}"/>
+          <p:cNvPr id="364" name="" descr="{&quot;isTemplate&quot;:true,&quot;type&quot;:&quot;text&quot;}"/>
           <p:cNvSpPr txBox="1"/>
           <p:nvPr/>
         </p:nvSpPr>
@@ -13634,7 +15727,7 @@
       </p:sp>
       <p:sp>
         <p:nvSpPr>
-          <p:cNvPr id="315" name=""/>
+          <p:cNvPr id="365" name=""/>
           <p:cNvSpPr/>
           <p:nvPr/>
         </p:nvSpPr>
@@ -13657,19 +15750,22 @@
         </p:spPr>
         <p:txBody>
           <a:bodyPr/>
-          <a:p/>
+          <a:p>
+            <a:pPr/>
+            <a:endParaRPr/>
+          </a:p>
         </p:txBody>
       </p:sp>
       <p:pic>
         <p:nvPicPr>
-          <p:cNvPr id="316" name=""/>
+          <p:cNvPr id="366" name=""/>
           <p:cNvPicPr>
             <a:picLocks noChangeAspect="1"/>
           </p:cNvPicPr>
           <p:nvPr/>
         </p:nvPicPr>
         <p:blipFill>
-          <a:blip r:embed="rId3">
+          <a:blip>
             <a:extLst>
               <a:ext uri="{96DAC541-7B7A-43D3-8B79-37D633B846F1}">
                 <asvg:svgBlip r:embed="rId3"/>
@@ -13693,7 +15789,7 @@
       </p:pic>
       <p:sp>
         <p:nvSpPr>
-          <p:cNvPr id="317" name="" descr="{&quot;isTemplate&quot;:true,&quot;type&quot;:&quot;text&quot;}"/>
+          <p:cNvPr id="367" name="" descr="{&quot;isTemplate&quot;:true,&quot;type&quot;:&quot;text&quot;}"/>
           <p:cNvSpPr txBox="1"/>
           <p:nvPr/>
         </p:nvSpPr>
@@ -13728,7 +15824,7 @@
       </p:sp>
       <p:sp>
         <p:nvSpPr>
-          <p:cNvPr id="318" name="" descr="{&quot;isTemplate&quot;:true,&quot;type&quot;:&quot;text&quot;}"/>
+          <p:cNvPr id="368" name="" descr="{&quot;isTemplate&quot;:true,&quot;type&quot;:&quot;text&quot;}"/>
           <p:cNvSpPr txBox="1"/>
           <p:nvPr/>
         </p:nvSpPr>
@@ -13755,7 +15851,7 @@
                 <a:latin typeface="Verdana"/>
                 <a:ea typeface="Verdana"/>
               </a:rPr>
-              <a:t>06 / 18</a:t>
+              <a:t>06 / 19</a:t>
             </a:r>
             <a:endParaRPr/>
           </a:p>
@@ -13771,7 +15867,7 @@
   <p:cSld>
     <p:spTree>
       <p:nvGrpSpPr>
-        <p:cNvPr id="319" name="" descr="&lt;Slide&#10;    style={{&#10;        width: '1280px',&#10;        height: '720px',&#10;        background: '#FAF7F2',&#10;        paddingTop: 20,&#10;        paddingBottom: 20,&#10;        paddingLeft: 64,&#10;        paddingRight: 64,&#10;    }}&#10;&gt;&#10;    {/* ── A · blok judul ── */}&#10;    &lt;Box style={{ height: 110, justifyContent: 'center' }}&gt;&#10;        &lt;Text&#10;            style={{&#10;                fontSize: 34,&#10;                fontWeight: 'bold',&#10;                color: '#51277C',&#10;                fontFamily: 'Trebuchet MS',&#10;                lineHeight: 1.3,&#10;            }}&#10;        &gt;&#10;            Kelola akun orang tua sekaligus&#10;        &lt;/Text&gt;&#10;        &lt;Box style={{ marginTop: 10, width: 72, height: 6, borderRadius: 3, background: '#51277C' }} /&gt;&#10;    &lt;/Box&gt;&#10;&#10;    {/* ── B · area konten ── */}&#10;    &lt;Box style={{ height: 530, flexDirection: 'row', gap: 30 }}&gt;&#10;        {/* kiri 55% · alur berkas → pratinjau → daftar */}&#10;        &lt;Box&#10;            style={{&#10;                width: '55%',&#10;                height: '100%',&#10;                background: 'rgba(81,39,124,0.06)',&#10;                borderRadius: 20,&#10;                justifyContent: 'center',&#10;                alignItems: 'center',&#10;            }}&#10;        &gt;&#10;            &lt;svg width={520} height={430} viewBox='0 0 520 430'&gt;&#10;                {/* langkah 1 · berkas daftar akun */}&#10;                &lt;rect x='40' y='4' width='440' height='140' rx='14' fill='#FFFFFF' stroke='#E6DFD2' strokeWidth='2' /&gt;&#10;                &lt;rect x='40' y='4' width='440' height='36' rx='14' fill='#51277C' /&gt;&#10;                &lt;rect x='40' y='24' width='440' height='16' fill='#51277C' /&gt;&#10;                &lt;text x='62' y='29' fontFamily='Verdana' fontSize='13' fill='#FFFFFF'&gt;&#10;                    Nama orang tua&#10;                &lt;/text&gt;&#10;                &lt;text x='238' y='29' fontFamily='Verdana' fontSize='13' fill='#FFFFFF'&gt;&#10;                    Username&#10;                &lt;/text&gt;&#10;                &lt;text x='368' y='29' fontFamily='Verdana' fontSize='13' fill='#FFFFFF'&gt;&#10;                    Anak&#10;                &lt;/text&gt;&#10;&#10;                &lt;rect x='62' y='56' width='150' height='10' rx='5' fill='#DED7CB' /&gt;&#10;                &lt;rect x='238' y='56' width='110' height='10' rx='5' fill='#EDE8DF' /&gt;&#10;                &lt;rect x='368' y='56' width='90' height='10' rx='5' fill='#EDE8DF' /&gt;&#10;&#10;                &lt;rect x='62' y='80' width='150' height='10' rx='5' fill='#DED7CB' /&gt;&#10;                &lt;rect x='238' y='80' width='110' height='10' rx='5' fill='#EDE8DF' /&gt;&#10;                &lt;rect x='368' y='80' width='90' height='10' rx='5' fill='#EDE8DF' /&gt;&#10;&#10;                &lt;rect x='62' y='104' width='150' height='10' rx='5' fill='#DED7CB' /&gt;&#10;                &lt;rect x='238' y='104' width='110' height='10' rx='5' fill='#EDE8DF' /&gt;&#10;                &lt;rect x='368' y='104' width='90' height='10' rx='5' fill='#EDE8DF' /&gt;&#10;&#10;                &lt;rect x='62' y='128' width='150' height='10' rx='5' fill='#AFC440' /&gt;&#10;                &lt;rect x='238' y='128' width='110' height='10' rx='5' fill='#EDE8DF' /&gt;&#10;                &lt;rect x='368' y='128' width='90' height='10' rx='5' fill='#EDE8DF' /&gt;&#10;&#10;                {/* panah */}&#10;                &lt;path d='M260 148v20' stroke='#AFC440' strokeWidth='5' strokeLinecap='round' /&gt;&#10;                &lt;path d='M250 166l10 12 10-12' fill='none' stroke='#AFC440' strokeWidth='5' strokeLinecap='round' strokeLinejoin='round' /&gt;&#10;&#10;                {/* langkah 2 · pratinjau */}&#10;                &lt;rect x='40' y='190' width='440' height='132' rx='14' fill='#FFFFFF' stroke='#E6DFD2' strokeWidth='2' /&gt;&#10;                &lt;text x='64' y='222' fontFamily='Trebuchet MS' fontSize='20' fontWeight='bold' fill='#51277C'&gt;&#10;                    Pratinjau&#10;                &lt;/text&gt;&#10;                &lt;rect x='64' y='236' width='128' height='34' rx='10' fill='rgba(175,196,64,0.25)' /&gt;&#10;                &lt;text x='128' y='258' fontFamily='Verdana' fontSize='14' fill='#3F4718' textAnchor='middle'&gt;&#10;                    Dibuat 2&#10;                &lt;/text&gt;&#10;                &lt;rect x='200' y='236' width='152' height='34' rx='10' fill='rgba(81,39,124,0.12)' /&gt;&#10;                &lt;text x='276' y='258' fontFamily='Verdana' fontSize='14' fill='#51277C' textAnchor='middle'&gt;&#10;                    Diperbarui 34&#10;                &lt;/text&gt;&#10;                &lt;rect x='360' y='236' width='104' height='34' rx='10' fill='rgba(107,100,120,0.16)' /&gt;&#10;                &lt;text x='412' y='258' fontFamily='Verdana' fontSize='14' fill='#6B6478' textAnchor='middle'&gt;&#10;                    Dilewati 1&#10;                &lt;/text&gt;&#10;                &lt;rect x='320' y='282' width='136' height='30' rx='15' fill='#51277C' /&gt;&#10;                &lt;text x='388' y='302' fontFamily='Verdana' fontSize='14' fontWeight='bold' fill='#FFFFFF' textAnchor='middle'&gt;&#10;                    Terapkan&#10;                &lt;/text&gt;&#10;&#10;                {/* panah */}&#10;                &lt;path d='M260 326v18' stroke='#AFC440' strokeWidth='5' strokeLinecap='round' /&gt;&#10;                &lt;path d='M250 342l10 12 10-12' fill='none' stroke='#AFC440' strokeWidth='5' strokeLinecap='round' strokeLinejoin='round' /&gt;&#10;&#10;                {/* langkah 3 · hasil */}&#10;                &lt;rect x='40' y='366' width='440' height='56' rx='14' fill='#51277C' /&gt;&#10;                &lt;circle cx='76' cy='394' r='17' fill='#AFC440' /&gt;&#10;                &lt;path d='M68 394l6 6 11-12' fill='none' stroke='#3F4718' strokeWidth='4' strokeLinecap='round' strokeLinejoin='round' /&gt;&#10;                &lt;text x='106' y='390' fontFamily='Trebuchet MS' fontSize='19' fontWeight='bold' fill='#FFFFFF'&gt;&#10;                    Daftar akun diperbarui&#10;                &lt;/text&gt;&#10;                &lt;text x='106' y='410' fontFamily='Verdana' fontSize='13' fill='#EFEAE1'&gt;&#10;                    Langsung bisa dipakai masuk oleh orang tua&#10;                &lt;/text&gt;&#10;            &lt;/svg&gt;&#10;        &lt;/Box&gt;&#10;&#10;        {/* kanan 45% · tiga keterangan */}&#10;        &lt;Box style={{ width: '45%', height: '100%', justifyContent: 'space-between' }}&gt;&#10;            {[&#10;                {&#10;                    t: 'Satu berkas, dua arah',&#10;                    d: 'Unduh daftar akun sebagai Excel, sunting sebanyak yang perlu, lalu unggah kembali berkas yang sama.',&#10;                    g: 'Khusus admin',&#10;                },&#10;                {&#10;                    t: 'Ada ditimpa, baru ditambah',&#10;                    d: 'Username yang sudah terdaftar diperbarui; yang belum ada dibuatkan akun baru. Sel kosong tidak mengubah apa pun.',&#10;                    g: 'Dikunci pada username',&#10;                },&#10;                {&#10;                    t: 'Pratinjau sebelum berubah',&#10;                    d: 'Layar menunjukkan lebih dulu berapa akun dibuat, diperbarui, dan dilewati. Belum ada yang tersimpan.',&#10;                    g: 'Aman diulang',&#10;                },&#10;            ].map((it, i) =&gt; (&#10;                &lt;Box&#10;                    key={i}&#10;                    style={{&#10;                        height: 166,&#10;                        background: '#FFFFFF',&#10;                        borderRadius: 16,&#10;                        boxShadow: '0 4px 20px rgba(0,0,0,0.08)',&#10;                        padding: 22,&#10;                        borderLeft: i === 2 ? '8px solid #F3B26C' : '8px solid #AFC440',&#10;                    }}&#10;                &gt;&#10;                    &lt;Text&#10;                        style={{&#10;                            fontSize: 24,&#10;                            fontWeight: 'bold',&#10;                            color: '#51277C',&#10;                            fontFamily: 'Trebuchet MS',&#10;                            lineHeight: 1.3,&#10;                        }}&#10;                    &gt;&#10;                        {it.t}&#10;                    &lt;/Text&gt;&#10;                    &lt;Text&#10;                        style={{&#10;                            marginTop: 10,&#10;                            fontSize: 17,&#10;                            color: '#6B6478',&#10;                            fontFamily: 'Verdana',&#10;                            lineHeight: 1.5,&#10;                        }}&#10;                    &gt;&#10;                        {it.d}&#10;                    &lt;/Text&gt;&#10;                    &lt;Box style={{ marginTop: 'auto' }}&gt;&#10;                        &lt;Text&#10;                            style={{&#10;                                fontSize: 16,&#10;                                color: '#51277C',&#10;                                fontFamily: 'Verdana',&#10;                                fontWeight: 'bold',&#10;                            }}&#10;                        &gt;&#10;                            {it.g}&#10;                        &lt;/Text&gt;&#10;                    &lt;/Box&gt;&#10;                &lt;/Box&gt;&#10;            ))}&#10;        &lt;/Box&gt;&#10;    &lt;/Box&gt;&#10;&#10;    {/* ── C · bilah kaki ── */}&#10;    &lt;Box&#10;        style={{&#10;            height: 40,&#10;            flexDirection: 'row',&#10;            alignItems: 'center',&#10;            justifyContent: 'space-between',&#10;        }}&#10;    &gt;&#10;        &lt;Text style={{ fontSize: 14, color: '#6B6478', fontFamily: 'Verdana' }}&gt;&#10;            Pizza Snack Play · Panduan Korlas &amp;amp; Admin&#10;        &lt;/Text&gt;&#10;        &lt;Text style={{ fontSize: 14, color: '#6B6478', fontFamily: 'Verdana' }}&gt;07 / 18&lt;/Text&gt;&#10;    &lt;/Box&gt;&#10;&lt;/Slide&gt;&#10;"/>
+        <p:cNvPr id="369" name=""/>
         <p:cNvGrpSpPr/>
         <p:nvPr/>
       </p:nvGrpSpPr>
@@ -13785,7 +15881,7 @@
       </p:grpSpPr>
       <p:sp>
         <p:nvSpPr>
-          <p:cNvPr id="320" name=""/>
+          <p:cNvPr id="370" name=""/>
           <p:cNvSpPr/>
           <p:nvPr/>
         </p:nvSpPr>
@@ -13804,12 +15900,15 @@
         </p:spPr>
         <p:txBody>
           <a:bodyPr/>
-          <a:p/>
-        </p:txBody>
-      </p:sp>
-      <p:sp>
-        <p:nvSpPr>
-          <p:cNvPr id="321" name="" descr="{&quot;isTemplate&quot;:true,&quot;type&quot;:&quot;text&quot;}"/>
+          <a:p>
+            <a:pPr/>
+            <a:endParaRPr/>
+          </a:p>
+        </p:txBody>
+      </p:sp>
+      <p:sp>
+        <p:nvSpPr>
+          <p:cNvPr id="371" name="" descr="{&quot;isTemplate&quot;:true,&quot;type&quot;:&quot;text&quot;}"/>
           <p:cNvSpPr txBox="1"/>
           <p:nvPr/>
         </p:nvSpPr>
@@ -13844,7 +15943,7 @@
       </p:sp>
       <p:sp>
         <p:nvSpPr>
-          <p:cNvPr id="322" name=""/>
+          <p:cNvPr id="372" name=""/>
           <p:cNvSpPr/>
           <p:nvPr/>
         </p:nvSpPr>
@@ -13865,12 +15964,15 @@
         </p:spPr>
         <p:txBody>
           <a:bodyPr/>
-          <a:p/>
-        </p:txBody>
-      </p:sp>
-      <p:sp>
-        <p:nvSpPr>
-          <p:cNvPr id="323" name=""/>
+          <a:p>
+            <a:pPr/>
+            <a:endParaRPr/>
+          </a:p>
+        </p:txBody>
+      </p:sp>
+      <p:sp>
+        <p:nvSpPr>
+          <p:cNvPr id="373" name=""/>
           <p:cNvSpPr/>
           <p:nvPr/>
         </p:nvSpPr>
@@ -13893,19 +15995,22 @@
         </p:spPr>
         <p:txBody>
           <a:bodyPr/>
-          <a:p/>
+          <a:p>
+            <a:pPr/>
+            <a:endParaRPr/>
+          </a:p>
         </p:txBody>
       </p:sp>
       <p:pic>
         <p:nvPicPr>
-          <p:cNvPr id="324" name=""/>
+          <p:cNvPr id="374" name=""/>
           <p:cNvPicPr>
             <a:picLocks noChangeAspect="1"/>
           </p:cNvPicPr>
           <p:nvPr/>
         </p:nvPicPr>
         <p:blipFill>
-          <a:blip r:embed="rId1">
+          <a:blip>
             <a:extLst>
               <a:ext uri="{96DAC541-7B7A-43D3-8B79-37D633B846F1}">
                 <asvg:svgBlip r:embed="rId1"/>
@@ -13929,7 +16034,7 @@
       </p:pic>
       <p:sp>
         <p:nvSpPr>
-          <p:cNvPr id="325" name=""/>
+          <p:cNvPr id="375" name=""/>
           <p:cNvSpPr/>
           <p:nvPr/>
         </p:nvSpPr>
@@ -13957,12 +16062,15 @@
         </p:spPr>
         <p:txBody>
           <a:bodyPr/>
-          <a:p/>
-        </p:txBody>
-      </p:sp>
-      <p:sp>
-        <p:nvSpPr>
-          <p:cNvPr id="326" name=""/>
+          <a:p>
+            <a:pPr/>
+            <a:endParaRPr/>
+          </a:p>
+        </p:txBody>
+      </p:sp>
+      <p:sp>
+        <p:nvSpPr>
+          <p:cNvPr id="376" name=""/>
           <p:cNvSpPr/>
           <p:nvPr/>
         </p:nvSpPr>
@@ -14014,12 +16122,15 @@
         </p:spPr>
         <p:txBody>
           <a:bodyPr/>
-          <a:p/>
-        </p:txBody>
-      </p:sp>
-      <p:sp>
-        <p:nvSpPr>
-          <p:cNvPr id="327" name="" descr="{&quot;isTemplate&quot;:true,&quot;type&quot;:&quot;text&quot;}"/>
+          <a:p>
+            <a:pPr/>
+            <a:endParaRPr/>
+          </a:p>
+        </p:txBody>
+      </p:sp>
+      <p:sp>
+        <p:nvSpPr>
+          <p:cNvPr id="377" name="" descr="{&quot;isTemplate&quot;:true,&quot;type&quot;:&quot;text&quot;}"/>
           <p:cNvSpPr txBox="1"/>
           <p:nvPr/>
         </p:nvSpPr>
@@ -14054,7 +16165,7 @@
       </p:sp>
       <p:sp>
         <p:nvSpPr>
-          <p:cNvPr id="328" name="" descr="{&quot;isTemplate&quot;:true,&quot;type&quot;:&quot;text&quot;}"/>
+          <p:cNvPr id="378" name="" descr="{&quot;isTemplate&quot;:true,&quot;type&quot;:&quot;text&quot;}"/>
           <p:cNvSpPr txBox="1"/>
           <p:nvPr/>
         </p:nvSpPr>
@@ -14091,7 +16202,7 @@
       </p:sp>
       <p:sp>
         <p:nvSpPr>
-          <p:cNvPr id="329" name="" descr="{&quot;isTemplate&quot;:true,&quot;type&quot;:&quot;text&quot;}"/>
+          <p:cNvPr id="379" name="" descr="{&quot;isTemplate&quot;:true,&quot;type&quot;:&quot;text&quot;}"/>
           <p:cNvSpPr txBox="1"/>
           <p:nvPr/>
         </p:nvSpPr>
@@ -14126,7 +16237,7 @@
       </p:sp>
       <p:sp>
         <p:nvSpPr>
-          <p:cNvPr id="330" name=""/>
+          <p:cNvPr id="380" name=""/>
           <p:cNvSpPr/>
           <p:nvPr/>
         </p:nvSpPr>
@@ -14154,12 +16265,15 @@
         </p:spPr>
         <p:txBody>
           <a:bodyPr/>
-          <a:p/>
-        </p:txBody>
-      </p:sp>
-      <p:sp>
-        <p:nvSpPr>
-          <p:cNvPr id="331" name=""/>
+          <a:p>
+            <a:pPr/>
+            <a:endParaRPr/>
+          </a:p>
+        </p:txBody>
+      </p:sp>
+      <p:sp>
+        <p:nvSpPr>
+          <p:cNvPr id="381" name=""/>
           <p:cNvSpPr/>
           <p:nvPr/>
         </p:nvSpPr>
@@ -14211,12 +16325,15 @@
         </p:spPr>
         <p:txBody>
           <a:bodyPr/>
-          <a:p/>
-        </p:txBody>
-      </p:sp>
-      <p:sp>
-        <p:nvSpPr>
-          <p:cNvPr id="332" name="" descr="{&quot;isTemplate&quot;:true,&quot;type&quot;:&quot;text&quot;}"/>
+          <a:p>
+            <a:pPr/>
+            <a:endParaRPr/>
+          </a:p>
+        </p:txBody>
+      </p:sp>
+      <p:sp>
+        <p:nvSpPr>
+          <p:cNvPr id="382" name="" descr="{&quot;isTemplate&quot;:true,&quot;type&quot;:&quot;text&quot;}"/>
           <p:cNvSpPr txBox="1"/>
           <p:nvPr/>
         </p:nvSpPr>
@@ -14251,7 +16368,7 @@
       </p:sp>
       <p:sp>
         <p:nvSpPr>
-          <p:cNvPr id="333" name="" descr="{&quot;isTemplate&quot;:true,&quot;type&quot;:&quot;text&quot;}"/>
+          <p:cNvPr id="383" name="" descr="{&quot;isTemplate&quot;:true,&quot;type&quot;:&quot;text&quot;}"/>
           <p:cNvSpPr txBox="1"/>
           <p:nvPr/>
         </p:nvSpPr>
@@ -14288,7 +16405,7 @@
       </p:sp>
       <p:sp>
         <p:nvSpPr>
-          <p:cNvPr id="334" name="" descr="{&quot;isTemplate&quot;:true,&quot;type&quot;:&quot;text&quot;}"/>
+          <p:cNvPr id="384" name="" descr="{&quot;isTemplate&quot;:true,&quot;type&quot;:&quot;text&quot;}"/>
           <p:cNvSpPr txBox="1"/>
           <p:nvPr/>
         </p:nvSpPr>
@@ -14323,7 +16440,7 @@
       </p:sp>
       <p:sp>
         <p:nvSpPr>
-          <p:cNvPr id="335" name=""/>
+          <p:cNvPr id="385" name=""/>
           <p:cNvSpPr/>
           <p:nvPr/>
         </p:nvSpPr>
@@ -14351,12 +16468,15 @@
         </p:spPr>
         <p:txBody>
           <a:bodyPr/>
-          <a:p/>
-        </p:txBody>
-      </p:sp>
-      <p:sp>
-        <p:nvSpPr>
-          <p:cNvPr id="336" name=""/>
+          <a:p>
+            <a:pPr/>
+            <a:endParaRPr/>
+          </a:p>
+        </p:txBody>
+      </p:sp>
+      <p:sp>
+        <p:nvSpPr>
+          <p:cNvPr id="386" name=""/>
           <p:cNvSpPr/>
           <p:nvPr/>
         </p:nvSpPr>
@@ -14408,12 +16528,15 @@
         </p:spPr>
         <p:txBody>
           <a:bodyPr/>
-          <a:p/>
-        </p:txBody>
-      </p:sp>
-      <p:sp>
-        <p:nvSpPr>
-          <p:cNvPr id="337" name="" descr="{&quot;isTemplate&quot;:true,&quot;type&quot;:&quot;text&quot;}"/>
+          <a:p>
+            <a:pPr/>
+            <a:endParaRPr/>
+          </a:p>
+        </p:txBody>
+      </p:sp>
+      <p:sp>
+        <p:nvSpPr>
+          <p:cNvPr id="387" name="" descr="{&quot;isTemplate&quot;:true,&quot;type&quot;:&quot;text&quot;}"/>
           <p:cNvSpPr txBox="1"/>
           <p:nvPr/>
         </p:nvSpPr>
@@ -14448,7 +16571,7 @@
       </p:sp>
       <p:sp>
         <p:nvSpPr>
-          <p:cNvPr id="338" name="" descr="{&quot;isTemplate&quot;:true,&quot;type&quot;:&quot;text&quot;}"/>
+          <p:cNvPr id="388" name="" descr="{&quot;isTemplate&quot;:true,&quot;type&quot;:&quot;text&quot;}"/>
           <p:cNvSpPr txBox="1"/>
           <p:nvPr/>
         </p:nvSpPr>
@@ -14485,7 +16608,7 @@
       </p:sp>
       <p:sp>
         <p:nvSpPr>
-          <p:cNvPr id="339" name="" descr="{&quot;isTemplate&quot;:true,&quot;type&quot;:&quot;text&quot;}"/>
+          <p:cNvPr id="389" name="" descr="{&quot;isTemplate&quot;:true,&quot;type&quot;:&quot;text&quot;}"/>
           <p:cNvSpPr txBox="1"/>
           <p:nvPr/>
         </p:nvSpPr>
@@ -14520,7 +16643,7 @@
       </p:sp>
       <p:sp>
         <p:nvSpPr>
-          <p:cNvPr id="340" name="" descr="{&quot;isTemplate&quot;:true,&quot;type&quot;:&quot;text&quot;}"/>
+          <p:cNvPr id="390" name="" descr="{&quot;isTemplate&quot;:true,&quot;type&quot;:&quot;text&quot;}"/>
           <p:cNvSpPr txBox="1"/>
           <p:nvPr/>
         </p:nvSpPr>
@@ -14555,7 +16678,7 @@
       </p:sp>
       <p:sp>
         <p:nvSpPr>
-          <p:cNvPr id="341" name="" descr="{&quot;isTemplate&quot;:true,&quot;type&quot;:&quot;text&quot;}"/>
+          <p:cNvPr id="391" name="" descr="{&quot;isTemplate&quot;:true,&quot;type&quot;:&quot;text&quot;}"/>
           <p:cNvSpPr txBox="1"/>
           <p:nvPr/>
         </p:nvSpPr>
@@ -14582,7 +16705,7 @@
                 <a:latin typeface="Verdana"/>
                 <a:ea typeface="Verdana"/>
               </a:rPr>
-              <a:t>07 / 18</a:t>
+              <a:t>07 / 19</a:t>
             </a:r>
             <a:endParaRPr/>
           </a:p>
@@ -14598,7 +16721,7 @@
   <p:cSld>
     <p:spTree>
       <p:nvGrpSpPr>
-        <p:cNvPr id="342" name=""/>
+        <p:cNvPr id="392" name=""/>
         <p:cNvGrpSpPr/>
         <p:nvPr/>
       </p:nvGrpSpPr>
@@ -14612,7 +16735,7 @@
       </p:grpSpPr>
       <p:sp>
         <p:nvSpPr>
-          <p:cNvPr id="343" name=""/>
+          <p:cNvPr id="393" name=""/>
           <p:cNvSpPr/>
           <p:nvPr/>
         </p:nvSpPr>
@@ -14647,7 +16770,7 @@
       </p:sp>
       <p:sp>
         <p:nvSpPr>
-          <p:cNvPr id="344" name=""/>
+          <p:cNvPr id="394" name=""/>
           <p:cNvSpPr/>
           <p:nvPr/>
         </p:nvSpPr>
@@ -15046,14 +17169,14 @@
       </p:sp>
       <p:pic>
         <p:nvPicPr>
-          <p:cNvPr id="345" name=""/>
+          <p:cNvPr id="395" name=""/>
           <p:cNvPicPr>
             <a:picLocks noChangeAspect="1"/>
           </p:cNvPicPr>
           <p:nvPr/>
         </p:nvPicPr>
         <p:blipFill>
-          <a:blip r:embed="rId1">
+          <a:blip>
             <a:alphaModFix amt="16000"/>
             <a:extLst>
               <a:ext uri="{96DAC541-7B7A-43D3-8B79-37D633B846F1}">
@@ -15078,7 +17201,7 @@
       </p:pic>
       <p:sp>
         <p:nvSpPr>
-          <p:cNvPr id="346" name="" descr="{&quot;isTemplate&quot;:true,&quot;type&quot;:&quot;text&quot;}"/>
+          <p:cNvPr id="396" name="" descr="{&quot;isTemplate&quot;:true,&quot;type&quot;:&quot;text&quot;}"/>
           <p:cNvSpPr txBox="1"/>
           <p:nvPr/>
         </p:nvSpPr>
@@ -15113,7 +17236,7 @@
       </p:sp>
       <p:sp>
         <p:nvSpPr>
-          <p:cNvPr id="347" name=""/>
+          <p:cNvPr id="397" name=""/>
           <p:cNvSpPr/>
           <p:nvPr/>
         </p:nvSpPr>
@@ -15142,7 +17265,7 @@
       </p:sp>
       <p:sp>
         <p:nvSpPr>
-          <p:cNvPr id="348" name="" descr="{&quot;isTemplate&quot;:true,&quot;type&quot;:&quot;text&quot;}"/>
+          <p:cNvPr id="398" name="" descr="{&quot;isTemplate&quot;:true,&quot;type&quot;:&quot;text&quot;}"/>
           <p:cNvSpPr txBox="1"/>
           <p:nvPr/>
         </p:nvSpPr>
@@ -15179,7 +17302,7 @@
       </p:sp>
       <p:sp>
         <p:nvSpPr>
-          <p:cNvPr id="349" name="" descr="{&quot;isTemplate&quot;:true,&quot;type&quot;:&quot;text&quot;}"/>
+          <p:cNvPr id="399" name="" descr="{&quot;isTemplate&quot;:true,&quot;type&quot;:&quot;text&quot;}"/>
           <p:cNvSpPr txBox="1"/>
           <p:nvPr/>
         </p:nvSpPr>
@@ -15232,7 +17355,7 @@
       </p:sp>
       <p:sp>
         <p:nvSpPr>
-          <p:cNvPr id="350" name="" descr="{&quot;isTemplate&quot;:true,&quot;type&quot;:&quot;text&quot;}"/>
+          <p:cNvPr id="400" name="" descr="{&quot;isTemplate&quot;:true,&quot;type&quot;:&quot;text&quot;}"/>
           <p:cNvSpPr txBox="1"/>
           <p:nvPr/>
         </p:nvSpPr>
@@ -15279,7 +17402,7 @@
   <p:cSld>
     <p:spTree>
       <p:nvGrpSpPr>
-        <p:cNvPr id="351" name="" descr="&lt;Slide&#10;    style={{&#10;        width: '1280px',&#10;        height: '720px',&#10;        background: '#FAF7F2',&#10;        paddingTop: 20,&#10;        paddingBottom: 20,&#10;        paddingLeft: 64,&#10;        paddingRight: 64,&#10;    }}&#10;&gt;&#10;    {/* ── A · blok judul ── */}&#10;    &lt;Box style={{ height: 110, justifyContent: 'center' }}&gt;&#10;        &lt;Text&#10;            style={{&#10;                fontSize: 34,&#10;                fontWeight: 'bold',&#10;                color: '#51277C',&#10;                fontFamily: 'Trebuchet MS',&#10;                lineHeight: 1.3,&#10;            }}&#10;        &gt;&#10;            Isi menu per hari&#10;        &lt;/Text&gt;&#10;        &lt;Box style={{ marginTop: 10, width: 72, height: 6, borderRadius: 3, background: '#51277C' }} /&gt;&#10;    &lt;/Box&gt;&#10;&#10;    {/* ── B · area konten ── */}&#10;    &lt;Box style={{ height: 530 }}&gt;&#10;        {/* atas · ilustrasi tabel jadwal */}&#10;        &lt;Box&#10;            style={{&#10;                height: 306,&#10;                background: 'rgba(81,39,124,0.06)',&#10;                borderRadius: 20,&#10;                justifyContent: 'center',&#10;                alignItems: 'center',&#10;            }}&#10;        &gt;&#10;            &lt;svg width={1100} height={270} viewBox='0 0 1100 270'&gt;&#10;                &lt;rect x='6' y='6' width='1088' height='46' rx='10' fill='#51277C' /&gt;&#10;                &lt;text x='46' y='37' fontFamily='Trebuchet MS' fontSize='20' fontWeight='bold' fill='#FFFFFF'&gt;&#10;                    Tanggal&#10;                &lt;/text&gt;&#10;                &lt;text x='330' y='37' fontFamily='Trebuchet MS' fontSize='20' fontWeight='bold' fill='#FFFFFF'&gt;&#10;                    Menu&#10;                &lt;/text&gt;&#10;                &lt;text x='760' y='37' fontFamily='Trebuchet MS' fontSize='20' fontWeight='bold' fill='#FFFFFF'&gt;&#10;                    Petugas&#10;                &lt;/text&gt;&#10;                &lt;text x='990' y='37' fontFamily='Trebuchet MS' fontSize='20' fontWeight='bold' fill='#FFFFFF'&gt;&#10;                    Status&#10;                &lt;/text&gt;&#10;&#10;                {/* Senin */}&#10;                &lt;rect x='6' y='60' width='1088' height='46' rx='10' fill='#FFFFFF' stroke='#E6DFD2' strokeWidth='2' /&gt;&#10;                &lt;text x='46' y='90' fontFamily='Verdana' fontSize='16' fill='#51277C'&gt;Senin, 5&lt;/text&gt;&#10;                &lt;text x='330' y='90' fontFamily='Verdana' fontSize='16' fill='#2A2333'&gt;Roti coklat + jeruk&lt;/text&gt;&#10;                &lt;text x='760' y='90' fontFamily='Verdana' fontSize='16' fill='#6B6478'&gt;Rafa&lt;/text&gt;&#10;                &lt;rect x='940' y='71' width='118' height='24' rx='12' fill='#DED7CB' /&gt;&#10;                &lt;text x='999' y='88' fontFamily='Verdana' fontSize='13' fill='#51277C' textAnchor='middle'&gt;bisa diubah&lt;/text&gt;&#10;&#10;                {/* Selasa */}&#10;                &lt;rect x='6' y='112' width='1088' height='46' rx='10' fill='#FFFFFF' stroke='#E6DFD2' strokeWidth='2' /&gt;&#10;                &lt;text x='46' y='142' fontFamily='Verdana' fontSize='16' fill='#51277C'&gt;Selasa, 6&lt;/text&gt;&#10;                &lt;text x='330' y='142' fontFamily='Verdana' fontSize='16' fill='#2A2333'&gt;Puding + pisang&lt;/text&gt;&#10;                &lt;text x='760' y='142' fontFamily='Verdana' fontSize='16' fill='#6B6478'&gt;—&lt;/text&gt;&#10;                &lt;rect x='940' y='123' width='118' height='24' rx='12' fill='#DED7CB' /&gt;&#10;                &lt;text x='999' y='140' fontFamily='Verdana' fontSize='13' fill='#51277C' textAnchor='middle'&gt;bisa diubah&lt;/text&gt;&#10;&#10;                {/* Rabu — libur */}&#10;                &lt;rect x='6' y='164' width='1088' height='46' rx='10' fill='#FFFFFF' stroke='#F3B26C' strokeWidth='2' /&gt;&#10;                &lt;text x='46' y='194' fontFamily='Verdana' fontSize='16' fill='#51277C'&gt;Rabu, 7&lt;/text&gt;&#10;                &lt;text x='330' y='194' fontFamily='Verdana' fontSize='16' fill='#2A2333'&gt;Libur&lt;/text&gt;&#10;                &lt;text x='760' y='194' fontFamily='Verdana' fontSize='16' fill='#6B6478'&gt;—&lt;/text&gt;&#10;                &lt;rect x='940' y='175' width='118' height='24' rx='12' fill='#F3B26C' /&gt;&#10;                &lt;text x='999' y='192' fontFamily='Verdana' fontSize='13' fill='#51277C' textAnchor='middle'&gt;libur&lt;/text&gt;&#10;&#10;                {/* Kamis — petugas kosong */}&#10;                &lt;rect x='6' y='216' width='1088' height='46' rx='10' fill='#FFFFFF' stroke='#AFC440' strokeWidth='3' /&gt;&#10;                &lt;text x='46' y='246' fontFamily='Verdana' fontSize='16' fill='#51277C'&gt;Kamis, 8&lt;/text&gt;&#10;                &lt;text x='330' y='246' fontFamily='Verdana' fontSize='16' fill='#2A2333'&gt;Donat + melon&lt;/text&gt;&#10;                &lt;text x='760' y='246' fontFamily='Verdana' fontSize='16' fill='#6B6478'&gt;—&lt;/text&gt;&#10;                &lt;rect x='940' y='227' width='118' height='24' rx='12' fill='#AFC440' /&gt;&#10;                &lt;text x='999' y='244' fontFamily='Verdana' fontSize='13' fill='#3F4718' textAnchor='middle'&gt;petugas kosong&lt;/text&gt;&#10;            &lt;/svg&gt;&#10;        &lt;/Box&gt;&#10;&#10;        {/* bawah · dua kartu 60:40 */}&#10;        &lt;Box style={{ marginTop: 18, height: 206, flexDirection: 'row', gap: 24 }}&gt;&#10;            &lt;Box&#10;                style={{&#10;                    width: '60%',&#10;                    background: '#FFFFFF',&#10;                    borderRadius: 16,&#10;                    boxShadow: '0 4px 20px rgba(0,0,0,0.08)',&#10;                    padding: 24,&#10;                    borderLeft: '8px solid #AFC440',&#10;                }}&#10;            &gt;&#10;                &lt;Text&#10;                    style={{&#10;                        fontSize: 26,&#10;                        fontWeight: 'bold',&#10;                        color: '#51277C',&#10;                        fontFamily: 'Trebuchet MS',&#10;                    }}&#10;                &gt;&#10;                    Pilih menu di setiap tanggal&#10;                &lt;/Text&gt;&#10;                &lt;Text&#10;                    style={{&#10;                        marginTop: 10,&#10;                        fontSize: 18,&#10;                        color: '#6B6478',&#10;                        fontFamily: 'Verdana',&#10;                        lineHeight: 1.5,&#10;                    }}&#10;                &gt;&#10;                    Satu hari berisi makanan utama dan buah pendamping. Hari yang tidak masuk&#10;                    sekolah cukup ditandai libur — menunya tidak perlu diisi.&#10;                &lt;/Text&gt;&#10;            &lt;/Box&gt;&#10;&#10;            &lt;Box&#10;                style={{&#10;                    width: '40%',&#10;                    background: '#FFFFFF',&#10;                    borderRadius: 16,&#10;                    boxShadow: '0 4px 20px rgba(0,0,0,0.08)',&#10;                    padding: 24,&#10;                    borderLeft: '8px solid #F3B26C',&#10;                }}&#10;            &gt;&#10;                &lt;Text&#10;                    style={{&#10;                        fontSize: 26,&#10;                        fontWeight: 'bold',&#10;                        color: '#51277C',&#10;                        fontFamily: 'Trebuchet MS',&#10;                    }}&#10;                &gt;&#10;                    Salin Sepekan&#10;                &lt;/Text&gt;&#10;                &lt;Text&#10;                    style={{&#10;                        marginTop: 10,&#10;                        fontSize: 18,&#10;                        color: '#6B6478',&#10;                        fontFamily: 'Verdana',&#10;                        lineHeight: 1.5,&#10;                    }}&#10;                &gt;&#10;                    Duplikasi Senin–Jumat ke minggu lain. Tanggal yang sudah terisi dilewati.&#10;                &lt;/Text&gt;&#10;            &lt;/Box&gt;&#10;        &lt;/Box&gt;&#10;    &lt;/Box&gt;&#10;&#10;    {/* ── C · bilah kaki ── */}&#10;    &lt;Box&#10;        style={{&#10;            height: 40,&#10;            flexDirection: 'row',&#10;            alignItems: 'center',&#10;            justifyContent: 'space-between',&#10;        }}&#10;    &gt;&#10;        &lt;Text style={{ fontSize: 14, color: '#6B6478', fontFamily: 'Verdana' }}&gt;&#10;            Pizza Snack Play · Panduan Korlas &amp;amp; Admin&#10;        &lt;/Text&gt;&#10;        &lt;Text style={{ fontSize: 14, color: '#6B6478', fontFamily: 'Verdana' }}&gt;09 / 18&lt;/Text&gt;&#10;    &lt;/Box&gt;&#10;&lt;/Slide&gt;&#10;"/>
+        <p:cNvPr id="401" name=""/>
         <p:cNvGrpSpPr/>
         <p:nvPr/>
       </p:nvGrpSpPr>
@@ -15293,7 +17416,7 @@
       </p:grpSpPr>
       <p:sp>
         <p:nvSpPr>
-          <p:cNvPr id="352" name=""/>
+          <p:cNvPr id="402" name=""/>
           <p:cNvSpPr/>
           <p:nvPr/>
         </p:nvSpPr>
@@ -15312,12 +17435,15 @@
         </p:spPr>
         <p:txBody>
           <a:bodyPr/>
-          <a:p/>
-        </p:txBody>
-      </p:sp>
-      <p:sp>
-        <p:nvSpPr>
-          <p:cNvPr id="353" name="" descr="{&quot;isTemplate&quot;:true,&quot;type&quot;:&quot;text&quot;}"/>
+          <a:p>
+            <a:pPr/>
+            <a:endParaRPr/>
+          </a:p>
+        </p:txBody>
+      </p:sp>
+      <p:sp>
+        <p:nvSpPr>
+          <p:cNvPr id="403" name="" descr="{&quot;isTemplate&quot;:true,&quot;type&quot;:&quot;text&quot;}"/>
           <p:cNvSpPr txBox="1"/>
           <p:nvPr/>
         </p:nvSpPr>
@@ -15352,7 +17478,7 @@
       </p:sp>
       <p:sp>
         <p:nvSpPr>
-          <p:cNvPr id="354" name=""/>
+          <p:cNvPr id="404" name=""/>
           <p:cNvSpPr/>
           <p:nvPr/>
         </p:nvSpPr>
@@ -15373,12 +17499,15 @@
         </p:spPr>
         <p:txBody>
           <a:bodyPr/>
-          <a:p/>
-        </p:txBody>
-      </p:sp>
-      <p:sp>
-        <p:nvSpPr>
-          <p:cNvPr id="355" name=""/>
+          <a:p>
+            <a:pPr/>
+            <a:endParaRPr/>
+          </a:p>
+        </p:txBody>
+      </p:sp>
+      <p:sp>
+        <p:nvSpPr>
+          <p:cNvPr id="405" name=""/>
           <p:cNvSpPr/>
           <p:nvPr/>
         </p:nvSpPr>
@@ -15401,19 +17530,22 @@
         </p:spPr>
         <p:txBody>
           <a:bodyPr/>
-          <a:p/>
+          <a:p>
+            <a:pPr/>
+            <a:endParaRPr/>
+          </a:p>
         </p:txBody>
       </p:sp>
       <p:pic>
         <p:nvPicPr>
-          <p:cNvPr id="356" name=""/>
+          <p:cNvPr id="406" name=""/>
           <p:cNvPicPr>
             <a:picLocks noChangeAspect="1"/>
           </p:cNvPicPr>
           <p:nvPr/>
         </p:nvPicPr>
         <p:blipFill>
-          <a:blip r:embed="rId1">
+          <a:blip>
             <a:extLst>
               <a:ext uri="{96DAC541-7B7A-43D3-8B79-37D633B846F1}">
                 <asvg:svgBlip r:embed="rId1"/>
@@ -15437,7 +17569,7 @@
       </p:pic>
       <p:sp>
         <p:nvSpPr>
-          <p:cNvPr id="357" name=""/>
+          <p:cNvPr id="407" name=""/>
           <p:cNvSpPr/>
           <p:nvPr/>
         </p:nvSpPr>
@@ -15465,12 +17597,15 @@
         </p:spPr>
         <p:txBody>
           <a:bodyPr/>
-          <a:p/>
-        </p:txBody>
-      </p:sp>
-      <p:sp>
-        <p:nvSpPr>
-          <p:cNvPr id="358" name=""/>
+          <a:p>
+            <a:pPr/>
+            <a:endParaRPr/>
+          </a:p>
+        </p:txBody>
+      </p:sp>
+      <p:sp>
+        <p:nvSpPr>
+          <p:cNvPr id="408" name=""/>
           <p:cNvSpPr/>
           <p:nvPr/>
         </p:nvSpPr>
@@ -15522,12 +17657,15 @@
         </p:spPr>
         <p:txBody>
           <a:bodyPr/>
-          <a:p/>
-        </p:txBody>
-      </p:sp>
-      <p:sp>
-        <p:nvSpPr>
-          <p:cNvPr id="359" name="" descr="{&quot;isTemplate&quot;:true,&quot;type&quot;:&quot;text&quot;}"/>
+          <a:p>
+            <a:pPr/>
+            <a:endParaRPr/>
+          </a:p>
+        </p:txBody>
+      </p:sp>
+      <p:sp>
+        <p:nvSpPr>
+          <p:cNvPr id="409" name="" descr="{&quot;isTemplate&quot;:true,&quot;type&quot;:&quot;text&quot;}"/>
           <p:cNvSpPr txBox="1"/>
           <p:nvPr/>
         </p:nvSpPr>
@@ -15562,7 +17700,7 @@
       </p:sp>
       <p:sp>
         <p:nvSpPr>
-          <p:cNvPr id="360" name="" descr="{&quot;isTemplate&quot;:true,&quot;type&quot;:&quot;text&quot;}"/>
+          <p:cNvPr id="410" name="" descr="{&quot;isTemplate&quot;:true,&quot;type&quot;:&quot;text&quot;}"/>
           <p:cNvSpPr txBox="1"/>
           <p:nvPr/>
         </p:nvSpPr>
@@ -15599,7 +17737,7 @@
       </p:sp>
       <p:sp>
         <p:nvSpPr>
-          <p:cNvPr id="361" name=""/>
+          <p:cNvPr id="411" name=""/>
           <p:cNvSpPr/>
           <p:nvPr/>
         </p:nvSpPr>
@@ -15627,12 +17765,15 @@
         </p:spPr>
         <p:txBody>
           <a:bodyPr/>
-          <a:p/>
-        </p:txBody>
-      </p:sp>
-      <p:sp>
-        <p:nvSpPr>
-          <p:cNvPr id="362" name=""/>
+          <a:p>
+            <a:pPr/>
+            <a:endParaRPr/>
+          </a:p>
+        </p:txBody>
+      </p:sp>
+      <p:sp>
+        <p:nvSpPr>
+          <p:cNvPr id="412" name=""/>
           <p:cNvSpPr/>
           <p:nvPr/>
         </p:nvSpPr>
@@ -15684,12 +17825,15 @@
         </p:spPr>
         <p:txBody>
           <a:bodyPr/>
-          <a:p/>
-        </p:txBody>
-      </p:sp>
-      <p:sp>
-        <p:nvSpPr>
-          <p:cNvPr id="363" name="" descr="{&quot;isTemplate&quot;:true,&quot;type&quot;:&quot;text&quot;}"/>
+          <a:p>
+            <a:pPr/>
+            <a:endParaRPr/>
+          </a:p>
+        </p:txBody>
+      </p:sp>
+      <p:sp>
+        <p:nvSpPr>
+          <p:cNvPr id="413" name="" descr="{&quot;isTemplate&quot;:true,&quot;type&quot;:&quot;text&quot;}"/>
           <p:cNvSpPr txBox="1"/>
           <p:nvPr/>
         </p:nvSpPr>
@@ -15724,7 +17868,7 @@
       </p:sp>
       <p:sp>
         <p:nvSpPr>
-          <p:cNvPr id="364" name="" descr="{&quot;isTemplate&quot;:true,&quot;type&quot;:&quot;text&quot;}"/>
+          <p:cNvPr id="414" name="" descr="{&quot;isTemplate&quot;:true,&quot;type&quot;:&quot;text&quot;}"/>
           <p:cNvSpPr txBox="1"/>
           <p:nvPr/>
         </p:nvSpPr>
@@ -15761,7 +17905,7 @@
       </p:sp>
       <p:sp>
         <p:nvSpPr>
-          <p:cNvPr id="365" name="" descr="{&quot;isTemplate&quot;:true,&quot;type&quot;:&quot;text&quot;}"/>
+          <p:cNvPr id="415" name="" descr="{&quot;isTemplate&quot;:true,&quot;type&quot;:&quot;text&quot;}"/>
           <p:cNvSpPr txBox="1"/>
           <p:nvPr/>
         </p:nvSpPr>
@@ -15796,7 +17940,7 @@
       </p:sp>
       <p:sp>
         <p:nvSpPr>
-          <p:cNvPr id="366" name="" descr="{&quot;isTemplate&quot;:true,&quot;type&quot;:&quot;text&quot;}"/>
+          <p:cNvPr id="416" name="" descr="{&quot;isTemplate&quot;:true,&quot;type&quot;:&quot;text&quot;}"/>
           <p:cNvSpPr txBox="1"/>
           <p:nvPr/>
         </p:nvSpPr>
@@ -15823,7 +17967,7 @@
                 <a:latin typeface="Verdana"/>
                 <a:ea typeface="Verdana"/>
               </a:rPr>
-              <a:t>09 / 18</a:t>
+              <a:t>09 / 19</a:t>
             </a:r>
             <a:endParaRPr/>
           </a:p>
